--- a/working-output.pptx
+++ b/working-output.pptx
@@ -4588,7 +4588,7 @@
             <a:pPr algn="ctr"/>
             <a:r>
               <a:rPr lang="en-US"/>
-              <a:t>9/23/26</a:t>
+              <a:t>DATE</a:t>
             </a:r>
             <a:endParaRPr lang="en-US" dirty="0"/>
           </a:p>
@@ -4801,7 +4801,7 @@
             <a:pPr algn="ctr"/>
             <a:r>
               <a:rPr lang="en-US"/>
-              <a:t>9/23/26</a:t>
+              <a:t>DATE</a:t>
             </a:r>
             <a:endParaRPr lang="en-US" dirty="0"/>
           </a:p>
@@ -5058,7 +5058,7 @@
             <a:pPr algn="ctr"/>
             <a:r>
               <a:rPr lang="en-US"/>
-              <a:t>9/23/26</a:t>
+              <a:t>DATE</a:t>
             </a:r>
             <a:endParaRPr lang="en-US" dirty="0"/>
           </a:p>
@@ -5305,7 +5305,7 @@
             <a:pPr algn="ctr"/>
             <a:r>
               <a:rPr lang="en-US"/>
-              <a:t>9/23/26</a:t>
+              <a:t>DATE</a:t>
             </a:r>
             <a:endParaRPr lang="en-US" dirty="0"/>
           </a:p>
@@ -5629,7 +5629,7 @@
             <a:pPr algn="ctr"/>
             <a:r>
               <a:rPr lang="en-US"/>
-              <a:t>9/23/26</a:t>
+              <a:t>DATE</a:t>
             </a:r>
             <a:endParaRPr lang="en-US" dirty="0"/>
           </a:p>
@@ -5993,7 +5993,7 @@
             <a:pPr algn="ctr"/>
             <a:r>
               <a:rPr lang="en-US"/>
-              <a:t>9/23/26</a:t>
+              <a:t>DATE</a:t>
             </a:r>
             <a:endParaRPr lang="en-US" dirty="0"/>
           </a:p>
@@ -6491,7 +6491,7 @@
             <a:pPr algn="ctr"/>
             <a:r>
               <a:rPr lang="en-US"/>
-              <a:t>9/23/26</a:t>
+              <a:t>DATE</a:t>
             </a:r>
             <a:endParaRPr lang="en-US" dirty="0"/>
           </a:p>
@@ -6687,7 +6687,7 @@
             <a:pPr algn="ctr"/>
             <a:r>
               <a:rPr lang="en-US"/>
-              <a:t>9/23/26</a:t>
+              <a:t>DATE</a:t>
             </a:r>
             <a:endParaRPr lang="en-US" dirty="0"/>
           </a:p>
@@ -6861,7 +6861,7 @@
             <a:pPr algn="ctr"/>
             <a:r>
               <a:rPr lang="en-US"/>
-              <a:t>9/23/26</a:t>
+              <a:t>DATE</a:t>
             </a:r>
             <a:endParaRPr lang="en-US" dirty="0"/>
           </a:p>
@@ -7215,7 +7215,7 @@
             <a:pPr algn="ctr"/>
             <a:r>
               <a:rPr lang="en-US"/>
-              <a:t>9/23/26</a:t>
+              <a:t>DATE</a:t>
             </a:r>
             <a:endParaRPr lang="en-US" dirty="0"/>
           </a:p>
@@ -7546,7 +7546,7 @@
             <a:pPr algn="ctr"/>
             <a:r>
               <a:rPr lang="en-US"/>
-              <a:t>9/23/26</a:t>
+              <a:t>DATE</a:t>
             </a:r>
             <a:endParaRPr lang="en-US" dirty="0"/>
           </a:p>
@@ -7830,7 +7830,7 @@
             <a:pPr algn="ctr"/>
             <a:r>
               <a:rPr lang="en-US"/>
-              <a:t>9/23/26</a:t>
+              <a:t>DATE</a:t>
             </a:r>
             <a:endParaRPr dirty="0" lang="en-US"/>
           </a:p>
@@ -8494,7 +8494,7 @@
             <a:pPr algn="ctr"/>
             <a:r>
               <a:rPr lang="en-US"/>
-              <a:t>June 9, 2022</a:t>
+              <a:t>September 30, 2020</a:t>
             </a:r>
             <a:endParaRPr dirty="0" lang="en-US"/>
           </a:p>
@@ -8717,7 +8717,7 @@
             <a:pPr algn="ctr"/>
             <a:r>
               <a:rPr lang="en-US"/>
-              <a:t>June 9, 2022</a:t>
+              <a:t>September 30, 2020</a:t>
             </a:r>
             <a:endParaRPr dirty="0" lang="en-US"/>
           </a:p>
@@ -8858,7 +8858,7 @@
             <a:pPr algn="ctr"/>
             <a:r>
               <a:rPr lang="en-US"/>
-              <a:t>June 9, 2022</a:t>
+              <a:t>September 30, 2020</a:t>
             </a:r>
             <a:endParaRPr dirty="0" lang="en-US"/>
           </a:p>
@@ -9035,7 +9035,7 @@
             <a:pPr algn="ctr"/>
             <a:r>
               <a:rPr lang="en-US"/>
-              <a:t>June 9, 2022</a:t>
+              <a:t>September 30, 2020</a:t>
             </a:r>
             <a:endParaRPr dirty="0" lang="en-US"/>
           </a:p>
@@ -9458,7 +9458,7 @@
             <a:pPr algn="ctr"/>
             <a:r>
               <a:rPr lang="en-US"/>
-              <a:t>June 9, 2022</a:t>
+              <a:t>September 30, 2020</a:t>
             </a:r>
             <a:endParaRPr dirty="0" lang="en-US"/>
           </a:p>
@@ -9902,7 +9902,7 @@
             <a:pPr algn="ctr"/>
             <a:r>
               <a:rPr lang="en-US"/>
-              <a:t>June 9, 2022</a:t>
+              <a:t>September 30, 2020</a:t>
             </a:r>
             <a:endParaRPr dirty="0" lang="en-US"/>
           </a:p>
@@ -10134,7 +10134,7 @@
             <a:pPr algn="ctr"/>
             <a:r>
               <a:rPr lang="en-US"/>
-              <a:t>June 9, 2022</a:t>
+              <a:t>September 30, 2020</a:t>
             </a:r>
             <a:endParaRPr dirty="0" lang="en-US"/>
           </a:p>
@@ -10722,7 +10722,7 @@
             <a:pPr algn="ctr"/>
             <a:r>
               <a:rPr lang="en-US"/>
-              <a:t>June 9, 2022</a:t>
+              <a:t>September 30, 2020</a:t>
             </a:r>
             <a:endParaRPr dirty="0" lang="en-US"/>
           </a:p>
@@ -11287,7 +11287,7 @@
             <a:pPr algn="ctr"/>
             <a:r>
               <a:rPr lang="en-US"/>
-              <a:t>June 9, 2022</a:t>
+              <a:t>September 30, 2020</a:t>
             </a:r>
             <a:endParaRPr dirty="0" lang="en-US"/>
           </a:p>
@@ -11498,7 +11498,7 @@
             <a:pPr algn="ctr"/>
             <a:r>
               <a:rPr lang="en-US"/>
-              <a:t>June 9, 2022</a:t>
+              <a:t>September 30, 2020</a:t>
             </a:r>
             <a:endParaRPr dirty="0" lang="en-US"/>
           </a:p>
@@ -11770,7 +11770,7 @@
             <a:pPr algn="ctr"/>
             <a:r>
               <a:rPr lang="en-US"/>
-              <a:t>June 9, 2022</a:t>
+              <a:t>September 30, 2020</a:t>
             </a:r>
             <a:endParaRPr dirty="0" lang="en-US"/>
           </a:p>
@@ -11993,7 +11993,7 @@
             <a:pPr algn="ctr"/>
             <a:r>
               <a:rPr lang="en-US"/>
-              <a:t>June 9, 2022</a:t>
+              <a:t>September 30, 2020</a:t>
             </a:r>
             <a:endParaRPr dirty="0" lang="en-US"/>
           </a:p>
@@ -12293,7 +12293,7 @@
             <a:pPr algn="ctr"/>
             <a:r>
               <a:rPr lang="en-US"/>
-              <a:t>June 9, 2022</a:t>
+              <a:t>September 30, 2020</a:t>
             </a:r>
             <a:endParaRPr dirty="0" lang="en-US"/>
           </a:p>
@@ -12765,7 +12765,7 @@
             <a:pPr algn="ctr"/>
             <a:r>
               <a:rPr lang="en-US"/>
-              <a:t>June 9, 2022</a:t>
+              <a:t>September 30, 2020</a:t>
             </a:r>
             <a:endParaRPr dirty="0" lang="en-US"/>
           </a:p>
@@ -13356,7 +13356,7 @@
             <a:pPr algn="ctr"/>
             <a:r>
               <a:rPr lang="en-US"/>
-              <a:t>June 9, 2022</a:t>
+              <a:t>September 30, 2020</a:t>
             </a:r>
             <a:endParaRPr dirty="0" lang="en-US"/>
           </a:p>
@@ -14124,7 +14124,7 @@
             <a:pPr algn="ctr"/>
             <a:r>
               <a:rPr lang="en-US"/>
-              <a:t>June 9, 2022</a:t>
+              <a:t>September 30, 2020</a:t>
             </a:r>
             <a:endParaRPr dirty="0" lang="en-US"/>
           </a:p>
@@ -14493,7 +14493,7 @@
             <a:pPr algn="ctr"/>
             <a:r>
               <a:rPr lang="en-US"/>
-              <a:t>June 9, 2022</a:t>
+              <a:t>September 30, 2020</a:t>
             </a:r>
             <a:endParaRPr dirty="0" lang="en-US"/>
           </a:p>
@@ -14667,7 +14667,7 @@
             <a:pPr algn="ctr"/>
             <a:r>
               <a:rPr lang="en-US"/>
-              <a:t>June 9, 2022</a:t>
+              <a:t>September 30, 2020</a:t>
             </a:r>
             <a:endParaRPr dirty="0" lang="en-US"/>
           </a:p>
@@ -14892,7 +14892,7 @@
             <a:pPr algn="ctr"/>
             <a:r>
               <a:rPr lang="en-US"/>
-              <a:t>June 9, 2022</a:t>
+              <a:t>September 30, 2020</a:t>
             </a:r>
             <a:endParaRPr dirty="0" lang="en-US"/>
           </a:p>
@@ -15321,7 +15321,7 @@
             <a:pPr algn="ctr"/>
             <a:r>
               <a:rPr lang="en-US"/>
-              <a:t>June 9, 2022</a:t>
+              <a:t>September 30, 2020</a:t>
             </a:r>
             <a:endParaRPr dirty="0" lang="en-US"/>
           </a:p>
@@ -15789,7 +15789,7 @@
             <a:pPr algn="ctr"/>
             <a:r>
               <a:rPr lang="en-US"/>
-              <a:t>June 9, 2022</a:t>
+              <a:t>September 30, 2020</a:t>
             </a:r>
             <a:endParaRPr dirty="0" lang="en-US"/>
           </a:p>
@@ -15935,7 +15935,7 @@
             <a:pPr algn="ctr"/>
             <a:r>
               <a:rPr lang="en-US"/>
-              <a:t>June 9, 2022</a:t>
+              <a:t>September 30, 2020</a:t>
             </a:r>
             <a:endParaRPr dirty="0" lang="en-US"/>
           </a:p>
@@ -16081,7 +16081,7 @@
             <a:pPr algn="ctr"/>
             <a:r>
               <a:rPr lang="en-US"/>
-              <a:t>June 9, 2022</a:t>
+              <a:t>September 30, 2020</a:t>
             </a:r>
             <a:endParaRPr dirty="0" lang="en-US"/>
           </a:p>
@@ -16271,7 +16271,7 @@
             <a:pPr algn="ctr"/>
             <a:r>
               <a:rPr lang="en-US"/>
-              <a:t>June 9, 2022</a:t>
+              <a:t>September 30, 2020</a:t>
             </a:r>
             <a:endParaRPr dirty="0" lang="en-US"/>
           </a:p>
@@ -16622,7 +16622,7 @@
             <a:pPr algn="ctr"/>
             <a:r>
               <a:rPr lang="en-US"/>
-              <a:t>June 9, 2022</a:t>
+              <a:t>September 30, 2020</a:t>
             </a:r>
             <a:endParaRPr dirty="0" lang="en-US"/>
           </a:p>
@@ -16864,7 +16864,7 @@
             <a:pPr algn="ctr"/>
             <a:r>
               <a:rPr lang="en-US"/>
-              <a:t>June 9, 2022</a:t>
+              <a:t>September 30, 2020</a:t>
             </a:r>
             <a:endParaRPr dirty="0" lang="en-US"/>
           </a:p>
@@ -17195,7 +17195,7 @@
             <a:pPr algn="ctr"/>
             <a:r>
               <a:rPr lang="en-US"/>
-              <a:t>June 9, 2022</a:t>
+              <a:t>September 30, 2020</a:t>
             </a:r>
             <a:endParaRPr dirty="0" lang="en-US"/>
           </a:p>
@@ -17693,7 +17693,7 @@
             <a:pPr algn="ctr"/>
             <a:r>
               <a:rPr lang="en-US"/>
-              <a:t>June 9, 2022</a:t>
+              <a:t>September 30, 2020</a:t>
             </a:r>
             <a:endParaRPr dirty="0" lang="en-US"/>
           </a:p>
@@ -18192,7 +18192,7 @@
             <a:pPr algn="ctr"/>
             <a:r>
               <a:rPr lang="en-US"/>
-              <a:t>June 9, 2022</a:t>
+              <a:t>September 30, 2020</a:t>
             </a:r>
             <a:endParaRPr dirty="0" lang="en-US"/>
           </a:p>
@@ -18544,7 +18544,7 @@
             <a:pPr algn="ctr"/>
             <a:r>
               <a:rPr lang="en-US"/>
-              <a:t>June 9, 2022</a:t>
+              <a:t>September 30, 2020</a:t>
             </a:r>
             <a:endParaRPr dirty="0" lang="en-US"/>
           </a:p>
@@ -18963,7 +18963,7 @@
             <a:pPr algn="ctr"/>
             <a:r>
               <a:rPr lang="en-US"/>
-              <a:t>June 9, 2022</a:t>
+              <a:t>September 30, 2020</a:t>
             </a:r>
             <a:endParaRPr dirty="0" lang="en-US"/>
           </a:p>
@@ -19140,7 +19140,7 @@
             <a:pPr algn="ctr"/>
             <a:r>
               <a:rPr lang="en-US"/>
-              <a:t>June 9, 2022</a:t>
+              <a:t>September 30, 2020</a:t>
             </a:r>
             <a:endParaRPr dirty="0" lang="en-US"/>
           </a:p>
@@ -19510,7 +19510,7 @@
             <a:pPr algn="ctr"/>
             <a:r>
               <a:rPr lang="en-US"/>
-              <a:t>June 9, 2022</a:t>
+              <a:t>September 30, 2020</a:t>
             </a:r>
             <a:endParaRPr dirty="0" lang="en-US"/>
           </a:p>
@@ -19704,7 +19704,7 @@
             <a:pPr algn="ctr"/>
             <a:r>
               <a:rPr lang="en-US"/>
-              <a:t>June 9, 2022</a:t>
+              <a:t>September 30, 2020</a:t>
             </a:r>
             <a:endParaRPr dirty="0" lang="en-US"/>
           </a:p>
@@ -20148,7 +20148,7 @@
             <a:pPr algn="ctr"/>
             <a:r>
               <a:rPr lang="en-US"/>
-              <a:t>June 9, 2022</a:t>
+              <a:t>September 30, 2020</a:t>
             </a:r>
             <a:endParaRPr dirty="0" lang="en-US"/>
           </a:p>
@@ -20322,7 +20322,7 @@
             <a:pPr algn="ctr"/>
             <a:r>
               <a:rPr lang="en-US"/>
-              <a:t>June 9, 2022</a:t>
+              <a:t>September 30, 2020</a:t>
             </a:r>
             <a:endParaRPr dirty="0" lang="en-US"/>
           </a:p>
@@ -20488,7 +20488,7 @@
             <a:pPr algn="ctr"/>
             <a:r>
               <a:rPr lang="en-US"/>
-              <a:t>June 9, 2022</a:t>
+              <a:t>September 30, 2020</a:t>
             </a:r>
             <a:endParaRPr dirty="0" lang="en-US"/>
           </a:p>
@@ -20656,7 +20656,7 @@
             <a:pPr algn="ctr"/>
             <a:r>
               <a:rPr lang="en-US"/>
-              <a:t>June 9, 2022</a:t>
+              <a:t>September 30, 2020</a:t>
             </a:r>
             <a:endParaRPr dirty="0" lang="en-US"/>
           </a:p>
@@ -20933,7 +20933,7 @@
             <a:pPr algn="ctr"/>
             <a:r>
               <a:rPr lang="en-US"/>
-              <a:t>June 9, 2022</a:t>
+              <a:t>September 30, 2020</a:t>
             </a:r>
             <a:endParaRPr dirty="0" lang="en-US"/>
           </a:p>
@@ -21118,7 +21118,7 @@
             <a:pPr algn="ctr"/>
             <a:r>
               <a:rPr lang="en-US"/>
-              <a:t>June 9, 2022</a:t>
+              <a:t>September 30, 2020</a:t>
             </a:r>
             <a:endParaRPr dirty="0" lang="en-US"/>
           </a:p>
@@ -21491,7 +21491,7 @@
             <a:pPr algn="ctr"/>
             <a:r>
               <a:rPr lang="en-US"/>
-              <a:t>June 9, 2022</a:t>
+              <a:t>September 30, 2020</a:t>
             </a:r>
             <a:endParaRPr dirty="0" lang="en-US"/>
           </a:p>
@@ -21717,7 +21717,7 @@
             <a:pPr algn="ctr"/>
             <a:r>
               <a:rPr lang="en-US"/>
-              <a:t>June 9, 2022</a:t>
+              <a:t>September 30, 2020</a:t>
             </a:r>
             <a:endParaRPr dirty="0" lang="en-US"/>
           </a:p>
@@ -21907,7 +21907,7 @@
             <a:pPr algn="ctr"/>
             <a:r>
               <a:rPr lang="en-US"/>
-              <a:t>June 9, 2022</a:t>
+              <a:t>September 30, 2020</a:t>
             </a:r>
             <a:endParaRPr dirty="0" lang="en-US"/>
           </a:p>
@@ -22308,7 +22308,7 @@
             <a:pPr algn="ctr"/>
             <a:r>
               <a:rPr lang="en-US"/>
-              <a:t>June 9, 2022</a:t>
+              <a:t>September 30, 2020</a:t>
             </a:r>
             <a:endParaRPr dirty="0" lang="en-US"/>
           </a:p>

--- a/working-output.pptx
+++ b/working-output.pptx
@@ -5,7 +5,7 @@
     <p:sldMasterId id="2147483648" r:id="rId1"/>
   </p:sldMasterIdLst>
   <p:notesMasterIdLst>
-    <p:notesMasterId r:id="rId47"/>
+    <p:notesMasterId r:id="rId42"/>
   </p:notesMasterIdLst>
   <p:sldIdLst>
     <p:sldId id="256" r:id="rId2"/>
@@ -48,20 +48,15 @@
     <p:sldId id="293" r:id="rId39"/>
     <p:sldId id="294" r:id="rId40"/>
     <p:sldId id="295" r:id="rId41"/>
-    <p:sldId id="296" r:id="rId42"/>
-    <p:sldId id="297" r:id="rId43"/>
-    <p:sldId id="298" r:id="rId44"/>
-    <p:sldId id="299" r:id="rId45"/>
-    <p:sldId id="300" r:id="rId46"/>
   </p:sldIdLst>
-  <p:sldSz cx="9144000" cy="5143500" type="screen16x9"/>
+  <p:sldSz cx="12192000" cy="6858000"/>
   <p:notesSz cx="6858000" cy="9144000"/>
   <p:defaultTextStyle>
     <a:defPPr>
       <a:defRPr lang="en-US"/>
     </a:defPPr>
-    <a:lvl1pPr algn="l" defTabSz="457200" eaLnBrk="1" hangingPunct="1" latinLnBrk="0" marL="0" rtl="0">
-      <a:defRPr kern="1200" sz="1800">
+    <a:lvl1pPr algn="l" defTabSz="609585" eaLnBrk="1" hangingPunct="1" latinLnBrk="0" marL="0" rtl="0">
+      <a:defRPr kern="1200" sz="2400">
         <a:solidFill>
           <a:schemeClr val="tx1"/>
         </a:solidFill>
@@ -70,8 +65,8 @@
         <a:cs typeface="+mn-cs"/>
       </a:defRPr>
     </a:lvl1pPr>
-    <a:lvl2pPr algn="l" defTabSz="457200" eaLnBrk="1" hangingPunct="1" latinLnBrk="0" marL="457200" rtl="0">
-      <a:defRPr kern="1200" sz="1800">
+    <a:lvl2pPr algn="l" defTabSz="609585" eaLnBrk="1" hangingPunct="1" latinLnBrk="0" marL="609585" rtl="0">
+      <a:defRPr kern="1200" sz="2400">
         <a:solidFill>
           <a:schemeClr val="tx1"/>
         </a:solidFill>
@@ -80,8 +75,8 @@
         <a:cs typeface="+mn-cs"/>
       </a:defRPr>
     </a:lvl2pPr>
-    <a:lvl3pPr algn="l" defTabSz="457200" eaLnBrk="1" hangingPunct="1" latinLnBrk="0" marL="914400" rtl="0">
-      <a:defRPr kern="1200" sz="1800">
+    <a:lvl3pPr algn="l" defTabSz="609585" eaLnBrk="1" hangingPunct="1" latinLnBrk="0" marL="1219170" rtl="0">
+      <a:defRPr kern="1200" sz="2400">
         <a:solidFill>
           <a:schemeClr val="tx1"/>
         </a:solidFill>
@@ -90,8 +85,8 @@
         <a:cs typeface="+mn-cs"/>
       </a:defRPr>
     </a:lvl3pPr>
-    <a:lvl4pPr algn="l" defTabSz="457200" eaLnBrk="1" hangingPunct="1" latinLnBrk="0" marL="1371600" rtl="0">
-      <a:defRPr kern="1200" sz="1800">
+    <a:lvl4pPr algn="l" defTabSz="609585" eaLnBrk="1" hangingPunct="1" latinLnBrk="0" marL="1828754" rtl="0">
+      <a:defRPr kern="1200" sz="2400">
         <a:solidFill>
           <a:schemeClr val="tx1"/>
         </a:solidFill>
@@ -100,8 +95,8 @@
         <a:cs typeface="+mn-cs"/>
       </a:defRPr>
     </a:lvl4pPr>
-    <a:lvl5pPr algn="l" defTabSz="457200" eaLnBrk="1" hangingPunct="1" latinLnBrk="0" marL="1828800" rtl="0">
-      <a:defRPr kern="1200" sz="1800">
+    <a:lvl5pPr algn="l" defTabSz="609585" eaLnBrk="1" hangingPunct="1" latinLnBrk="0" marL="2438339" rtl="0">
+      <a:defRPr kern="1200" sz="2400">
         <a:solidFill>
           <a:schemeClr val="tx1"/>
         </a:solidFill>
@@ -110,8 +105,8 @@
         <a:cs typeface="+mn-cs"/>
       </a:defRPr>
     </a:lvl5pPr>
-    <a:lvl6pPr algn="l" defTabSz="457200" eaLnBrk="1" hangingPunct="1" latinLnBrk="0" marL="2286000" rtl="0">
-      <a:defRPr kern="1200" sz="1800">
+    <a:lvl6pPr algn="l" defTabSz="609585" eaLnBrk="1" hangingPunct="1" latinLnBrk="0" marL="3047924" rtl="0">
+      <a:defRPr kern="1200" sz="2400">
         <a:solidFill>
           <a:schemeClr val="tx1"/>
         </a:solidFill>
@@ -120,8 +115,8 @@
         <a:cs typeface="+mn-cs"/>
       </a:defRPr>
     </a:lvl6pPr>
-    <a:lvl7pPr algn="l" defTabSz="457200" eaLnBrk="1" hangingPunct="1" latinLnBrk="0" marL="2743200" rtl="0">
-      <a:defRPr kern="1200" sz="1800">
+    <a:lvl7pPr algn="l" defTabSz="609585" eaLnBrk="1" hangingPunct="1" latinLnBrk="0" marL="3657509" rtl="0">
+      <a:defRPr kern="1200" sz="2400">
         <a:solidFill>
           <a:schemeClr val="tx1"/>
         </a:solidFill>
@@ -130,8 +125,8 @@
         <a:cs typeface="+mn-cs"/>
       </a:defRPr>
     </a:lvl7pPr>
-    <a:lvl8pPr algn="l" defTabSz="457200" eaLnBrk="1" hangingPunct="1" latinLnBrk="0" marL="3200400" rtl="0">
-      <a:defRPr kern="1200" sz="1800">
+    <a:lvl8pPr algn="l" defTabSz="609585" eaLnBrk="1" hangingPunct="1" latinLnBrk="0" marL="4267093" rtl="0">
+      <a:defRPr kern="1200" sz="2400">
         <a:solidFill>
           <a:schemeClr val="tx1"/>
         </a:solidFill>
@@ -140,8 +135,8 @@
         <a:cs typeface="+mn-cs"/>
       </a:defRPr>
     </a:lvl8pPr>
-    <a:lvl9pPr algn="l" defTabSz="457200" eaLnBrk="1" hangingPunct="1" latinLnBrk="0" marL="3657600" rtl="0">
-      <a:defRPr kern="1200" sz="1800">
+    <a:lvl9pPr algn="l" defTabSz="609585" eaLnBrk="1" hangingPunct="1" latinLnBrk="0" marL="4876678" rtl="0">
+      <a:defRPr kern="1200" sz="2400">
         <a:solidFill>
           <a:schemeClr val="tx1"/>
         </a:solidFill>
@@ -154,12 +149,12 @@
   <p:extLst>
     <p:ext uri="{EFAFB233-063F-42B5-8137-9DF3F51BA10A}">
       <p15:sldGuideLst xmlns:p15="http://schemas.microsoft.com/office/powerpoint/2012/main">
-        <p15:guide id="1" orient="horz" pos="1620" userDrawn="1">
+        <p15:guide id="1" orient="horz" pos="2160" userDrawn="1">
           <p15:clr>
             <a:srgbClr val="A4A3A4"/>
           </p15:clr>
         </p15:guide>
-        <p15:guide id="2" pos="2880" userDrawn="1">
+        <p15:guide id="2" pos="3840" userDrawn="1">
           <p15:clr>
             <a:srgbClr val="A4A3A4"/>
           </p15:clr>
@@ -425,8 +420,8 @@
   </p:cSld>
   <p:clrMap bg1="lt1" tx1="dk1" bg2="lt2" tx2="dk2" accent1="accent1" accent2="accent2" accent3="accent3" accent4="accent4" accent5="accent5" accent6="accent6" hlink="hlink" folHlink="folHlink"/>
   <p:notesStyle>
-    <a:lvl1pPr marL="0" algn="l" defTabSz="914400" rtl="0" eaLnBrk="1" latinLnBrk="0" hangingPunct="1">
-      <a:defRPr sz="1200" kern="1200">
+    <a:lvl1pPr marL="0" algn="l" defTabSz="1219170" rtl="0" eaLnBrk="1" latinLnBrk="0" hangingPunct="1">
+      <a:defRPr sz="1600" kern="1200">
         <a:solidFill>
           <a:schemeClr val="tx1"/>
         </a:solidFill>
@@ -435,8 +430,8 @@
         <a:cs typeface="+mn-cs"/>
       </a:defRPr>
     </a:lvl1pPr>
-    <a:lvl2pPr marL="457200" algn="l" defTabSz="914400" rtl="0" eaLnBrk="1" latinLnBrk="0" hangingPunct="1">
-      <a:defRPr sz="1200" kern="1200">
+    <a:lvl2pPr marL="609585" algn="l" defTabSz="1219170" rtl="0" eaLnBrk="1" latinLnBrk="0" hangingPunct="1">
+      <a:defRPr sz="1600" kern="1200">
         <a:solidFill>
           <a:schemeClr val="tx1"/>
         </a:solidFill>
@@ -445,8 +440,8 @@
         <a:cs typeface="+mn-cs"/>
       </a:defRPr>
     </a:lvl2pPr>
-    <a:lvl3pPr marL="914400" algn="l" defTabSz="914400" rtl="0" eaLnBrk="1" latinLnBrk="0" hangingPunct="1">
-      <a:defRPr sz="1200" kern="1200">
+    <a:lvl3pPr marL="1219170" algn="l" defTabSz="1219170" rtl="0" eaLnBrk="1" latinLnBrk="0" hangingPunct="1">
+      <a:defRPr sz="1600" kern="1200">
         <a:solidFill>
           <a:schemeClr val="tx1"/>
         </a:solidFill>
@@ -455,8 +450,8 @@
         <a:cs typeface="+mn-cs"/>
       </a:defRPr>
     </a:lvl3pPr>
-    <a:lvl4pPr marL="1371600" algn="l" defTabSz="914400" rtl="0" eaLnBrk="1" latinLnBrk="0" hangingPunct="1">
-      <a:defRPr sz="1200" kern="1200">
+    <a:lvl4pPr marL="1828754" algn="l" defTabSz="1219170" rtl="0" eaLnBrk="1" latinLnBrk="0" hangingPunct="1">
+      <a:defRPr sz="1600" kern="1200">
         <a:solidFill>
           <a:schemeClr val="tx1"/>
         </a:solidFill>
@@ -465,8 +460,8 @@
         <a:cs typeface="+mn-cs"/>
       </a:defRPr>
     </a:lvl4pPr>
-    <a:lvl5pPr marL="1828800" algn="l" defTabSz="914400" rtl="0" eaLnBrk="1" latinLnBrk="0" hangingPunct="1">
-      <a:defRPr sz="1200" kern="1200">
+    <a:lvl5pPr marL="2438339" algn="l" defTabSz="1219170" rtl="0" eaLnBrk="1" latinLnBrk="0" hangingPunct="1">
+      <a:defRPr sz="1600" kern="1200">
         <a:solidFill>
           <a:schemeClr val="tx1"/>
         </a:solidFill>
@@ -475,8 +470,8 @@
         <a:cs typeface="+mn-cs"/>
       </a:defRPr>
     </a:lvl5pPr>
-    <a:lvl6pPr marL="2286000" algn="l" defTabSz="914400" rtl="0" eaLnBrk="1" latinLnBrk="0" hangingPunct="1">
-      <a:defRPr sz="1200" kern="1200">
+    <a:lvl6pPr marL="3047924" algn="l" defTabSz="1219170" rtl="0" eaLnBrk="1" latinLnBrk="0" hangingPunct="1">
+      <a:defRPr sz="1600" kern="1200">
         <a:solidFill>
           <a:schemeClr val="tx1"/>
         </a:solidFill>
@@ -485,8 +480,8 @@
         <a:cs typeface="+mn-cs"/>
       </a:defRPr>
     </a:lvl6pPr>
-    <a:lvl7pPr marL="2743200" algn="l" defTabSz="914400" rtl="0" eaLnBrk="1" latinLnBrk="0" hangingPunct="1">
-      <a:defRPr sz="1200" kern="1200">
+    <a:lvl7pPr marL="3657509" algn="l" defTabSz="1219170" rtl="0" eaLnBrk="1" latinLnBrk="0" hangingPunct="1">
+      <a:defRPr sz="1600" kern="1200">
         <a:solidFill>
           <a:schemeClr val="tx1"/>
         </a:solidFill>
@@ -495,8 +490,8 @@
         <a:cs typeface="+mn-cs"/>
       </a:defRPr>
     </a:lvl7pPr>
-    <a:lvl8pPr marL="3200400" algn="l" defTabSz="914400" rtl="0" eaLnBrk="1" latinLnBrk="0" hangingPunct="1">
-      <a:defRPr sz="1200" kern="1200">
+    <a:lvl8pPr marL="4267093" algn="l" defTabSz="1219170" rtl="0" eaLnBrk="1" latinLnBrk="0" hangingPunct="1">
+      <a:defRPr sz="1600" kern="1200">
         <a:solidFill>
           <a:schemeClr val="tx1"/>
         </a:solidFill>
@@ -505,8 +500,8 @@
         <a:cs typeface="+mn-cs"/>
       </a:defRPr>
     </a:lvl8pPr>
-    <a:lvl9pPr marL="3657600" algn="l" defTabSz="914400" rtl="0" eaLnBrk="1" latinLnBrk="0" hangingPunct="1">
-      <a:defRPr sz="1200" kern="1200">
+    <a:lvl9pPr marL="4876678" algn="l" defTabSz="1219170" rtl="0" eaLnBrk="1" latinLnBrk="0" hangingPunct="1">
+      <a:defRPr sz="1600" kern="1200">
         <a:solidFill>
           <a:schemeClr val="tx1"/>
         </a:solidFill>
@@ -594,7 +589,7 @@
           <a:p>
             <a:fld id="{18BDFEC3-8487-43E8-A154-7C12CBC1FFF2}" type="slidenum">
               <a:rPr lang="en-US"/>
-              <a:t>7</a:t>
+              <a:t>2</a:t>
             </a:fld>
             <a:endParaRPr lang="en-US"/>
           </a:p>
@@ -721,7 +716,7 @@
           <a:p>
             <a:fld id="{18BDFEC3-8487-43E8-A154-7C12CBC1FFF2}" type="slidenum">
               <a:rPr lang="en-US"/>
-              <a:t>19</a:t>
+              <a:t>14</a:t>
             </a:fld>
             <a:endParaRPr lang="en-US"/>
           </a:p>
@@ -862,7 +857,7 @@
           <a:p>
             <a:fld id="{18BDFEC3-8487-43E8-A154-7C12CBC1FFF2}" type="slidenum">
               <a:rPr lang="en-US"/>
-              <a:t>20</a:t>
+              <a:t>15</a:t>
             </a:fld>
             <a:endParaRPr lang="en-US"/>
           </a:p>
@@ -1009,7 +1004,7 @@
           <a:p>
             <a:fld id="{18BDFEC3-8487-43E8-A154-7C12CBC1FFF2}" type="slidenum">
               <a:rPr lang="en-US"/>
-              <a:t>21</a:t>
+              <a:t>16</a:t>
             </a:fld>
             <a:endParaRPr lang="en-US"/>
           </a:p>
@@ -1146,7 +1141,7 @@
           <a:p>
             <a:fld id="{18BDFEC3-8487-43E8-A154-7C12CBC1FFF2}" type="slidenum">
               <a:rPr lang="en-US"/>
-              <a:t>22</a:t>
+              <a:t>17</a:t>
             </a:fld>
             <a:endParaRPr lang="en-US"/>
           </a:p>
@@ -1246,7 +1241,7 @@
           <a:p>
             <a:fld id="{18BDFEC3-8487-43E8-A154-7C12CBC1FFF2}" type="slidenum">
               <a:rPr lang="en-US"/>
-              <a:t>23</a:t>
+              <a:t>18</a:t>
             </a:fld>
             <a:endParaRPr lang="en-US"/>
           </a:p>
@@ -1422,7 +1417,7 @@
           <a:p>
             <a:fld id="{18BDFEC3-8487-43E8-A154-7C12CBC1FFF2}" type="slidenum">
               <a:rPr lang="en-US"/>
-              <a:t>24</a:t>
+              <a:t>19</a:t>
             </a:fld>
             <a:endParaRPr lang="en-US"/>
           </a:p>
@@ -1532,7 +1527,7 @@
           <a:p>
             <a:fld id="{18BDFEC3-8487-43E8-A154-7C12CBC1FFF2}" type="slidenum">
               <a:rPr lang="en-US"/>
-              <a:t>25</a:t>
+              <a:t>20</a:t>
             </a:fld>
             <a:endParaRPr lang="en-US"/>
           </a:p>
@@ -1636,7 +1631,7 @@
           <a:p>
             <a:fld id="{18BDFEC3-8487-43E8-A154-7C12CBC1FFF2}" type="slidenum">
               <a:rPr lang="en-US"/>
-              <a:t>26</a:t>
+              <a:t>21</a:t>
             </a:fld>
             <a:endParaRPr lang="en-US"/>
           </a:p>
@@ -1808,7 +1803,7 @@
           <a:p>
             <a:fld id="{18BDFEC3-8487-43E8-A154-7C12CBC1FFF2}" type="slidenum">
               <a:rPr lang="en-US"/>
-              <a:t>27</a:t>
+              <a:t>22</a:t>
             </a:fld>
             <a:endParaRPr lang="en-US"/>
           </a:p>
@@ -1990,7 +1985,7 @@
           <a:p>
             <a:fld id="{18BDFEC3-8487-43E8-A154-7C12CBC1FFF2}" type="slidenum">
               <a:rPr lang="en-US"/>
-              <a:t>28</a:t>
+              <a:t>23</a:t>
             </a:fld>
             <a:endParaRPr lang="en-US"/>
           </a:p>
@@ -2094,7 +2089,7 @@
           <a:p>
             <a:fld id="{18BDFEC3-8487-43E8-A154-7C12CBC1FFF2}" type="slidenum">
               <a:rPr lang="en-US"/>
-              <a:t>9</a:t>
+              <a:t>4</a:t>
             </a:fld>
             <a:endParaRPr lang="en-US"/>
           </a:p>
@@ -2198,7 +2193,7 @@
           <a:p>
             <a:fld id="{18BDFEC3-8487-43E8-A154-7C12CBC1FFF2}" type="slidenum">
               <a:rPr lang="en-US"/>
-              <a:t>29</a:t>
+              <a:t>24</a:t>
             </a:fld>
             <a:endParaRPr lang="en-US"/>
           </a:p>
@@ -2322,7 +2317,7 @@
           <a:p>
             <a:fld id="{18BDFEC3-8487-43E8-A154-7C12CBC1FFF2}" type="slidenum">
               <a:rPr lang="en-US"/>
-              <a:t>31</a:t>
+              <a:t>26</a:t>
             </a:fld>
             <a:endParaRPr lang="en-US"/>
           </a:p>
@@ -2458,7 +2453,7 @@
           <a:p>
             <a:fld id="{18BDFEC3-8487-43E8-A154-7C12CBC1FFF2}" type="slidenum">
               <a:rPr lang="en-US"/>
-              <a:t>32</a:t>
+              <a:t>27</a:t>
             </a:fld>
             <a:endParaRPr lang="en-US"/>
           </a:p>
@@ -2562,7 +2557,7 @@
           <a:p>
             <a:fld id="{18BDFEC3-8487-43E8-A154-7C12CBC1FFF2}" type="slidenum">
               <a:rPr lang="en-US"/>
-              <a:t>33</a:t>
+              <a:t>28</a:t>
             </a:fld>
             <a:endParaRPr lang="en-US"/>
           </a:p>
@@ -2708,7 +2703,7 @@
           <a:p>
             <a:fld id="{18BDFEC3-8487-43E8-A154-7C12CBC1FFF2}" type="slidenum">
               <a:rPr lang="en-US"/>
-              <a:t>34</a:t>
+              <a:t>29</a:t>
             </a:fld>
             <a:endParaRPr lang="en-US"/>
           </a:p>
@@ -2937,7 +2932,7 @@
           <a:p>
             <a:fld id="{18BDFEC3-8487-43E8-A154-7C12CBC1FFF2}" type="slidenum">
               <a:rPr lang="en-US"/>
-              <a:t>35</a:t>
+              <a:t>30</a:t>
             </a:fld>
             <a:endParaRPr lang="en-US"/>
           </a:p>
@@ -3060,7 +3055,7 @@
           <a:p>
             <a:fld id="{18BDFEC3-8487-43E8-A154-7C12CBC1FFF2}" type="slidenum">
               <a:rPr lang="en-US"/>
-              <a:t>36</a:t>
+              <a:t>31</a:t>
             </a:fld>
             <a:endParaRPr lang="en-US"/>
           </a:p>
@@ -3178,7 +3173,7 @@
           <a:p>
             <a:fld id="{18BDFEC3-8487-43E8-A154-7C12CBC1FFF2}" type="slidenum">
               <a:rPr lang="en-US"/>
-              <a:t>37</a:t>
+              <a:t>32</a:t>
             </a:fld>
             <a:endParaRPr lang="en-US"/>
           </a:p>
@@ -3272,7 +3267,7 @@
           <a:p>
             <a:fld id="{18BDFEC3-8487-43E8-A154-7C12CBC1FFF2}" type="slidenum">
               <a:rPr lang="en-US"/>
-              <a:t>38</a:t>
+              <a:t>33</a:t>
             </a:fld>
             <a:endParaRPr lang="en-US"/>
           </a:p>
@@ -3396,7 +3391,7 @@
           <a:p>
             <a:fld id="{18BDFEC3-8487-43E8-A154-7C12CBC1FFF2}" type="slidenum">
               <a:rPr lang="en-US"/>
-              <a:t>41</a:t>
+              <a:t>36</a:t>
             </a:fld>
             <a:endParaRPr lang="en-US"/>
           </a:p>
@@ -3500,7 +3495,7 @@
           <a:p>
             <a:fld id="{18BDFEC3-8487-43E8-A154-7C12CBC1FFF2}" type="slidenum">
               <a:rPr lang="en-US"/>
-              <a:t>10</a:t>
+              <a:t>5</a:t>
             </a:fld>
             <a:endParaRPr lang="en-US"/>
           </a:p>
@@ -3622,7 +3617,7 @@
           <a:p>
             <a:fld id="{18BDFEC3-8487-43E8-A154-7C12CBC1FFF2}" type="slidenum">
               <a:rPr lang="en-US"/>
-              <a:t>44</a:t>
+              <a:t>39</a:t>
             </a:fld>
             <a:endParaRPr lang="en-US"/>
           </a:p>
@@ -3778,7 +3773,7 @@
           <a:p>
             <a:fld id="{18BDFEC3-8487-43E8-A154-7C12CBC1FFF2}" type="slidenum">
               <a:rPr lang="en-US"/>
-              <a:t>11</a:t>
+              <a:t>6</a:t>
             </a:fld>
             <a:endParaRPr lang="en-US"/>
           </a:p>
@@ -3910,7 +3905,7 @@
           <a:p>
             <a:fld id="{18BDFEC3-8487-43E8-A154-7C12CBC1FFF2}" type="slidenum">
               <a:rPr lang="en-US"/>
-              <a:t>12</a:t>
+              <a:t>7</a:t>
             </a:fld>
             <a:endParaRPr lang="en-US"/>
           </a:p>
@@ -4014,7 +4009,7 @@
           <a:p>
             <a:fld id="{18BDFEC3-8487-43E8-A154-7C12CBC1FFF2}" type="slidenum">
               <a:rPr lang="en-US"/>
-              <a:t>15</a:t>
+              <a:t>10</a:t>
             </a:fld>
             <a:endParaRPr lang="en-US"/>
           </a:p>
@@ -4146,7 +4141,7 @@
           <a:p>
             <a:fld id="{18BDFEC3-8487-43E8-A154-7C12CBC1FFF2}" type="slidenum">
               <a:rPr lang="en-US"/>
-              <a:t>16</a:t>
+              <a:t>11</a:t>
             </a:fld>
             <a:endParaRPr lang="en-US"/>
           </a:p>
@@ -4268,7 +4263,7 @@
           <a:p>
             <a:fld id="{18BDFEC3-8487-43E8-A154-7C12CBC1FFF2}" type="slidenum">
               <a:rPr lang="en-US"/>
-              <a:t>17</a:t>
+              <a:t>12</a:t>
             </a:fld>
             <a:endParaRPr lang="en-US"/>
           </a:p>
@@ -4391,7 +4386,7 @@
           <a:p>
             <a:fld id="{18BDFEC3-8487-43E8-A154-7C12CBC1FFF2}" type="slidenum">
               <a:rPr lang="en-US"/>
-              <a:t>18</a:t>
+              <a:t>13</a:t>
             </a:fld>
             <a:endParaRPr lang="en-US"/>
           </a:p>
@@ -4431,8 +4426,8 @@
         </p:nvSpPr>
         <p:spPr>
           <a:xfrm>
-            <a:off x="685800" y="1597819"/>
-            <a:ext cx="7772400" cy="1102519"/>
+            <a:off x="914400" y="2130426"/>
+            <a:ext cx="10363200" cy="1470025"/>
           </a:xfrm>
         </p:spPr>
         <p:txBody>
@@ -4458,8 +4453,8 @@
         </p:nvSpPr>
         <p:spPr>
           <a:xfrm>
-            <a:off x="1371600" y="2914650"/>
-            <a:ext cx="6400800" cy="1314450"/>
+            <a:off x="1828800" y="3886200"/>
+            <a:ext cx="8534400" cy="1752600"/>
           </a:xfrm>
         </p:spPr>
         <p:txBody>
@@ -4475,7 +4470,7 @@
                 </a:solidFill>
               </a:defRPr>
             </a:lvl1pPr>
-            <a:lvl2pPr marL="342900" indent="0" algn="ctr">
+            <a:lvl2pPr marL="457189" indent="0" algn="ctr">
               <a:buNone/>
               <a:defRPr>
                 <a:solidFill>
@@ -4485,7 +4480,7 @@
                 </a:solidFill>
               </a:defRPr>
             </a:lvl2pPr>
-            <a:lvl3pPr marL="685800" indent="0" algn="ctr">
+            <a:lvl3pPr marL="914377" indent="0" algn="ctr">
               <a:buNone/>
               <a:defRPr>
                 <a:solidFill>
@@ -4495,7 +4490,7 @@
                 </a:solidFill>
               </a:defRPr>
             </a:lvl3pPr>
-            <a:lvl4pPr marL="1028700" indent="0" algn="ctr">
+            <a:lvl4pPr marL="1371566" indent="0" algn="ctr">
               <a:buNone/>
               <a:defRPr>
                 <a:solidFill>
@@ -4505,7 +4500,7 @@
                 </a:solidFill>
               </a:defRPr>
             </a:lvl4pPr>
-            <a:lvl5pPr marL="1371600" indent="0" algn="ctr">
+            <a:lvl5pPr marL="1828754" indent="0" algn="ctr">
               <a:buNone/>
               <a:defRPr>
                 <a:solidFill>
@@ -4515,7 +4510,7 @@
                 </a:solidFill>
               </a:defRPr>
             </a:lvl5pPr>
-            <a:lvl6pPr marL="1714500" indent="0" algn="ctr">
+            <a:lvl6pPr marL="2285943" indent="0" algn="ctr">
               <a:buNone/>
               <a:defRPr>
                 <a:solidFill>
@@ -4525,7 +4520,7 @@
                 </a:solidFill>
               </a:defRPr>
             </a:lvl6pPr>
-            <a:lvl7pPr marL="2057400" indent="0" algn="ctr">
+            <a:lvl7pPr marL="2743131" indent="0" algn="ctr">
               <a:buNone/>
               <a:defRPr>
                 <a:solidFill>
@@ -4535,7 +4530,7 @@
                 </a:solidFill>
               </a:defRPr>
             </a:lvl7pPr>
-            <a:lvl8pPr marL="2400300" indent="0" algn="ctr">
+            <a:lvl8pPr marL="3200320" indent="0" algn="ctr">
               <a:buNone/>
               <a:defRPr>
                 <a:solidFill>
@@ -4545,7 +4540,7 @@
                 </a:solidFill>
               </a:defRPr>
             </a:lvl8pPr>
-            <a:lvl9pPr marL="2743200" indent="0" algn="ctr">
+            <a:lvl9pPr marL="3657509" indent="0" algn="ctr">
               <a:buNone/>
               <a:defRPr>
                 <a:solidFill>
@@ -4671,12 +4666,12 @@
   <p:extLst>
     <p:ext uri="{DCECCB84-F9BA-43D5-87BE-67443E8EF086}">
       <p15:sldGuideLst xmlns:p15="http://schemas.microsoft.com/office/powerpoint/2012/main">
-        <p15:guide id="1" orient="horz" pos="1620" userDrawn="1">
+        <p15:guide id="1" orient="horz" pos="2160" userDrawn="1">
           <p15:clr>
             <a:srgbClr val="FBAE40"/>
           </p15:clr>
         </p15:guide>
-        <p15:guide id="2" pos="2880" userDrawn="1">
+        <p15:guide id="2" pos="3840" userDrawn="1">
           <p15:clr>
             <a:srgbClr val="FBAE40"/>
           </p15:clr>
@@ -4885,8 +4880,8 @@
         </p:nvSpPr>
         <p:spPr>
           <a:xfrm>
-            <a:off x="8991600" y="0"/>
-            <a:ext cx="152400" cy="5143500"/>
+            <a:off x="11988800" y="0"/>
+            <a:ext cx="203200" cy="6858000"/>
           </a:xfrm>
           <a:prstGeom prst="rect">
             <a:avLst/>
@@ -4917,7 +4912,7 @@
           <a:lstStyle/>
           <a:p>
             <a:pPr algn="ctr"/>
-            <a:endParaRPr lang="en-US"/>
+            <a:endParaRPr lang="en-US" sz="3200"/>
           </a:p>
         </p:txBody>
       </p:sp>
@@ -4963,8 +4958,8 @@
         </p:nvSpPr>
         <p:spPr>
           <a:xfrm>
-            <a:off x="6629400" y="205979"/>
-            <a:ext cx="2057400" cy="4388644"/>
+            <a:off x="8839200" y="274639"/>
+            <a:ext cx="2743200" cy="5851525"/>
           </a:xfrm>
         </p:spPr>
         <p:txBody>
@@ -4990,8 +4985,8 @@
         </p:nvSpPr>
         <p:spPr>
           <a:xfrm>
-            <a:off x="457200" y="205979"/>
-            <a:ext cx="6019800" cy="4388644"/>
+            <a:off x="609600" y="274639"/>
+            <a:ext cx="8026400" cy="5851525"/>
           </a:xfrm>
         </p:spPr>
         <p:txBody>
@@ -5142,8 +5137,8 @@
         </p:nvSpPr>
         <p:spPr>
           <a:xfrm>
-            <a:off x="8991600" y="0"/>
-            <a:ext cx="152400" cy="5143500"/>
+            <a:off x="11988800" y="0"/>
+            <a:ext cx="203200" cy="6858000"/>
           </a:xfrm>
           <a:prstGeom prst="rect">
             <a:avLst/>
@@ -5174,7 +5169,7 @@
           <a:lstStyle/>
           <a:p>
             <a:pPr algn="ctr"/>
-            <a:endParaRPr lang="en-US"/>
+            <a:endParaRPr lang="en-US" sz="3200"/>
           </a:p>
         </p:txBody>
       </p:sp>
@@ -5389,8 +5384,8 @@
         </p:nvSpPr>
         <p:spPr>
           <a:xfrm>
-            <a:off x="8991600" y="0"/>
-            <a:ext cx="152400" cy="5143500"/>
+            <a:off x="11988800" y="0"/>
+            <a:ext cx="203200" cy="6858000"/>
           </a:xfrm>
           <a:prstGeom prst="rect">
             <a:avLst/>
@@ -5421,7 +5416,7 @@
           <a:lstStyle/>
           <a:p>
             <a:pPr algn="ctr"/>
-            <a:endParaRPr lang="en-US"/>
+            <a:endParaRPr lang="en-US" sz="3200"/>
           </a:p>
         </p:txBody>
       </p:sp>
@@ -5467,15 +5462,15 @@
         </p:nvSpPr>
         <p:spPr>
           <a:xfrm>
-            <a:off x="722313" y="2375222"/>
-            <a:ext cx="7772400" cy="1021556"/>
+            <a:off x="963084" y="3166963"/>
+            <a:ext cx="10363200" cy="1362075"/>
           </a:xfrm>
         </p:spPr>
         <p:txBody>
           <a:bodyPr anchor="t"/>
           <a:lstStyle>
             <a:lvl1pPr algn="l">
-              <a:defRPr sz="2800" b="1" cap="none"/>
+              <a:defRPr sz="3733" b="1" cap="none"/>
             </a:lvl1pPr>
           </a:lstStyle>
           <a:p>
@@ -5498,8 +5493,8 @@
         </p:nvSpPr>
         <p:spPr>
           <a:xfrm>
-            <a:off x="722313" y="1208909"/>
-            <a:ext cx="7772400" cy="1125140"/>
+            <a:off x="963084" y="1611879"/>
+            <a:ext cx="10363200" cy="1500187"/>
           </a:xfrm>
         </p:spPr>
         <p:txBody>
@@ -5507,7 +5502,7 @@
           <a:lstStyle>
             <a:lvl1pPr marL="0" indent="0">
               <a:buNone/>
-              <a:defRPr sz="1500">
+              <a:defRPr sz="2000">
                 <a:solidFill>
                   <a:schemeClr val="tx1">
                     <a:tint val="75000"/>
@@ -5515,9 +5510,9 @@
                 </a:solidFill>
               </a:defRPr>
             </a:lvl1pPr>
-            <a:lvl2pPr marL="342900" indent="0">
-              <a:buNone/>
-              <a:defRPr sz="1350">
+            <a:lvl2pPr marL="457189" indent="0">
+              <a:buNone/>
+              <a:defRPr sz="1800">
                 <a:solidFill>
                   <a:schemeClr val="tx1">
                     <a:tint val="75000"/>
@@ -5525,9 +5520,9 @@
                 </a:solidFill>
               </a:defRPr>
             </a:lvl2pPr>
-            <a:lvl3pPr marL="685800" indent="0">
-              <a:buNone/>
-              <a:defRPr sz="1200">
+            <a:lvl3pPr marL="914377" indent="0">
+              <a:buNone/>
+              <a:defRPr sz="1600">
                 <a:solidFill>
                   <a:schemeClr val="tx1">
                     <a:tint val="75000"/>
@@ -5535,9 +5530,9 @@
                 </a:solidFill>
               </a:defRPr>
             </a:lvl3pPr>
-            <a:lvl4pPr marL="1028700" indent="0">
-              <a:buNone/>
-              <a:defRPr sz="1050">
+            <a:lvl4pPr marL="1371566" indent="0">
+              <a:buNone/>
+              <a:defRPr sz="1400">
                 <a:solidFill>
                   <a:schemeClr val="tx1">
                     <a:tint val="75000"/>
@@ -5545,9 +5540,9 @@
                 </a:solidFill>
               </a:defRPr>
             </a:lvl4pPr>
-            <a:lvl5pPr marL="1371600" indent="0">
-              <a:buNone/>
-              <a:defRPr sz="1050">
+            <a:lvl5pPr marL="1828754" indent="0">
+              <a:buNone/>
+              <a:defRPr sz="1400">
                 <a:solidFill>
                   <a:schemeClr val="tx1">
                     <a:tint val="75000"/>
@@ -5555,9 +5550,9 @@
                 </a:solidFill>
               </a:defRPr>
             </a:lvl5pPr>
-            <a:lvl6pPr marL="1714500" indent="0">
-              <a:buNone/>
-              <a:defRPr sz="1050">
+            <a:lvl6pPr marL="2285943" indent="0">
+              <a:buNone/>
+              <a:defRPr sz="1400">
                 <a:solidFill>
                   <a:schemeClr val="tx1">
                     <a:tint val="75000"/>
@@ -5565,9 +5560,9 @@
                 </a:solidFill>
               </a:defRPr>
             </a:lvl6pPr>
-            <a:lvl7pPr marL="2057400" indent="0">
-              <a:buNone/>
-              <a:defRPr sz="1050">
+            <a:lvl7pPr marL="2743131" indent="0">
+              <a:buNone/>
+              <a:defRPr sz="1400">
                 <a:solidFill>
                   <a:schemeClr val="tx1">
                     <a:tint val="75000"/>
@@ -5575,9 +5570,9 @@
                 </a:solidFill>
               </a:defRPr>
             </a:lvl7pPr>
-            <a:lvl8pPr marL="2400300" indent="0">
-              <a:buNone/>
-              <a:defRPr sz="1050">
+            <a:lvl8pPr marL="3200320" indent="0">
+              <a:buNone/>
+              <a:defRPr sz="1400">
                 <a:solidFill>
                   <a:schemeClr val="tx1">
                     <a:tint val="75000"/>
@@ -5585,9 +5580,9 @@
                 </a:solidFill>
               </a:defRPr>
             </a:lvl8pPr>
-            <a:lvl9pPr marL="2743200" indent="0">
-              <a:buNone/>
-              <a:defRPr sz="1050">
+            <a:lvl9pPr marL="3657509" indent="0">
+              <a:buNone/>
+              <a:defRPr sz="1400">
                 <a:solidFill>
                   <a:schemeClr val="tx1">
                     <a:tint val="75000"/>
@@ -5713,8 +5708,8 @@
         </p:nvSpPr>
         <p:spPr>
           <a:xfrm>
-            <a:off x="8991600" y="0"/>
-            <a:ext cx="152400" cy="5143500"/>
+            <a:off x="11988800" y="0"/>
+            <a:ext cx="203200" cy="6858000"/>
           </a:xfrm>
           <a:prstGeom prst="rect">
             <a:avLst/>
@@ -5745,7 +5740,7 @@
           <a:lstStyle/>
           <a:p>
             <a:pPr algn="ctr"/>
-            <a:endParaRPr lang="en-US"/>
+            <a:endParaRPr lang="en-US" sz="3200"/>
           </a:p>
         </p:txBody>
       </p:sp>
@@ -5813,39 +5808,39 @@
         </p:nvSpPr>
         <p:spPr>
           <a:xfrm>
-            <a:off x="457200" y="1200151"/>
-            <a:ext cx="4038600" cy="3394472"/>
+            <a:off x="609600" y="1600201"/>
+            <a:ext cx="5384800" cy="4525963"/>
           </a:xfrm>
         </p:spPr>
         <p:txBody>
           <a:bodyPr/>
           <a:lstStyle>
             <a:lvl1pPr>
-              <a:defRPr sz="2100"/>
+              <a:defRPr sz="2800"/>
             </a:lvl1pPr>
             <a:lvl2pPr>
-              <a:defRPr sz="1800"/>
+              <a:defRPr sz="2400"/>
             </a:lvl2pPr>
             <a:lvl3pPr>
-              <a:defRPr sz="1500"/>
+              <a:defRPr sz="2000"/>
             </a:lvl3pPr>
             <a:lvl4pPr>
-              <a:defRPr sz="1350"/>
+              <a:defRPr sz="1800"/>
             </a:lvl4pPr>
             <a:lvl5pPr>
-              <a:defRPr sz="1350"/>
+              <a:defRPr sz="1800"/>
             </a:lvl5pPr>
             <a:lvl6pPr>
-              <a:defRPr sz="1350"/>
+              <a:defRPr sz="1800"/>
             </a:lvl6pPr>
             <a:lvl7pPr>
-              <a:defRPr sz="1350"/>
+              <a:defRPr sz="1800"/>
             </a:lvl7pPr>
             <a:lvl8pPr>
-              <a:defRPr sz="1350"/>
+              <a:defRPr sz="1800"/>
             </a:lvl8pPr>
             <a:lvl9pPr>
-              <a:defRPr sz="1350"/>
+              <a:defRPr sz="1800"/>
             </a:lvl9pPr>
           </a:lstStyle>
           <a:p>
@@ -5897,39 +5892,39 @@
         </p:nvSpPr>
         <p:spPr>
           <a:xfrm>
-            <a:off x="4648200" y="1200151"/>
-            <a:ext cx="4038600" cy="3394472"/>
+            <a:off x="6197600" y="1600201"/>
+            <a:ext cx="5384800" cy="4525963"/>
           </a:xfrm>
         </p:spPr>
         <p:txBody>
           <a:bodyPr/>
           <a:lstStyle>
             <a:lvl1pPr>
-              <a:defRPr sz="2100"/>
+              <a:defRPr sz="2800"/>
             </a:lvl1pPr>
             <a:lvl2pPr>
-              <a:defRPr sz="1800"/>
+              <a:defRPr sz="2400"/>
             </a:lvl2pPr>
             <a:lvl3pPr>
-              <a:defRPr sz="1500"/>
+              <a:defRPr sz="2000"/>
             </a:lvl3pPr>
             <a:lvl4pPr>
-              <a:defRPr sz="1350"/>
+              <a:defRPr sz="1800"/>
             </a:lvl4pPr>
             <a:lvl5pPr>
-              <a:defRPr sz="1350"/>
+              <a:defRPr sz="1800"/>
             </a:lvl5pPr>
             <a:lvl6pPr>
-              <a:defRPr sz="1350"/>
+              <a:defRPr sz="1800"/>
             </a:lvl6pPr>
             <a:lvl7pPr>
-              <a:defRPr sz="1350"/>
+              <a:defRPr sz="1800"/>
             </a:lvl7pPr>
             <a:lvl8pPr>
-              <a:defRPr sz="1350"/>
+              <a:defRPr sz="1800"/>
             </a:lvl8pPr>
             <a:lvl9pPr>
-              <a:defRPr sz="1350"/>
+              <a:defRPr sz="1800"/>
             </a:lvl9pPr>
           </a:lstStyle>
           <a:p>
@@ -6077,8 +6072,8 @@
         </p:nvSpPr>
         <p:spPr>
           <a:xfrm>
-            <a:off x="8991600" y="0"/>
-            <a:ext cx="152400" cy="5143500"/>
+            <a:off x="11988800" y="0"/>
+            <a:ext cx="203200" cy="6858000"/>
           </a:xfrm>
           <a:prstGeom prst="rect">
             <a:avLst/>
@@ -6109,7 +6104,7 @@
           <a:lstStyle/>
           <a:p>
             <a:pPr algn="ctr"/>
-            <a:endParaRPr lang="en-US"/>
+            <a:endParaRPr lang="en-US" sz="3200"/>
           </a:p>
         </p:txBody>
       </p:sp>
@@ -6181,8 +6176,8 @@
         </p:nvSpPr>
         <p:spPr>
           <a:xfrm>
-            <a:off x="457200" y="1151335"/>
-            <a:ext cx="4040188" cy="479822"/>
+            <a:off x="609600" y="1535113"/>
+            <a:ext cx="5386917" cy="639763"/>
           </a:xfrm>
         </p:spPr>
         <p:txBody>
@@ -6190,39 +6185,39 @@
           <a:lstStyle>
             <a:lvl1pPr marL="0" indent="0">
               <a:buNone/>
+              <a:defRPr sz="2400" b="1"/>
+            </a:lvl1pPr>
+            <a:lvl2pPr marL="457189" indent="0">
+              <a:buNone/>
+              <a:defRPr sz="2000" b="1"/>
+            </a:lvl2pPr>
+            <a:lvl3pPr marL="914377" indent="0">
+              <a:buNone/>
               <a:defRPr sz="1800" b="1"/>
-            </a:lvl1pPr>
-            <a:lvl2pPr marL="342900" indent="0">
-              <a:buNone/>
-              <a:defRPr sz="1500" b="1"/>
-            </a:lvl2pPr>
-            <a:lvl3pPr marL="685800" indent="0">
-              <a:buNone/>
-              <a:defRPr sz="1350" b="1"/>
             </a:lvl3pPr>
-            <a:lvl4pPr marL="1028700" indent="0">
-              <a:buNone/>
-              <a:defRPr sz="1200" b="1"/>
+            <a:lvl4pPr marL="1371566" indent="0">
+              <a:buNone/>
+              <a:defRPr sz="1600" b="1"/>
             </a:lvl4pPr>
-            <a:lvl5pPr marL="1371600" indent="0">
-              <a:buNone/>
-              <a:defRPr sz="1200" b="1"/>
+            <a:lvl5pPr marL="1828754" indent="0">
+              <a:buNone/>
+              <a:defRPr sz="1600" b="1"/>
             </a:lvl5pPr>
-            <a:lvl6pPr marL="1714500" indent="0">
-              <a:buNone/>
-              <a:defRPr sz="1200" b="1"/>
+            <a:lvl6pPr marL="2285943" indent="0">
+              <a:buNone/>
+              <a:defRPr sz="1600" b="1"/>
             </a:lvl6pPr>
-            <a:lvl7pPr marL="2057400" indent="0">
-              <a:buNone/>
-              <a:defRPr sz="1200" b="1"/>
+            <a:lvl7pPr marL="2743131" indent="0">
+              <a:buNone/>
+              <a:defRPr sz="1600" b="1"/>
             </a:lvl7pPr>
-            <a:lvl8pPr marL="2400300" indent="0">
-              <a:buNone/>
-              <a:defRPr sz="1200" b="1"/>
+            <a:lvl8pPr marL="3200320" indent="0">
+              <a:buNone/>
+              <a:defRPr sz="1600" b="1"/>
             </a:lvl8pPr>
-            <a:lvl9pPr marL="2743200" indent="0">
-              <a:buNone/>
-              <a:defRPr sz="1200" b="1"/>
+            <a:lvl9pPr marL="3657509" indent="0">
+              <a:buNone/>
+              <a:defRPr sz="1600" b="1"/>
             </a:lvl9pPr>
           </a:lstStyle>
           <a:p>
@@ -6246,39 +6241,39 @@
         </p:nvSpPr>
         <p:spPr>
           <a:xfrm>
-            <a:off x="457200" y="1631156"/>
-            <a:ext cx="4040188" cy="2963466"/>
+            <a:off x="609600" y="2174875"/>
+            <a:ext cx="5386917" cy="3951288"/>
           </a:xfrm>
         </p:spPr>
         <p:txBody>
           <a:bodyPr/>
           <a:lstStyle>
             <a:lvl1pPr>
-              <a:defRPr sz="1800"/>
+              <a:defRPr sz="2400"/>
             </a:lvl1pPr>
             <a:lvl2pPr>
-              <a:defRPr sz="1500"/>
+              <a:defRPr sz="2000"/>
             </a:lvl2pPr>
             <a:lvl3pPr>
-              <a:defRPr sz="1350"/>
+              <a:defRPr sz="1800"/>
             </a:lvl3pPr>
             <a:lvl4pPr>
-              <a:defRPr sz="1200"/>
+              <a:defRPr sz="1600"/>
             </a:lvl4pPr>
             <a:lvl5pPr>
-              <a:defRPr sz="1200"/>
+              <a:defRPr sz="1600"/>
             </a:lvl5pPr>
             <a:lvl6pPr>
-              <a:defRPr sz="1200"/>
+              <a:defRPr sz="1600"/>
             </a:lvl6pPr>
             <a:lvl7pPr>
-              <a:defRPr sz="1200"/>
+              <a:defRPr sz="1600"/>
             </a:lvl7pPr>
             <a:lvl8pPr>
-              <a:defRPr sz="1200"/>
+              <a:defRPr sz="1600"/>
             </a:lvl8pPr>
             <a:lvl9pPr>
-              <a:defRPr sz="1200"/>
+              <a:defRPr sz="1600"/>
             </a:lvl9pPr>
           </a:lstStyle>
           <a:p>
@@ -6330,8 +6325,8 @@
         </p:nvSpPr>
         <p:spPr>
           <a:xfrm>
-            <a:off x="4645026" y="1151335"/>
-            <a:ext cx="4041775" cy="479822"/>
+            <a:off x="6193369" y="1535113"/>
+            <a:ext cx="5389033" cy="639763"/>
           </a:xfrm>
         </p:spPr>
         <p:txBody>
@@ -6339,39 +6334,39 @@
           <a:lstStyle>
             <a:lvl1pPr marL="0" indent="0">
               <a:buNone/>
+              <a:defRPr sz="2400" b="1"/>
+            </a:lvl1pPr>
+            <a:lvl2pPr marL="457189" indent="0">
+              <a:buNone/>
+              <a:defRPr sz="2000" b="1"/>
+            </a:lvl2pPr>
+            <a:lvl3pPr marL="914377" indent="0">
+              <a:buNone/>
               <a:defRPr sz="1800" b="1"/>
-            </a:lvl1pPr>
-            <a:lvl2pPr marL="342900" indent="0">
-              <a:buNone/>
-              <a:defRPr sz="1500" b="1"/>
-            </a:lvl2pPr>
-            <a:lvl3pPr marL="685800" indent="0">
-              <a:buNone/>
-              <a:defRPr sz="1350" b="1"/>
             </a:lvl3pPr>
-            <a:lvl4pPr marL="1028700" indent="0">
-              <a:buNone/>
-              <a:defRPr sz="1200" b="1"/>
+            <a:lvl4pPr marL="1371566" indent="0">
+              <a:buNone/>
+              <a:defRPr sz="1600" b="1"/>
             </a:lvl4pPr>
-            <a:lvl5pPr marL="1371600" indent="0">
-              <a:buNone/>
-              <a:defRPr sz="1200" b="1"/>
+            <a:lvl5pPr marL="1828754" indent="0">
+              <a:buNone/>
+              <a:defRPr sz="1600" b="1"/>
             </a:lvl5pPr>
-            <a:lvl6pPr marL="1714500" indent="0">
-              <a:buNone/>
-              <a:defRPr sz="1200" b="1"/>
+            <a:lvl6pPr marL="2285943" indent="0">
+              <a:buNone/>
+              <a:defRPr sz="1600" b="1"/>
             </a:lvl6pPr>
-            <a:lvl7pPr marL="2057400" indent="0">
-              <a:buNone/>
-              <a:defRPr sz="1200" b="1"/>
+            <a:lvl7pPr marL="2743131" indent="0">
+              <a:buNone/>
+              <a:defRPr sz="1600" b="1"/>
             </a:lvl7pPr>
-            <a:lvl8pPr marL="2400300" indent="0">
-              <a:buNone/>
-              <a:defRPr sz="1200" b="1"/>
+            <a:lvl8pPr marL="3200320" indent="0">
+              <a:buNone/>
+              <a:defRPr sz="1600" b="1"/>
             </a:lvl8pPr>
-            <a:lvl9pPr marL="2743200" indent="0">
-              <a:buNone/>
-              <a:defRPr sz="1200" b="1"/>
+            <a:lvl9pPr marL="3657509" indent="0">
+              <a:buNone/>
+              <a:defRPr sz="1600" b="1"/>
             </a:lvl9pPr>
           </a:lstStyle>
           <a:p>
@@ -6395,39 +6390,39 @@
         </p:nvSpPr>
         <p:spPr>
           <a:xfrm>
-            <a:off x="4645026" y="1631156"/>
-            <a:ext cx="4041775" cy="2963466"/>
+            <a:off x="6193369" y="2174875"/>
+            <a:ext cx="5389033" cy="3951288"/>
           </a:xfrm>
         </p:spPr>
         <p:txBody>
           <a:bodyPr/>
           <a:lstStyle>
             <a:lvl1pPr>
-              <a:defRPr sz="1800"/>
+              <a:defRPr sz="2400"/>
             </a:lvl1pPr>
             <a:lvl2pPr>
-              <a:defRPr sz="1500"/>
+              <a:defRPr sz="2000"/>
             </a:lvl2pPr>
             <a:lvl3pPr>
-              <a:defRPr sz="1350"/>
+              <a:defRPr sz="1800"/>
             </a:lvl3pPr>
             <a:lvl4pPr>
-              <a:defRPr sz="1200"/>
+              <a:defRPr sz="1600"/>
             </a:lvl4pPr>
             <a:lvl5pPr>
-              <a:defRPr sz="1200"/>
+              <a:defRPr sz="1600"/>
             </a:lvl5pPr>
             <a:lvl6pPr>
-              <a:defRPr sz="1200"/>
+              <a:defRPr sz="1600"/>
             </a:lvl6pPr>
             <a:lvl7pPr>
-              <a:defRPr sz="1200"/>
+              <a:defRPr sz="1600"/>
             </a:lvl7pPr>
             <a:lvl8pPr>
-              <a:defRPr sz="1200"/>
+              <a:defRPr sz="1600"/>
             </a:lvl8pPr>
             <a:lvl9pPr>
-              <a:defRPr sz="1200"/>
+              <a:defRPr sz="1600"/>
             </a:lvl9pPr>
           </a:lstStyle>
           <a:p>
@@ -6575,8 +6570,8 @@
         </p:nvSpPr>
         <p:spPr>
           <a:xfrm>
-            <a:off x="8991600" y="0"/>
-            <a:ext cx="152400" cy="5143500"/>
+            <a:off x="11988800" y="0"/>
+            <a:ext cx="203200" cy="6858000"/>
           </a:xfrm>
           <a:prstGeom prst="rect">
             <a:avLst/>
@@ -6607,7 +6602,7 @@
           <a:lstStyle/>
           <a:p>
             <a:pPr algn="ctr"/>
-            <a:endParaRPr lang="en-US"/>
+            <a:endParaRPr lang="en-US" sz="3200"/>
           </a:p>
         </p:txBody>
       </p:sp>
@@ -6771,8 +6766,8 @@
         </p:nvSpPr>
         <p:spPr>
           <a:xfrm>
-            <a:off x="8991600" y="0"/>
-            <a:ext cx="152400" cy="5143500"/>
+            <a:off x="11988800" y="0"/>
+            <a:ext cx="203200" cy="6858000"/>
           </a:xfrm>
           <a:prstGeom prst="rect">
             <a:avLst/>
@@ -6803,7 +6798,7 @@
           <a:lstStyle/>
           <a:p>
             <a:pPr algn="ctr"/>
-            <a:endParaRPr lang="en-US"/>
+            <a:endParaRPr lang="en-US" sz="3200"/>
           </a:p>
         </p:txBody>
       </p:sp>
@@ -6945,8 +6940,8 @@
         </p:nvSpPr>
         <p:spPr>
           <a:xfrm>
-            <a:off x="8991600" y="0"/>
-            <a:ext cx="152400" cy="5143500"/>
+            <a:off x="11988800" y="0"/>
+            <a:ext cx="203200" cy="6858000"/>
           </a:xfrm>
           <a:prstGeom prst="rect">
             <a:avLst/>
@@ -6977,7 +6972,7 @@
           <a:lstStyle/>
           <a:p>
             <a:pPr algn="ctr"/>
-            <a:endParaRPr lang="en-US"/>
+            <a:endParaRPr lang="en-US" sz="3200"/>
           </a:p>
         </p:txBody>
       </p:sp>
@@ -7023,15 +7018,15 @@
         </p:nvSpPr>
         <p:spPr>
           <a:xfrm>
-            <a:off x="457201" y="204787"/>
-            <a:ext cx="3008313" cy="871538"/>
+            <a:off x="609602" y="273049"/>
+            <a:ext cx="4011084" cy="1162051"/>
           </a:xfrm>
         </p:spPr>
         <p:txBody>
           <a:bodyPr anchor="b"/>
           <a:lstStyle>
             <a:lvl1pPr algn="l">
-              <a:defRPr sz="1500" b="1"/>
+              <a:defRPr sz="2000" b="1"/>
             </a:lvl1pPr>
           </a:lstStyle>
           <a:p>
@@ -7054,39 +7049,39 @@
         </p:nvSpPr>
         <p:spPr>
           <a:xfrm>
-            <a:off x="3575050" y="204788"/>
-            <a:ext cx="5111750" cy="4389835"/>
+            <a:off x="4766733" y="273052"/>
+            <a:ext cx="6815667" cy="5853113"/>
           </a:xfrm>
         </p:spPr>
         <p:txBody>
           <a:bodyPr/>
           <a:lstStyle>
             <a:lvl1pPr>
-              <a:defRPr sz="2400"/>
+              <a:defRPr sz="3200"/>
             </a:lvl1pPr>
             <a:lvl2pPr>
-              <a:defRPr sz="2100"/>
+              <a:defRPr sz="2800"/>
             </a:lvl2pPr>
             <a:lvl3pPr>
-              <a:defRPr sz="1800"/>
+              <a:defRPr sz="2400"/>
             </a:lvl3pPr>
             <a:lvl4pPr>
-              <a:defRPr sz="1500"/>
+              <a:defRPr sz="2000"/>
             </a:lvl4pPr>
             <a:lvl5pPr>
-              <a:defRPr sz="1500"/>
+              <a:defRPr sz="2000"/>
             </a:lvl5pPr>
             <a:lvl6pPr>
-              <a:defRPr sz="1500"/>
+              <a:defRPr sz="2000"/>
             </a:lvl6pPr>
             <a:lvl7pPr>
-              <a:defRPr sz="1500"/>
+              <a:defRPr sz="2000"/>
             </a:lvl7pPr>
             <a:lvl8pPr>
-              <a:defRPr sz="1500"/>
+              <a:defRPr sz="2000"/>
             </a:lvl8pPr>
             <a:lvl9pPr>
-              <a:defRPr sz="1500"/>
+              <a:defRPr sz="2000"/>
             </a:lvl9pPr>
           </a:lstStyle>
           <a:p>
@@ -7138,8 +7133,8 @@
         </p:nvSpPr>
         <p:spPr>
           <a:xfrm>
-            <a:off x="457201" y="1076326"/>
-            <a:ext cx="3008313" cy="3518297"/>
+            <a:off x="609602" y="1435102"/>
+            <a:ext cx="4011084" cy="4691063"/>
           </a:xfrm>
         </p:spPr>
         <p:txBody>
@@ -7147,39 +7142,39 @@
           <a:lstStyle>
             <a:lvl1pPr marL="0" indent="0">
               <a:buNone/>
-              <a:defRPr sz="1050"/>
+              <a:defRPr sz="1400"/>
             </a:lvl1pPr>
-            <a:lvl2pPr marL="342900" indent="0">
+            <a:lvl2pPr marL="457189" indent="0">
+              <a:buNone/>
+              <a:defRPr sz="1200"/>
+            </a:lvl2pPr>
+            <a:lvl3pPr marL="914377" indent="0">
+              <a:buNone/>
+              <a:defRPr sz="1000"/>
+            </a:lvl3pPr>
+            <a:lvl4pPr marL="1371566" indent="0">
               <a:buNone/>
               <a:defRPr sz="900"/>
-            </a:lvl2pPr>
-            <a:lvl3pPr marL="685800" indent="0">
-              <a:buNone/>
-              <a:defRPr sz="750"/>
-            </a:lvl3pPr>
-            <a:lvl4pPr marL="1028700" indent="0">
-              <a:buNone/>
-              <a:defRPr sz="675"/>
             </a:lvl4pPr>
-            <a:lvl5pPr marL="1371600" indent="0">
-              <a:buNone/>
-              <a:defRPr sz="675"/>
+            <a:lvl5pPr marL="1828754" indent="0">
+              <a:buNone/>
+              <a:defRPr sz="900"/>
             </a:lvl5pPr>
-            <a:lvl6pPr marL="1714500" indent="0">
-              <a:buNone/>
-              <a:defRPr sz="675"/>
+            <a:lvl6pPr marL="2285943" indent="0">
+              <a:buNone/>
+              <a:defRPr sz="900"/>
             </a:lvl6pPr>
-            <a:lvl7pPr marL="2057400" indent="0">
-              <a:buNone/>
-              <a:defRPr sz="675"/>
+            <a:lvl7pPr marL="2743131" indent="0">
+              <a:buNone/>
+              <a:defRPr sz="900"/>
             </a:lvl7pPr>
-            <a:lvl8pPr marL="2400300" indent="0">
-              <a:buNone/>
-              <a:defRPr sz="675"/>
+            <a:lvl8pPr marL="3200320" indent="0">
+              <a:buNone/>
+              <a:defRPr sz="900"/>
             </a:lvl8pPr>
-            <a:lvl9pPr marL="2743200" indent="0">
-              <a:buNone/>
-              <a:defRPr sz="675"/>
+            <a:lvl9pPr marL="3657509" indent="0">
+              <a:buNone/>
+              <a:defRPr sz="900"/>
             </a:lvl9pPr>
           </a:lstStyle>
           <a:p>
@@ -7299,8 +7294,8 @@
         </p:nvSpPr>
         <p:spPr>
           <a:xfrm>
-            <a:off x="8991600" y="0"/>
-            <a:ext cx="152400" cy="5143500"/>
+            <a:off x="11988800" y="0"/>
+            <a:ext cx="203200" cy="6858000"/>
           </a:xfrm>
           <a:prstGeom prst="rect">
             <a:avLst/>
@@ -7331,7 +7326,7 @@
           <a:lstStyle/>
           <a:p>
             <a:pPr algn="ctr"/>
-            <a:endParaRPr lang="en-US"/>
+            <a:endParaRPr lang="en-US" sz="3200"/>
           </a:p>
         </p:txBody>
       </p:sp>
@@ -7377,15 +7372,15 @@
         </p:nvSpPr>
         <p:spPr>
           <a:xfrm>
-            <a:off x="1792288" y="3600450"/>
-            <a:ext cx="5486400" cy="425054"/>
+            <a:off x="2389717" y="4800600"/>
+            <a:ext cx="7315200" cy="566739"/>
           </a:xfrm>
         </p:spPr>
         <p:txBody>
           <a:bodyPr anchor="b"/>
           <a:lstStyle>
             <a:lvl1pPr algn="l">
-              <a:defRPr sz="1500" b="1"/>
+              <a:defRPr sz="2000" b="1"/>
             </a:lvl1pPr>
           </a:lstStyle>
           <a:p>
@@ -7408,8 +7403,8 @@
         </p:nvSpPr>
         <p:spPr>
           <a:xfrm>
-            <a:off x="1792288" y="459581"/>
-            <a:ext cx="5486400" cy="3086100"/>
+            <a:off x="2389717" y="612775"/>
+            <a:ext cx="7315200" cy="4114800"/>
           </a:xfrm>
         </p:spPr>
         <p:txBody>
@@ -7417,39 +7412,39 @@
           <a:lstStyle>
             <a:lvl1pPr marL="0" indent="0">
               <a:buNone/>
+              <a:defRPr sz="3200"/>
+            </a:lvl1pPr>
+            <a:lvl2pPr marL="457189" indent="0">
+              <a:buNone/>
+              <a:defRPr sz="2800"/>
+            </a:lvl2pPr>
+            <a:lvl3pPr marL="914377" indent="0">
+              <a:buNone/>
               <a:defRPr sz="2400"/>
-            </a:lvl1pPr>
-            <a:lvl2pPr marL="342900" indent="0">
-              <a:buNone/>
-              <a:defRPr sz="2100"/>
-            </a:lvl2pPr>
-            <a:lvl3pPr marL="685800" indent="0">
-              <a:buNone/>
-              <a:defRPr sz="1800"/>
             </a:lvl3pPr>
-            <a:lvl4pPr marL="1028700" indent="0">
-              <a:buNone/>
-              <a:defRPr sz="1500"/>
+            <a:lvl4pPr marL="1371566" indent="0">
+              <a:buNone/>
+              <a:defRPr sz="2000"/>
             </a:lvl4pPr>
-            <a:lvl5pPr marL="1371600" indent="0">
-              <a:buNone/>
-              <a:defRPr sz="1500"/>
+            <a:lvl5pPr marL="1828754" indent="0">
+              <a:buNone/>
+              <a:defRPr sz="2000"/>
             </a:lvl5pPr>
-            <a:lvl6pPr marL="1714500" indent="0">
-              <a:buNone/>
-              <a:defRPr sz="1500"/>
+            <a:lvl6pPr marL="2285943" indent="0">
+              <a:buNone/>
+              <a:defRPr sz="2000"/>
             </a:lvl6pPr>
-            <a:lvl7pPr marL="2057400" indent="0">
-              <a:buNone/>
-              <a:defRPr sz="1500"/>
+            <a:lvl7pPr marL="2743131" indent="0">
+              <a:buNone/>
+              <a:defRPr sz="2000"/>
             </a:lvl7pPr>
-            <a:lvl8pPr marL="2400300" indent="0">
-              <a:buNone/>
-              <a:defRPr sz="1500"/>
+            <a:lvl8pPr marL="3200320" indent="0">
+              <a:buNone/>
+              <a:defRPr sz="2000"/>
             </a:lvl8pPr>
-            <a:lvl9pPr marL="2743200" indent="0">
-              <a:buNone/>
-              <a:defRPr sz="1500"/>
+            <a:lvl9pPr marL="3657509" indent="0">
+              <a:buNone/>
+              <a:defRPr sz="2000"/>
             </a:lvl9pPr>
           </a:lstStyle>
           <a:p>
@@ -7469,8 +7464,8 @@
         </p:nvSpPr>
         <p:spPr>
           <a:xfrm>
-            <a:off x="1792288" y="4025503"/>
-            <a:ext cx="5486400" cy="603647"/>
+            <a:off x="2389717" y="5367338"/>
+            <a:ext cx="7315200" cy="804863"/>
           </a:xfrm>
         </p:spPr>
         <p:txBody>
@@ -7478,39 +7473,39 @@
           <a:lstStyle>
             <a:lvl1pPr marL="0" indent="0">
               <a:buNone/>
-              <a:defRPr sz="1050"/>
+              <a:defRPr sz="1400"/>
             </a:lvl1pPr>
-            <a:lvl2pPr marL="342900" indent="0">
+            <a:lvl2pPr marL="457189" indent="0">
+              <a:buNone/>
+              <a:defRPr sz="1200"/>
+            </a:lvl2pPr>
+            <a:lvl3pPr marL="914377" indent="0">
+              <a:buNone/>
+              <a:defRPr sz="1000"/>
+            </a:lvl3pPr>
+            <a:lvl4pPr marL="1371566" indent="0">
               <a:buNone/>
               <a:defRPr sz="900"/>
-            </a:lvl2pPr>
-            <a:lvl3pPr marL="685800" indent="0">
-              <a:buNone/>
-              <a:defRPr sz="750"/>
-            </a:lvl3pPr>
-            <a:lvl4pPr marL="1028700" indent="0">
-              <a:buNone/>
-              <a:defRPr sz="675"/>
             </a:lvl4pPr>
-            <a:lvl5pPr marL="1371600" indent="0">
-              <a:buNone/>
-              <a:defRPr sz="675"/>
+            <a:lvl5pPr marL="1828754" indent="0">
+              <a:buNone/>
+              <a:defRPr sz="900"/>
             </a:lvl5pPr>
-            <a:lvl6pPr marL="1714500" indent="0">
-              <a:buNone/>
-              <a:defRPr sz="675"/>
+            <a:lvl6pPr marL="2285943" indent="0">
+              <a:buNone/>
+              <a:defRPr sz="900"/>
             </a:lvl6pPr>
-            <a:lvl7pPr marL="2057400" indent="0">
-              <a:buNone/>
-              <a:defRPr sz="675"/>
+            <a:lvl7pPr marL="2743131" indent="0">
+              <a:buNone/>
+              <a:defRPr sz="900"/>
             </a:lvl7pPr>
-            <a:lvl8pPr marL="2400300" indent="0">
-              <a:buNone/>
-              <a:defRPr sz="675"/>
+            <a:lvl8pPr marL="3200320" indent="0">
+              <a:buNone/>
+              <a:defRPr sz="900"/>
             </a:lvl8pPr>
-            <a:lvl9pPr marL="2743200" indent="0">
-              <a:buNone/>
-              <a:defRPr sz="675"/>
+            <a:lvl9pPr marL="3657509" indent="0">
+              <a:buNone/>
+              <a:defRPr sz="900"/>
             </a:lvl9pPr>
           </a:lstStyle>
           <a:p>
@@ -7630,8 +7625,8 @@
         </p:nvSpPr>
         <p:spPr>
           <a:xfrm>
-            <a:off x="8991600" y="0"/>
-            <a:ext cx="152400" cy="5143500"/>
+            <a:off x="11988800" y="0"/>
+            <a:ext cx="203200" cy="6858000"/>
           </a:xfrm>
           <a:prstGeom prst="rect">
             <a:avLst/>
@@ -7662,7 +7657,7 @@
           <a:lstStyle/>
           <a:p>
             <a:pPr algn="ctr"/>
-            <a:endParaRPr lang="en-US"/>
+            <a:endParaRPr lang="en-US" sz="3200"/>
           </a:p>
         </p:txBody>
       </p:sp>
@@ -7713,8 +7708,8 @@
         </p:nvSpPr>
         <p:spPr>
           <a:xfrm>
-            <a:off x="457200" y="138111"/>
-            <a:ext cx="8229600" cy="857250"/>
+            <a:off x="609600" y="184148"/>
+            <a:ext cx="10972800" cy="1143000"/>
           </a:xfrm>
           <a:prstGeom prst="rect">
             <a:avLst/>
@@ -7745,8 +7740,8 @@
         </p:nvSpPr>
         <p:spPr>
           <a:xfrm>
-            <a:off x="457200" y="1200151"/>
-            <a:ext cx="8229600" cy="3394472"/>
+            <a:off x="609600" y="1600201"/>
+            <a:ext cx="10972800" cy="4525963"/>
           </a:xfrm>
           <a:prstGeom prst="rect">
             <a:avLst/>
@@ -7806,8 +7801,8 @@
         </p:nvSpPr>
         <p:spPr>
           <a:xfrm>
-            <a:off x="1995729" y="4774118"/>
-            <a:ext cx="1363851" cy="223839"/>
+            <a:off x="2660973" y="6365491"/>
+            <a:ext cx="1818468" cy="298452"/>
           </a:xfrm>
           <a:prstGeom prst="rect">
             <a:avLst/>
@@ -7817,7 +7812,7 @@
           <a:bodyPr anchor="ctr" bIns="45720" lIns="91440" rIns="91440" rtlCol="0" tIns="45720" vert="horz"/>
           <a:lstStyle>
             <a:lvl1pPr algn="l">
-              <a:defRPr sz="900">
+              <a:defRPr sz="1200">
                 <a:solidFill>
                   <a:schemeClr val="tx1">
                     <a:tint val="75000"/>
@@ -7848,8 +7843,8 @@
         </p:nvSpPr>
         <p:spPr>
           <a:xfrm>
-            <a:off x="3542008" y="4774116"/>
-            <a:ext cx="2059983" cy="223839"/>
+            <a:off x="4722678" y="6365489"/>
+            <a:ext cx="2746644" cy="298452"/>
           </a:xfrm>
           <a:prstGeom prst="rect">
             <a:avLst/>
@@ -7859,7 +7854,7 @@
           <a:bodyPr anchor="ctr" bIns="45720" lIns="91440" rIns="91440" rtlCol="0" tIns="45720" vert="horz"/>
           <a:lstStyle>
             <a:lvl1pPr algn="ctr">
-              <a:defRPr sz="900">
+              <a:defRPr sz="1200">
                 <a:solidFill>
                   <a:schemeClr val="tx1">
                     <a:tint val="75000"/>
@@ -7888,8 +7883,8 @@
         </p:nvSpPr>
         <p:spPr>
           <a:xfrm>
-            <a:off x="5784419" y="4774116"/>
-            <a:ext cx="1363851" cy="223840"/>
+            <a:off x="7712559" y="6365488"/>
+            <a:ext cx="1818468" cy="298453"/>
           </a:xfrm>
           <a:prstGeom prst="rect">
             <a:avLst/>
@@ -7899,7 +7894,7 @@
           <a:bodyPr anchor="ctr" bIns="45720" lIns="91440" rIns="91440" rtlCol="0" tIns="45720" vert="horz"/>
           <a:lstStyle>
             <a:lvl1pPr algn="r">
-              <a:defRPr sz="900">
+              <a:defRPr sz="1200">
                 <a:solidFill>
                   <a:schemeClr val="tx1">
                     <a:tint val="75000"/>
@@ -7951,8 +7946,8 @@
         </p:blipFill>
         <p:spPr>
           <a:xfrm>
-            <a:off x="8134028" y="4725240"/>
-            <a:ext cx="857572" cy="321589"/>
+            <a:off x="10845371" y="6300321"/>
+            <a:ext cx="1143429" cy="428785"/>
           </a:xfrm>
           <a:prstGeom prst="rect">
             <a:avLst/>
@@ -7983,12 +7978,12 @@
   <p:hf hdr="0"/>
   <p:txStyles>
     <p:titleStyle>
-      <a:lvl1pPr algn="ctr" defTabSz="342900" eaLnBrk="1" hangingPunct="1" latinLnBrk="0" rtl="0">
+      <a:lvl1pPr algn="ctr" defTabSz="457189" eaLnBrk="1" hangingPunct="1" latinLnBrk="0" rtl="0">
         <a:spcBef>
           <a:spcPct val="0"/>
         </a:spcBef>
         <a:buNone/>
-        <a:defRPr b="1" i="0" kern="1200" sz="2800">
+        <a:defRPr b="1" i="0" kern="1200" sz="3733">
           <a:solidFill>
             <a:schemeClr val="tx1"/>
           </a:solidFill>
@@ -7999,12 +7994,44 @@
       </a:lvl1pPr>
     </p:titleStyle>
     <p:bodyStyle>
-      <a:lvl1pPr algn="l" defTabSz="342900" eaLnBrk="1" hangingPunct="1" indent="-342900" latinLnBrk="0" marL="342900" rtl="0">
+      <a:lvl1pPr algn="l" defTabSz="457189" eaLnBrk="1" hangingPunct="1" indent="-457189" latinLnBrk="0" marL="457189" rtl="0">
         <a:spcBef>
           <a:spcPct val="20000"/>
         </a:spcBef>
         <a:buFont charset="0" panose="020B0604020202020204" pitchFamily="34" typeface="Arial"/>
         <a:buChar char="•"/>
+        <a:defRPr b="0" i="0" kern="1200" sz="2200">
+          <a:solidFill>
+            <a:schemeClr val="tx1"/>
+          </a:solidFill>
+          <a:latin charset="0" panose="020B0004020202020204" pitchFamily="34" typeface="Aptos"/>
+          <a:ea charset="0" panose="020B0604030504040204" pitchFamily="34" typeface="Verdana"/>
+          <a:cs charset="0" panose="020B0604030504040204" pitchFamily="34" typeface="Verdana"/>
+        </a:defRPr>
+      </a:lvl1pPr>
+      <a:lvl2pPr algn="l" defTabSz="457189" eaLnBrk="1" hangingPunct="1" indent="-461422" latinLnBrk="0" marL="768331" rtl="0">
+        <a:spcBef>
+          <a:spcPct val="20000"/>
+        </a:spcBef>
+        <a:buFont charset="2" pitchFamily="2" typeface="Wingdings"/>
+        <a:buChar char="§"/>
+        <a:tabLst/>
+        <a:defRPr b="0" i="0" kern="1200" sz="2000">
+          <a:solidFill>
+            <a:schemeClr val="tx1"/>
+          </a:solidFill>
+          <a:latin charset="0" panose="020B0004020202020204" pitchFamily="34" typeface="Aptos"/>
+          <a:ea charset="0" panose="020B0604030504040204" pitchFamily="34" typeface="Verdana"/>
+          <a:cs charset="0" panose="020B0604030504040204" pitchFamily="34" typeface="Verdana"/>
+        </a:defRPr>
+      </a:lvl2pPr>
+      <a:lvl3pPr algn="l" defTabSz="457189" eaLnBrk="1" hangingPunct="1" indent="-452955" latinLnBrk="0" marL="1149322" rtl="0">
+        <a:spcBef>
+          <a:spcPct val="20000"/>
+        </a:spcBef>
+        <a:buFont charset="0" panose="02070309020205020404" pitchFamily="49" typeface="Courier New"/>
+        <a:buChar char="o"/>
+        <a:tabLst/>
         <a:defRPr b="0" i="0" kern="1200" sz="1800">
           <a:solidFill>
             <a:schemeClr val="tx1"/>
@@ -8013,13 +8040,13 @@
           <a:ea charset="0" panose="020B0604030504040204" pitchFamily="34" typeface="Verdana"/>
           <a:cs charset="0" panose="020B0604030504040204" pitchFamily="34" typeface="Verdana"/>
         </a:defRPr>
-      </a:lvl1pPr>
-      <a:lvl2pPr algn="l" defTabSz="342900" eaLnBrk="1" hangingPunct="1" indent="-346075" latinLnBrk="0" marL="576263" rtl="0">
+      </a:lvl3pPr>
+      <a:lvl4pPr algn="l" defTabSz="457189" eaLnBrk="1" hangingPunct="1" indent="-461422" latinLnBrk="0" marL="1600160" rtl="0">
         <a:spcBef>
           <a:spcPct val="20000"/>
         </a:spcBef>
-        <a:buFont charset="2" pitchFamily="2" typeface="Wingdings"/>
-        <a:buChar char="§"/>
+        <a:buFont typeface="Arial"/>
+        <a:buChar char="–"/>
         <a:tabLst/>
         <a:defRPr b="0" i="0" kern="1200" sz="1600">
           <a:solidFill>
@@ -8029,47 +8056,15 @@
           <a:ea charset="0" panose="020B0604030504040204" pitchFamily="34" typeface="Verdana"/>
           <a:cs charset="0" panose="020B0604030504040204" pitchFamily="34" typeface="Verdana"/>
         </a:defRPr>
-      </a:lvl2pPr>
-      <a:lvl3pPr algn="l" defTabSz="342900" eaLnBrk="1" hangingPunct="1" indent="-339725" latinLnBrk="0" marL="862013" rtl="0">
-        <a:spcBef>
-          <a:spcPct val="20000"/>
-        </a:spcBef>
-        <a:buFont charset="0" panose="02070309020205020404" pitchFamily="49" typeface="Courier New"/>
-        <a:buChar char="o"/>
-        <a:tabLst/>
-        <a:defRPr b="0" i="0" kern="1200" sz="1400">
-          <a:solidFill>
-            <a:schemeClr val="tx1"/>
-          </a:solidFill>
-          <a:latin charset="0" panose="020B0004020202020204" pitchFamily="34" typeface="Aptos"/>
-          <a:ea charset="0" panose="020B0604030504040204" pitchFamily="34" typeface="Verdana"/>
-          <a:cs charset="0" panose="020B0604030504040204" pitchFamily="34" typeface="Verdana"/>
-        </a:defRPr>
-      </a:lvl3pPr>
-      <a:lvl4pPr algn="l" defTabSz="342900" eaLnBrk="1" hangingPunct="1" indent="-346075" latinLnBrk="0" marL="1200150" rtl="0">
-        <a:spcBef>
-          <a:spcPct val="20000"/>
-        </a:spcBef>
-        <a:buFont typeface="Arial"/>
-        <a:buChar char="–"/>
-        <a:tabLst/>
-        <a:defRPr b="0" i="0" kern="1200" sz="1200">
-          <a:solidFill>
-            <a:schemeClr val="tx1"/>
-          </a:solidFill>
-          <a:latin charset="0" panose="020B0004020202020204" pitchFamily="34" typeface="Aptos"/>
-          <a:ea charset="0" panose="020B0604030504040204" pitchFamily="34" typeface="Verdana"/>
-          <a:cs charset="0" panose="020B0604030504040204" pitchFamily="34" typeface="Verdana"/>
-        </a:defRPr>
       </a:lvl4pPr>
-      <a:lvl5pPr algn="l" defTabSz="342900" eaLnBrk="1" hangingPunct="1" indent="-338138" latinLnBrk="0" marL="1492250" rtl="0">
+      <a:lvl5pPr algn="l" defTabSz="457189" eaLnBrk="1" hangingPunct="1" indent="-450839" latinLnBrk="0" marL="1989617" rtl="0">
         <a:spcBef>
           <a:spcPct val="20000"/>
         </a:spcBef>
         <a:buFont typeface="Arial"/>
         <a:buChar char="»"/>
         <a:tabLst/>
-        <a:defRPr b="0" i="0" kern="1200" sz="1200">
+        <a:defRPr b="0" i="0" kern="1200" sz="1600">
           <a:solidFill>
             <a:schemeClr val="tx1">
               <a:lumMod val="65000"/>
@@ -8081,13 +8076,13 @@
           <a:cs charset="0" panose="020B0604030504040204" pitchFamily="34" typeface="Verdana"/>
         </a:defRPr>
       </a:lvl5pPr>
-      <a:lvl6pPr algn="l" defTabSz="342900" eaLnBrk="1" hangingPunct="1" indent="-342900" latinLnBrk="0" marL="2057400" rtl="0">
+      <a:lvl6pPr algn="l" defTabSz="457189" eaLnBrk="1" hangingPunct="1" indent="-457189" latinLnBrk="0" marL="2743131" rtl="0">
         <a:spcBef>
           <a:spcPct val="20000"/>
         </a:spcBef>
         <a:buFont typeface="Arial"/>
         <a:buChar char="•"/>
-        <a:defRPr kern="1200" sz="1500">
+        <a:defRPr kern="1200" sz="2000">
           <a:solidFill>
             <a:schemeClr val="tx1"/>
           </a:solidFill>
@@ -8096,13 +8091,13 @@
           <a:cs typeface="+mn-cs"/>
         </a:defRPr>
       </a:lvl6pPr>
-      <a:lvl7pPr algn="l" defTabSz="342900" eaLnBrk="1" hangingPunct="1" indent="-342900" latinLnBrk="0" marL="2400300" rtl="0">
+      <a:lvl7pPr algn="l" defTabSz="457189" eaLnBrk="1" hangingPunct="1" indent="-457189" latinLnBrk="0" marL="3200320" rtl="0">
         <a:spcBef>
           <a:spcPct val="20000"/>
         </a:spcBef>
         <a:buFont typeface="Arial"/>
         <a:buChar char="•"/>
-        <a:defRPr kern="1200" sz="1500">
+        <a:defRPr kern="1200" sz="2000">
           <a:solidFill>
             <a:schemeClr val="tx1"/>
           </a:solidFill>
@@ -8111,13 +8106,13 @@
           <a:cs typeface="+mn-cs"/>
         </a:defRPr>
       </a:lvl7pPr>
-      <a:lvl8pPr algn="l" defTabSz="342900" eaLnBrk="1" hangingPunct="1" indent="-342900" latinLnBrk="0" marL="2743200" rtl="0">
+      <a:lvl8pPr algn="l" defTabSz="457189" eaLnBrk="1" hangingPunct="1" indent="-457189" latinLnBrk="0" marL="3657509" rtl="0">
         <a:spcBef>
           <a:spcPct val="20000"/>
         </a:spcBef>
         <a:buFont typeface="Arial"/>
         <a:buChar char="•"/>
-        <a:defRPr kern="1200" sz="1500">
+        <a:defRPr kern="1200" sz="2000">
           <a:solidFill>
             <a:schemeClr val="tx1"/>
           </a:solidFill>
@@ -8126,13 +8121,13 @@
           <a:cs typeface="+mn-cs"/>
         </a:defRPr>
       </a:lvl8pPr>
-      <a:lvl9pPr algn="l" defTabSz="342900" eaLnBrk="1" hangingPunct="1" indent="-342900" latinLnBrk="0" marL="3086100" rtl="0">
+      <a:lvl9pPr algn="l" defTabSz="457189" eaLnBrk="1" hangingPunct="1" indent="-457189" latinLnBrk="0" marL="4114697" rtl="0">
         <a:spcBef>
           <a:spcPct val="20000"/>
         </a:spcBef>
         <a:buFont typeface="Arial"/>
         <a:buChar char="•"/>
-        <a:defRPr kern="1200" sz="1500">
+        <a:defRPr kern="1200" sz="2000">
           <a:solidFill>
             <a:schemeClr val="tx1"/>
           </a:solidFill>
@@ -8146,8 +8141,8 @@
       <a:defPPr>
         <a:defRPr lang="en-US"/>
       </a:defPPr>
-      <a:lvl1pPr algn="l" defTabSz="342900" eaLnBrk="1" hangingPunct="1" latinLnBrk="0" marL="0" rtl="0">
-        <a:defRPr kern="1200" sz="1350">
+      <a:lvl1pPr algn="l" defTabSz="457189" eaLnBrk="1" hangingPunct="1" latinLnBrk="0" marL="0" rtl="0">
+        <a:defRPr kern="1200" sz="1800">
           <a:solidFill>
             <a:schemeClr val="tx1"/>
           </a:solidFill>
@@ -8156,8 +8151,8 @@
           <a:cs typeface="+mn-cs"/>
         </a:defRPr>
       </a:lvl1pPr>
-      <a:lvl2pPr algn="l" defTabSz="342900" eaLnBrk="1" hangingPunct="1" latinLnBrk="0" marL="342900" rtl="0">
-        <a:defRPr kern="1200" sz="1350">
+      <a:lvl2pPr algn="l" defTabSz="457189" eaLnBrk="1" hangingPunct="1" latinLnBrk="0" marL="457189" rtl="0">
+        <a:defRPr kern="1200" sz="1800">
           <a:solidFill>
             <a:schemeClr val="tx1"/>
           </a:solidFill>
@@ -8166,8 +8161,8 @@
           <a:cs typeface="+mn-cs"/>
         </a:defRPr>
       </a:lvl2pPr>
-      <a:lvl3pPr algn="l" defTabSz="342900" eaLnBrk="1" hangingPunct="1" latinLnBrk="0" marL="685800" rtl="0">
-        <a:defRPr kern="1200" sz="1350">
+      <a:lvl3pPr algn="l" defTabSz="457189" eaLnBrk="1" hangingPunct="1" latinLnBrk="0" marL="914377" rtl="0">
+        <a:defRPr kern="1200" sz="1800">
           <a:solidFill>
             <a:schemeClr val="tx1"/>
           </a:solidFill>
@@ -8176,8 +8171,8 @@
           <a:cs typeface="+mn-cs"/>
         </a:defRPr>
       </a:lvl3pPr>
-      <a:lvl4pPr algn="l" defTabSz="342900" eaLnBrk="1" hangingPunct="1" latinLnBrk="0" marL="1028700" rtl="0">
-        <a:defRPr kern="1200" sz="1350">
+      <a:lvl4pPr algn="l" defTabSz="457189" eaLnBrk="1" hangingPunct="1" latinLnBrk="0" marL="1371566" rtl="0">
+        <a:defRPr kern="1200" sz="1800">
           <a:solidFill>
             <a:schemeClr val="tx1"/>
           </a:solidFill>
@@ -8186,8 +8181,8 @@
           <a:cs typeface="+mn-cs"/>
         </a:defRPr>
       </a:lvl4pPr>
-      <a:lvl5pPr algn="l" defTabSz="342900" eaLnBrk="1" hangingPunct="1" latinLnBrk="0" marL="1371600" rtl="0">
-        <a:defRPr kern="1200" sz="1350">
+      <a:lvl5pPr algn="l" defTabSz="457189" eaLnBrk="1" hangingPunct="1" latinLnBrk="0" marL="1828754" rtl="0">
+        <a:defRPr kern="1200" sz="1800">
           <a:solidFill>
             <a:schemeClr val="tx1"/>
           </a:solidFill>
@@ -8196,8 +8191,8 @@
           <a:cs typeface="+mn-cs"/>
         </a:defRPr>
       </a:lvl5pPr>
-      <a:lvl6pPr algn="l" defTabSz="342900" eaLnBrk="1" hangingPunct="1" latinLnBrk="0" marL="1714500" rtl="0">
-        <a:defRPr kern="1200" sz="1350">
+      <a:lvl6pPr algn="l" defTabSz="457189" eaLnBrk="1" hangingPunct="1" latinLnBrk="0" marL="2285943" rtl="0">
+        <a:defRPr kern="1200" sz="1800">
           <a:solidFill>
             <a:schemeClr val="tx1"/>
           </a:solidFill>
@@ -8206,8 +8201,8 @@
           <a:cs typeface="+mn-cs"/>
         </a:defRPr>
       </a:lvl6pPr>
-      <a:lvl7pPr algn="l" defTabSz="342900" eaLnBrk="1" hangingPunct="1" latinLnBrk="0" marL="2057400" rtl="0">
-        <a:defRPr kern="1200" sz="1350">
+      <a:lvl7pPr algn="l" defTabSz="457189" eaLnBrk="1" hangingPunct="1" latinLnBrk="0" marL="2743131" rtl="0">
+        <a:defRPr kern="1200" sz="1800">
           <a:solidFill>
             <a:schemeClr val="tx1"/>
           </a:solidFill>
@@ -8216,8 +8211,8 @@
           <a:cs typeface="+mn-cs"/>
         </a:defRPr>
       </a:lvl7pPr>
-      <a:lvl8pPr algn="l" defTabSz="342900" eaLnBrk="1" hangingPunct="1" latinLnBrk="0" marL="2400300" rtl="0">
-        <a:defRPr kern="1200" sz="1350">
+      <a:lvl8pPr algn="l" defTabSz="457189" eaLnBrk="1" hangingPunct="1" latinLnBrk="0" marL="3200320" rtl="0">
+        <a:defRPr kern="1200" sz="1800">
           <a:solidFill>
             <a:schemeClr val="tx1"/>
           </a:solidFill>
@@ -8226,8 +8221,8 @@
           <a:cs typeface="+mn-cs"/>
         </a:defRPr>
       </a:lvl8pPr>
-      <a:lvl9pPr algn="l" defTabSz="342900" eaLnBrk="1" hangingPunct="1" latinLnBrk="0" marL="2743200" rtl="0">
-        <a:defRPr kern="1200" sz="1350">
+      <a:lvl9pPr algn="l" defTabSz="457189" eaLnBrk="1" hangingPunct="1" latinLnBrk="0" marL="3657509" rtl="0">
+        <a:defRPr kern="1200" sz="1800">
           <a:solidFill>
             <a:schemeClr val="tx1"/>
           </a:solidFill>
@@ -8241,27 +8236,27 @@
   <p:extLst>
     <p:ext uri="{27BBF7A9-308A-43DC-89C8-2F10F3537804}">
       <p15:sldGuideLst xmlns:p15="http://schemas.microsoft.com/office/powerpoint/2012/main">
-        <p15:guide id="1" orient="horz" pos="84" userDrawn="1">
+        <p15:guide id="1" orient="horz" pos="112" userDrawn="1">
           <p15:clr>
             <a:srgbClr val="F26B43"/>
           </p15:clr>
         </p15:guide>
-        <p15:guide id="2" pos="96" userDrawn="1">
+        <p15:guide id="2" pos="128" userDrawn="1">
           <p15:clr>
             <a:srgbClr val="F26B43"/>
           </p15:clr>
         </p15:guide>
-        <p15:guide id="3" orient="horz" pos="3156" userDrawn="1">
+        <p15:guide id="3" orient="horz" pos="4208" userDrawn="1">
           <p15:clr>
             <a:srgbClr val="F26B43"/>
           </p15:clr>
         </p15:guide>
-        <p15:guide id="4" pos="5664" userDrawn="1">
+        <p15:guide id="4" pos="7552" userDrawn="1">
           <p15:clr>
             <a:srgbClr val="F26B43"/>
           </p15:clr>
         </p15:guide>
-        <p15:guide id="5" pos="2880" userDrawn="1">
+        <p15:guide id="5" pos="3840" userDrawn="1">
           <p15:clr>
             <a:srgbClr val="F26B43"/>
           </p15:clr>
@@ -8301,8 +8296,8 @@
         </p:nvSpPr>
         <p:spPr>
           <a:xfrm>
-            <a:off x="685800" y="1597819"/>
-            <a:ext cx="7772400" cy="1102519"/>
+            <a:off x="914400" y="2130426"/>
+            <a:ext cx="10363200" cy="1470025"/>
           </a:xfrm>
         </p:spPr>
         <p:txBody>
@@ -8331,8 +8326,8 @@
         </p:nvSpPr>
         <p:spPr>
           <a:xfrm>
-            <a:off x="1371600" y="2914650"/>
-            <a:ext cx="6400800" cy="1314450"/>
+            <a:off x="1828800" y="3886200"/>
+            <a:ext cx="8534400" cy="1752600"/>
           </a:xfrm>
         </p:spPr>
         <p:txBody>
@@ -8381,314 +8376,42 @@
             <p:ph type="title"/>
           </p:nvPr>
         </p:nvSpPr>
-        <p:spPr>
-          <a:xfrm>
-            <a:off x="457201" y="204787"/>
-            <a:ext cx="3008313" cy="871538"/>
-          </a:xfrm>
-        </p:spPr>
-        <p:txBody>
-          <a:bodyPr/>
-          <a:lstStyle/>
-          <a:p>
-            <a:pPr lvl="0" indent="0" marL="0">
-              <a:buNone/>
-            </a:pPr>
-            <a:r>
-              <a:rPr/>
-              <a:t>Prerequisites (cont.)</a:t>
-            </a:r>
-          </a:p>
-        </p:txBody>
-      </p:sp>
-      <p:sp>
-        <p:nvSpPr>
-          <p:cNvPr id="4" name="Text Placeholder 3"/>
-          <p:cNvSpPr>
-            <a:spLocks noGrp="1"/>
-          </p:cNvSpPr>
-          <p:nvPr>
-            <p:ph idx="2" sz="half" type="body"/>
-          </p:nvPr>
-        </p:nvSpPr>
-        <p:spPr/>
-        <p:txBody>
-          <a:bodyPr/>
-          <a:lstStyle/>
-          <a:p>
-            <a:pPr lvl="0"/>
-            <a:r>
-              <a:rPr/>
-              <a:t>Familiarity with the concept of </a:t>
-            </a:r>
+        <p:spPr/>
+        <p:txBody>
+          <a:bodyPr/>
+          <a:lstStyle/>
+          <a:p>
+            <a:pPr lvl="0" indent="0" marL="0">
+              <a:buNone/>
+            </a:pPr>
+            <a:r>
+              <a:rPr/>
+              <a:t>Discussion of survey results</a:t>
+            </a:r>
+          </a:p>
+        </p:txBody>
+      </p:sp>
+      <p:sp>
+        <p:nvSpPr>
+          <p:cNvPr id="3" name="Content Placeholder 2"/>
+          <p:cNvSpPr>
+            <a:spLocks noGrp="1"/>
+          </p:cNvSpPr>
+          <p:nvPr>
+            <p:ph idx="1"/>
+          </p:nvPr>
+        </p:nvSpPr>
+        <p:spPr/>
+        <p:txBody>
+          <a:bodyPr/>
+          <a:lstStyle/>
+          <a:p>
+            <a:pPr lvl="0" indent="0" marL="0">
+              <a:buNone/>
+            </a:pPr>
             <a:r>
               <a:rPr b="1"/>
-              <a:t>literature review</a:t>
-            </a:r>
-            <a:r>
-              <a:rPr/>
-              <a:t>; how and where to access scientific papers, such as </a:t>
-            </a:r>
-            <a:r>
-              <a:rPr i="1"/>
-              <a:t>Google Scholar</a:t>
-            </a:r>
-            <a:r>
-              <a:rPr/>
-              <a:t>.</a:t>
-            </a:r>
-          </a:p>
-        </p:txBody>
-      </p:sp>
-      <p:pic>
-        <p:nvPicPr>
-          <p:cNvPr descr="images/GoogleScholar.png" id="0" name="Picture 1"/>
-          <p:cNvPicPr>
-            <a:picLocks noGrp="1" noChangeAspect="1"/>
-          </p:cNvPicPr>
-          <p:nvPr/>
-        </p:nvPicPr>
-        <p:blipFill>
-          <a:blip r:embed="rId3"/>
-          <a:stretch>
-            <a:fillRect/>
-          </a:stretch>
-        </p:blipFill>
-        <p:spPr bwMode="auto">
-          <a:xfrm>
-            <a:off x="3568700" y="863600"/>
-            <a:ext cx="5105400" cy="3060700"/>
-          </a:xfrm>
-          <a:prstGeom prst="rect">
-            <a:avLst/>
-          </a:prstGeom>
-          <a:noFill/>
-          <a:ln w="9525">
-            <a:noFill/>
-            <a:headEnd/>
-            <a:tailEnd/>
-          </a:ln>
-        </p:spPr>
-      </p:pic>
-      <p:sp>
-        <p:nvSpPr>
-          <p:cNvPr id="8" name="Date Placeholder 7">
-            <a:extLst>
-              <a:ext uri="{FF2B5EF4-FFF2-40B4-BE49-F238E27FC236}">
-                <a16:creationId xmlns:a16="http://schemas.microsoft.com/office/drawing/2014/main" id="{E6D5126F-053F-910F-7F76-D928AC61372D}"/>
-              </a:ext>
-            </a:extLst>
-          </p:cNvPr>
-          <p:cNvSpPr>
-            <a:spLocks noGrp="1"/>
-          </p:cNvSpPr>
-          <p:nvPr>
-            <p:ph idx="10" sz="half" type="dt"/>
-          </p:nvPr>
-        </p:nvSpPr>
-        <p:spPr/>
-        <p:txBody>
-          <a:bodyPr/>
-          <a:lstStyle/>
-          <a:p>
-            <a:pPr algn="ctr"/>
-            <a:r>
-              <a:rPr lang="en-US"/>
-              <a:t>September 30, 2020</a:t>
-            </a:r>
-            <a:endParaRPr dirty="0" lang="en-US"/>
-          </a:p>
-        </p:txBody>
-      </p:sp>
-      <p:sp>
-        <p:nvSpPr>
-          <p:cNvPr id="9" name="Footer Placeholder 8">
-            <a:extLst>
-              <a:ext uri="{FF2B5EF4-FFF2-40B4-BE49-F238E27FC236}">
-                <a16:creationId xmlns:a16="http://schemas.microsoft.com/office/drawing/2014/main" id="{8EEF7D04-FF72-0698-CE48-A9A4F70D774F}"/>
-              </a:ext>
-            </a:extLst>
-          </p:cNvPr>
-          <p:cNvSpPr>
-            <a:spLocks noGrp="1"/>
-          </p:cNvSpPr>
-          <p:nvPr>
-            <p:ph idx="11" sz="quarter" type="ftr"/>
-          </p:nvPr>
-        </p:nvSpPr>
-        <p:spPr/>
-        <p:txBody>
-          <a:bodyPr/>
-          <a:lstStyle/>
-          <a:p>
-            <a:r>
-              <a:rPr lang="en-US"/>
-              <a:t>© LMU Open Science Center</a:t>
-            </a:r>
-            <a:endParaRPr dirty="0" lang="en-US"/>
-          </a:p>
-        </p:txBody>
-      </p:sp>
-      <p:sp>
-        <p:nvSpPr>
-          <p:cNvPr id="10" name="Slide Number Placeholder 9">
-            <a:extLst>
-              <a:ext uri="{FF2B5EF4-FFF2-40B4-BE49-F238E27FC236}">
-                <a16:creationId xmlns:a16="http://schemas.microsoft.com/office/drawing/2014/main" id="{C8B1F07D-59FC-87D1-1BB5-7C86711059AF}"/>
-              </a:ext>
-            </a:extLst>
-          </p:cNvPr>
-          <p:cNvSpPr>
-            <a:spLocks noGrp="1"/>
-          </p:cNvSpPr>
-          <p:nvPr>
-            <p:ph idx="12" sz="quarter" type="sldNum"/>
-          </p:nvPr>
-        </p:nvSpPr>
-        <p:spPr/>
-        <p:txBody>
-          <a:bodyPr/>
-          <a:lstStyle/>
-          <a:p>
-            <a:pPr algn="ctr"/>
-            <a:r>
-              <a:rPr lang="en-US"/>
-              <a:t>Slide </a:t>
-            </a:r>
-            <a:fld id="{C5EF2332-01BF-834F-8236-50238282D533}" type="slidenum">
-              <a:rPr lang="en-US" smtClean="0"/>
-              <a:pPr algn="ctr"/>
-              <a:t>‹#›</a:t>
-            </a:fld>
-            <a:endParaRPr dirty="0" lang="en-US"/>
-          </a:p>
-        </p:txBody>
-      </p:sp>
-    </p:spTree>
-  </p:cSld>
-  <p:timing>
-    <p:tnLst>
-      <p:par>
-        <p:cTn id="1" dur="indefinite" restart="never" nodeType="tmRoot">
-          <p:childTnLst>
-            <p:seq concurrent="1" nextAc="seek">
-              <p:cTn id="2" dur="indefinite" nodeType="mainSeq">
-                <p:childTnLst>
-                  <p:par>
-                    <p:cTn id="3" fill="hold">
-                      <p:stCondLst>
-                        <p:cond delay="indefinite"/>
-                      </p:stCondLst>
-                      <p:childTnLst>
-                        <p:par>
-                          <p:cTn id="4" fill="hold">
-                            <p:stCondLst>
-                              <p:cond delay="0"/>
-                            </p:stCondLst>
-                            <p:childTnLst>
-                              <p:par>
-                                <p:cTn id="5" presetID="1" presetClass="entr" presetSubtype="0" fill="hold" grpId="0" nodeType="clickEffect">
-                                  <p:stCondLst>
-                                    <p:cond delay="0"/>
-                                  </p:stCondLst>
-                                  <p:childTnLst>
-                                    <p:set>
-                                      <p:cBhvr>
-                                        <p:cTn id="6" dur="1" fill="hold">
-                                          <p:stCondLst>
-                                            <p:cond delay="0"/>
-                                          </p:stCondLst>
-                                        </p:cTn>
-                                        <p:tgtEl>
-                                          <p:spTgt spid="4">
-                                            <p:txEl>
-                                              <p:pRg st="0" end="0"/>
-                                            </p:txEl>
-                                          </p:spTgt>
-                                        </p:tgtEl>
-                                        <p:attrNameLst>
-                                          <p:attrName>style.visibility</p:attrName>
-                                        </p:attrNameLst>
-                                      </p:cBhvr>
-                                      <p:to>
-                                        <p:strVal val="visible"/>
-                                      </p:to>
-                                    </p:set>
-                                  </p:childTnLst>
-                                </p:cTn>
-                              </p:par>
-                            </p:childTnLst>
-                          </p:cTn>
-                        </p:par>
-                      </p:childTnLst>
-                    </p:cTn>
-                  </p:par>
-                </p:childTnLst>
-              </p:cTn>
-              <p:prevCondLst>
-                <p:cond evt="onPrev" delay="0">
-                  <p:tgtEl>
-                    <p:sldTgt/>
-                  </p:tgtEl>
-                </p:cond>
-              </p:prevCondLst>
-              <p:nextCondLst>
-                <p:cond evt="onNext" delay="0">
-                  <p:tgtEl>
-                    <p:sldTgt/>
-                  </p:tgtEl>
-                </p:cond>
-              </p:nextCondLst>
-            </p:seq>
-          </p:childTnLst>
-        </p:cTn>
-      </p:par>
-    </p:tnLst>
-    <p:bldLst>
-      <p:bldP spid="4" grpId="0" uiExpand="1" build="p"/>
-    </p:bldLst>
-  </p:timing>
-</p:sld>
-</file>
-
-<file path=ppt/slides/slide11.xml><?xml version="1.0" encoding="utf-8"?>
-<p:sld xmlns:a="http://schemas.openxmlformats.org/drawingml/2006/main" xmlns:r="http://schemas.openxmlformats.org/officeDocument/2006/relationships" xmlns:p="http://schemas.openxmlformats.org/presentationml/2006/main">
-  <p:cSld>
-    <p:spTree>
-      <p:nvGrpSpPr>
-        <p:cNvPr id="1" name=""/>
-        <p:cNvGrpSpPr/>
-        <p:nvPr/>
-      </p:nvGrpSpPr>
-      <p:grpSpPr>
-        <a:xfrm>
-          <a:off x="0" y="0"/>
-          <a:ext cx="0" cy="0"/>
-          <a:chOff x="0" y="0"/>
-          <a:chExt cx="0" cy="0"/>
-        </a:xfrm>
-      </p:grpSpPr>
-      <p:sp>
-        <p:nvSpPr>
-          <p:cNvPr id="2" name="Title 1"/>
-          <p:cNvSpPr>
-            <a:spLocks noGrp="1"/>
-          </p:cNvSpPr>
-          <p:nvPr>
-            <p:ph type="title"/>
-          </p:nvPr>
-        </p:nvSpPr>
-        <p:spPr/>
-        <p:txBody>
-          <a:bodyPr/>
-          <a:lstStyle/>
-          <a:p>
-            <a:pPr lvl="0" indent="0" marL="0">
-              <a:buNone/>
-            </a:pPr>
-            <a:r>
-              <a:rPr/>
-              <a:t>Questions from the previous submodule?</a:t>
+              <a:t>What do we see in the results?</a:t>
             </a:r>
           </a:p>
         </p:txBody>
@@ -8792,1192 +8515,7 @@
 </p:sld>
 </file>
 
-<file path=ppt/slides/slide12.xml><?xml version="1.0" encoding="utf-8"?>
-<p:sld xmlns:a="http://schemas.openxmlformats.org/drawingml/2006/main" xmlns:r="http://schemas.openxmlformats.org/officeDocument/2006/relationships" xmlns:p="http://schemas.openxmlformats.org/presentationml/2006/main">
-  <p:cSld>
-    <p:spTree>
-      <p:nvGrpSpPr>
-        <p:cNvPr id="1" name=""/>
-        <p:cNvGrpSpPr/>
-        <p:nvPr/>
-      </p:nvGrpSpPr>
-      <p:grpSpPr>
-        <a:xfrm>
-          <a:off x="0" y="0"/>
-          <a:ext cx="0" cy="0"/>
-          <a:chOff x="0" y="0"/>
-          <a:chExt cx="0" cy="0"/>
-        </a:xfrm>
-      </p:grpSpPr>
-      <p:sp>
-        <p:nvSpPr>
-          <p:cNvPr id="2" name="Title 1"/>
-          <p:cNvSpPr>
-            <a:spLocks noGrp="1"/>
-          </p:cNvSpPr>
-          <p:nvPr>
-            <p:ph type="title"/>
-          </p:nvPr>
-        </p:nvSpPr>
-        <p:spPr/>
-        <p:txBody>
-          <a:bodyPr/>
-          <a:lstStyle/>
-          <a:p>
-            <a:pPr lvl="0" indent="0" marL="0">
-              <a:buNone/>
-            </a:pPr>
-            <a:r>
-              <a:rPr/>
-              <a:t>Before we start: Survey time!</a:t>
-            </a:r>
-          </a:p>
-        </p:txBody>
-      </p:sp>
-      <p:sp>
-        <p:nvSpPr>
-          <p:cNvPr id="7" name="Date Placeholder 6">
-            <a:extLst>
-              <a:ext uri="{FF2B5EF4-FFF2-40B4-BE49-F238E27FC236}">
-                <a16:creationId xmlns:a16="http://schemas.microsoft.com/office/drawing/2014/main" id="{E2ED1F55-3CE9-F618-3510-EE96FDC54304}"/>
-              </a:ext>
-            </a:extLst>
-          </p:cNvPr>
-          <p:cNvSpPr>
-            <a:spLocks noGrp="1"/>
-          </p:cNvSpPr>
-          <p:nvPr>
-            <p:ph idx="10" sz="half" type="dt"/>
-          </p:nvPr>
-        </p:nvSpPr>
-        <p:spPr/>
-        <p:txBody>
-          <a:bodyPr/>
-          <a:lstStyle/>
-          <a:p>
-            <a:pPr algn="ctr"/>
-            <a:r>
-              <a:rPr lang="en-US"/>
-              <a:t>September 30, 2020</a:t>
-            </a:r>
-            <a:endParaRPr dirty="0" lang="en-US"/>
-          </a:p>
-        </p:txBody>
-      </p:sp>
-      <p:sp>
-        <p:nvSpPr>
-          <p:cNvPr id="8" name="Footer Placeholder 7">
-            <a:extLst>
-              <a:ext uri="{FF2B5EF4-FFF2-40B4-BE49-F238E27FC236}">
-                <a16:creationId xmlns:a16="http://schemas.microsoft.com/office/drawing/2014/main" id="{0616AEA6-DD6E-40D4-2DDA-E355C068ABA2}"/>
-              </a:ext>
-            </a:extLst>
-          </p:cNvPr>
-          <p:cNvSpPr>
-            <a:spLocks noGrp="1"/>
-          </p:cNvSpPr>
-          <p:nvPr>
-            <p:ph idx="11" sz="quarter" type="ftr"/>
-          </p:nvPr>
-        </p:nvSpPr>
-        <p:spPr/>
-        <p:txBody>
-          <a:bodyPr/>
-          <a:lstStyle/>
-          <a:p>
-            <a:r>
-              <a:rPr lang="en-US"/>
-              <a:t>© LMU Open Science Center</a:t>
-            </a:r>
-            <a:endParaRPr dirty="0" lang="en-US"/>
-          </a:p>
-        </p:txBody>
-      </p:sp>
-      <p:sp>
-        <p:nvSpPr>
-          <p:cNvPr id="9" name="Slide Number Placeholder 8">
-            <a:extLst>
-              <a:ext uri="{FF2B5EF4-FFF2-40B4-BE49-F238E27FC236}">
-                <a16:creationId xmlns:a16="http://schemas.microsoft.com/office/drawing/2014/main" id="{BD632E70-5D06-CAE0-ED30-149A6C1E3F1E}"/>
-              </a:ext>
-            </a:extLst>
-          </p:cNvPr>
-          <p:cNvSpPr>
-            <a:spLocks noGrp="1"/>
-          </p:cNvSpPr>
-          <p:nvPr>
-            <p:ph idx="12" sz="quarter" type="sldNum"/>
-          </p:nvPr>
-        </p:nvSpPr>
-        <p:spPr/>
-        <p:txBody>
-          <a:bodyPr/>
-          <a:lstStyle/>
-          <a:p>
-            <a:pPr algn="ctr"/>
-            <a:r>
-              <a:rPr lang="en-US"/>
-              <a:t>Slide </a:t>
-            </a:r>
-            <a:fld id="{C5EF2332-01BF-834F-8236-50238282D533}" type="slidenum">
-              <a:rPr lang="en-US" smtClean="0"/>
-              <a:pPr algn="ctr"/>
-              <a:t>‹#›</a:t>
-            </a:fld>
-            <a:endParaRPr dirty="0" lang="en-US"/>
-          </a:p>
-        </p:txBody>
-      </p:sp>
-    </p:spTree>
-  </p:cSld>
-</p:sld>
-</file>
-
-<file path=ppt/slides/slide13.xml><?xml version="1.0" encoding="utf-8"?>
-<p:sld xmlns:a="http://schemas.openxmlformats.org/drawingml/2006/main" xmlns:r="http://schemas.openxmlformats.org/officeDocument/2006/relationships" xmlns:p="http://schemas.openxmlformats.org/presentationml/2006/main">
-  <p:cSld>
-    <p:spTree>
-      <p:nvGrpSpPr>
-        <p:cNvPr id="1" name=""/>
-        <p:cNvGrpSpPr/>
-        <p:nvPr/>
-      </p:nvGrpSpPr>
-      <p:grpSpPr>
-        <a:xfrm>
-          <a:off x="0" y="0"/>
-          <a:ext cx="0" cy="0"/>
-          <a:chOff x="0" y="0"/>
-          <a:chExt cx="0" cy="0"/>
-        </a:xfrm>
-      </p:grpSpPr>
-      <p:sp>
-        <p:nvSpPr>
-          <p:cNvPr id="3" name="Content Placeholder 2"/>
-          <p:cNvSpPr>
-            <a:spLocks noGrp="1"/>
-          </p:cNvSpPr>
-          <p:nvPr>
-            <p:ph idx="1"/>
-          </p:nvPr>
-        </p:nvSpPr>
-        <p:spPr/>
-        <p:txBody>
-          <a:bodyPr/>
-          <a:lstStyle/>
-          <a:p>
-            <a:pPr lvl="0" indent="0" marL="0">
-              <a:buNone/>
-            </a:pPr>
-            <a:r>
-              <a:rPr b="1"/>
-              <a:t>What is your level of familiarity with citing and referencing scientific papers?</a:t>
-            </a:r>
-          </a:p>
-          <a:p>
-            <a:pPr lvl="0" indent="-342900" marL="342900">
-              <a:buAutoNum type="alphaLcPeriod"/>
-            </a:pPr>
-            <a:r>
-              <a:rPr/>
-              <a:t>I have never heard of it before.</a:t>
-            </a:r>
-          </a:p>
-          <a:p>
-            <a:pPr lvl="0" indent="-342900" marL="342900">
-              <a:buAutoNum type="alphaLcPeriod"/>
-            </a:pPr>
-            <a:r>
-              <a:rPr/>
-              <a:t>I have heard of it but have never worked with it.</a:t>
-            </a:r>
-          </a:p>
-          <a:p>
-            <a:pPr lvl="0" indent="-342900" marL="342900">
-              <a:buAutoNum type="alphaLcPeriod"/>
-            </a:pPr>
-            <a:r>
-              <a:rPr/>
-              <a:t>I have basic understanding and experience with it.</a:t>
-            </a:r>
-          </a:p>
-          <a:p>
-            <a:pPr lvl="0" indent="-342900" marL="342900">
-              <a:buAutoNum type="alphaLcPeriod"/>
-            </a:pPr>
-            <a:r>
-              <a:rPr/>
-              <a:t>I am very familiar and have worked with it extensively.</a:t>
-            </a:r>
-          </a:p>
-        </p:txBody>
-      </p:sp>
-      <p:sp>
-        <p:nvSpPr>
-          <p:cNvPr id="7" name="Date Placeholder 6">
-            <a:extLst>
-              <a:ext uri="{FF2B5EF4-FFF2-40B4-BE49-F238E27FC236}">
-                <a16:creationId xmlns:a16="http://schemas.microsoft.com/office/drawing/2014/main" id="{E2ED1F55-3CE9-F618-3510-EE96FDC54304}"/>
-              </a:ext>
-            </a:extLst>
-          </p:cNvPr>
-          <p:cNvSpPr>
-            <a:spLocks noGrp="1"/>
-          </p:cNvSpPr>
-          <p:nvPr>
-            <p:ph idx="10" sz="half" type="dt"/>
-          </p:nvPr>
-        </p:nvSpPr>
-        <p:spPr/>
-        <p:txBody>
-          <a:bodyPr/>
-          <a:lstStyle/>
-          <a:p>
-            <a:pPr algn="ctr"/>
-            <a:r>
-              <a:rPr lang="en-US"/>
-              <a:t>September 30, 2020</a:t>
-            </a:r>
-            <a:endParaRPr dirty="0" lang="en-US"/>
-          </a:p>
-        </p:txBody>
-      </p:sp>
-      <p:sp>
-        <p:nvSpPr>
-          <p:cNvPr id="8" name="Footer Placeholder 7">
-            <a:extLst>
-              <a:ext uri="{FF2B5EF4-FFF2-40B4-BE49-F238E27FC236}">
-                <a16:creationId xmlns:a16="http://schemas.microsoft.com/office/drawing/2014/main" id="{0616AEA6-DD6E-40D4-2DDA-E355C068ABA2}"/>
-              </a:ext>
-            </a:extLst>
-          </p:cNvPr>
-          <p:cNvSpPr>
-            <a:spLocks noGrp="1"/>
-          </p:cNvSpPr>
-          <p:nvPr>
-            <p:ph idx="11" sz="quarter" type="ftr"/>
-          </p:nvPr>
-        </p:nvSpPr>
-        <p:spPr/>
-        <p:txBody>
-          <a:bodyPr/>
-          <a:lstStyle/>
-          <a:p>
-            <a:r>
-              <a:rPr lang="en-US"/>
-              <a:t>© LMU Open Science Center</a:t>
-            </a:r>
-            <a:endParaRPr dirty="0" lang="en-US"/>
-          </a:p>
-        </p:txBody>
-      </p:sp>
-      <p:sp>
-        <p:nvSpPr>
-          <p:cNvPr id="9" name="Slide Number Placeholder 8">
-            <a:extLst>
-              <a:ext uri="{FF2B5EF4-FFF2-40B4-BE49-F238E27FC236}">
-                <a16:creationId xmlns:a16="http://schemas.microsoft.com/office/drawing/2014/main" id="{BD632E70-5D06-CAE0-ED30-149A6C1E3F1E}"/>
-              </a:ext>
-            </a:extLst>
-          </p:cNvPr>
-          <p:cNvSpPr>
-            <a:spLocks noGrp="1"/>
-          </p:cNvSpPr>
-          <p:nvPr>
-            <p:ph idx="12" sz="quarter" type="sldNum"/>
-          </p:nvPr>
-        </p:nvSpPr>
-        <p:spPr/>
-        <p:txBody>
-          <a:bodyPr/>
-          <a:lstStyle/>
-          <a:p>
-            <a:pPr algn="ctr"/>
-            <a:r>
-              <a:rPr lang="en-US"/>
-              <a:t>Slide </a:t>
-            </a:r>
-            <a:fld id="{C5EF2332-01BF-834F-8236-50238282D533}" type="slidenum">
-              <a:rPr lang="en-US" smtClean="0"/>
-              <a:pPr algn="ctr"/>
-              <a:t>‹#›</a:t>
-            </a:fld>
-            <a:endParaRPr dirty="0" lang="en-US"/>
-          </a:p>
-        </p:txBody>
-      </p:sp>
-    </p:spTree>
-  </p:cSld>
-  <p:timing>
-    <p:tnLst>
-      <p:par>
-        <p:cTn id="1" dur="indefinite" restart="never" nodeType="tmRoot">
-          <p:childTnLst>
-            <p:seq concurrent="1" nextAc="seek">
-              <p:cTn id="2" dur="indefinite" nodeType="mainSeq">
-                <p:childTnLst>
-                  <p:par>
-                    <p:cTn id="3" fill="hold">
-                      <p:stCondLst>
-                        <p:cond delay="indefinite"/>
-                      </p:stCondLst>
-                      <p:childTnLst>
-                        <p:par>
-                          <p:cTn id="4" fill="hold">
-                            <p:stCondLst>
-                              <p:cond delay="0"/>
-                            </p:stCondLst>
-                            <p:childTnLst>
-                              <p:par>
-                                <p:cTn id="5" presetID="1" presetClass="entr" presetSubtype="0" fill="hold" grpId="0" nodeType="clickEffect">
-                                  <p:stCondLst>
-                                    <p:cond delay="0"/>
-                                  </p:stCondLst>
-                                  <p:childTnLst>
-                                    <p:set>
-                                      <p:cBhvr>
-                                        <p:cTn id="6" dur="1" fill="hold">
-                                          <p:stCondLst>
-                                            <p:cond delay="0"/>
-                                          </p:stCondLst>
-                                        </p:cTn>
-                                        <p:tgtEl>
-                                          <p:spTgt spid="3">
-                                            <p:txEl>
-                                              <p:pRg st="1" end="1"/>
-                                            </p:txEl>
-                                          </p:spTgt>
-                                        </p:tgtEl>
-                                        <p:attrNameLst>
-                                          <p:attrName>style.visibility</p:attrName>
-                                        </p:attrNameLst>
-                                      </p:cBhvr>
-                                      <p:to>
-                                        <p:strVal val="visible"/>
-                                      </p:to>
-                                    </p:set>
-                                  </p:childTnLst>
-                                </p:cTn>
-                              </p:par>
-                            </p:childTnLst>
-                          </p:cTn>
-                        </p:par>
-                      </p:childTnLst>
-                    </p:cTn>
-                  </p:par>
-                  <p:par>
-                    <p:cTn id="7" fill="hold">
-                      <p:stCondLst>
-                        <p:cond delay="indefinite"/>
-                      </p:stCondLst>
-                      <p:childTnLst>
-                        <p:par>
-                          <p:cTn id="8" fill="hold">
-                            <p:stCondLst>
-                              <p:cond delay="0"/>
-                            </p:stCondLst>
-                            <p:childTnLst>
-                              <p:par>
-                                <p:cTn id="9" presetID="1" presetClass="entr" presetSubtype="0" fill="hold" grpId="0" nodeType="clickEffect">
-                                  <p:stCondLst>
-                                    <p:cond delay="0"/>
-                                  </p:stCondLst>
-                                  <p:childTnLst>
-                                    <p:set>
-                                      <p:cBhvr>
-                                        <p:cTn id="10" dur="1" fill="hold">
-                                          <p:stCondLst>
-                                            <p:cond delay="0"/>
-                                          </p:stCondLst>
-                                        </p:cTn>
-                                        <p:tgtEl>
-                                          <p:spTgt spid="3">
-                                            <p:txEl>
-                                              <p:pRg st="2" end="2"/>
-                                            </p:txEl>
-                                          </p:spTgt>
-                                        </p:tgtEl>
-                                        <p:attrNameLst>
-                                          <p:attrName>style.visibility</p:attrName>
-                                        </p:attrNameLst>
-                                      </p:cBhvr>
-                                      <p:to>
-                                        <p:strVal val="visible"/>
-                                      </p:to>
-                                    </p:set>
-                                  </p:childTnLst>
-                                </p:cTn>
-                              </p:par>
-                            </p:childTnLst>
-                          </p:cTn>
-                        </p:par>
-                      </p:childTnLst>
-                    </p:cTn>
-                  </p:par>
-                  <p:par>
-                    <p:cTn id="11" fill="hold">
-                      <p:stCondLst>
-                        <p:cond delay="indefinite"/>
-                      </p:stCondLst>
-                      <p:childTnLst>
-                        <p:par>
-                          <p:cTn id="12" fill="hold">
-                            <p:stCondLst>
-                              <p:cond delay="0"/>
-                            </p:stCondLst>
-                            <p:childTnLst>
-                              <p:par>
-                                <p:cTn id="13" presetID="1" presetClass="entr" presetSubtype="0" fill="hold" grpId="0" nodeType="clickEffect">
-                                  <p:stCondLst>
-                                    <p:cond delay="0"/>
-                                  </p:stCondLst>
-                                  <p:childTnLst>
-                                    <p:set>
-                                      <p:cBhvr>
-                                        <p:cTn id="14" dur="1" fill="hold">
-                                          <p:stCondLst>
-                                            <p:cond delay="0"/>
-                                          </p:stCondLst>
-                                        </p:cTn>
-                                        <p:tgtEl>
-                                          <p:spTgt spid="3">
-                                            <p:txEl>
-                                              <p:pRg st="3" end="3"/>
-                                            </p:txEl>
-                                          </p:spTgt>
-                                        </p:tgtEl>
-                                        <p:attrNameLst>
-                                          <p:attrName>style.visibility</p:attrName>
-                                        </p:attrNameLst>
-                                      </p:cBhvr>
-                                      <p:to>
-                                        <p:strVal val="visible"/>
-                                      </p:to>
-                                    </p:set>
-                                  </p:childTnLst>
-                                </p:cTn>
-                              </p:par>
-                            </p:childTnLst>
-                          </p:cTn>
-                        </p:par>
-                      </p:childTnLst>
-                    </p:cTn>
-                  </p:par>
-                  <p:par>
-                    <p:cTn id="15" fill="hold">
-                      <p:stCondLst>
-                        <p:cond delay="indefinite"/>
-                      </p:stCondLst>
-                      <p:childTnLst>
-                        <p:par>
-                          <p:cTn id="16" fill="hold">
-                            <p:stCondLst>
-                              <p:cond delay="0"/>
-                            </p:stCondLst>
-                            <p:childTnLst>
-                              <p:par>
-                                <p:cTn id="17" presetID="1" presetClass="entr" presetSubtype="0" fill="hold" grpId="0" nodeType="clickEffect">
-                                  <p:stCondLst>
-                                    <p:cond delay="0"/>
-                                  </p:stCondLst>
-                                  <p:childTnLst>
-                                    <p:set>
-                                      <p:cBhvr>
-                                        <p:cTn id="18" dur="1" fill="hold">
-                                          <p:stCondLst>
-                                            <p:cond delay="0"/>
-                                          </p:stCondLst>
-                                        </p:cTn>
-                                        <p:tgtEl>
-                                          <p:spTgt spid="3">
-                                            <p:txEl>
-                                              <p:pRg st="4" end="4"/>
-                                            </p:txEl>
-                                          </p:spTgt>
-                                        </p:tgtEl>
-                                        <p:attrNameLst>
-                                          <p:attrName>style.visibility</p:attrName>
-                                        </p:attrNameLst>
-                                      </p:cBhvr>
-                                      <p:to>
-                                        <p:strVal val="visible"/>
-                                      </p:to>
-                                    </p:set>
-                                  </p:childTnLst>
-                                </p:cTn>
-                              </p:par>
-                            </p:childTnLst>
-                          </p:cTn>
-                        </p:par>
-                      </p:childTnLst>
-                    </p:cTn>
-                  </p:par>
-                </p:childTnLst>
-              </p:cTn>
-              <p:prevCondLst>
-                <p:cond evt="onPrev" delay="0">
-                  <p:tgtEl>
-                    <p:sldTgt/>
-                  </p:tgtEl>
-                </p:cond>
-              </p:prevCondLst>
-              <p:nextCondLst>
-                <p:cond evt="onNext" delay="0">
-                  <p:tgtEl>
-                    <p:sldTgt/>
-                  </p:tgtEl>
-                </p:cond>
-              </p:nextCondLst>
-            </p:seq>
-          </p:childTnLst>
-        </p:cTn>
-      </p:par>
-    </p:tnLst>
-    <p:bldLst>
-      <p:bldP spid="3" grpId="0" uiExpand="1" build="p"/>
-    </p:bldLst>
-  </p:timing>
-</p:sld>
-</file>
-
-<file path=ppt/slides/slide14.xml><?xml version="1.0" encoding="utf-8"?>
-<p:sld xmlns:a="http://schemas.openxmlformats.org/drawingml/2006/main" xmlns:r="http://schemas.openxmlformats.org/officeDocument/2006/relationships" xmlns:p="http://schemas.openxmlformats.org/presentationml/2006/main">
-  <p:cSld>
-    <p:spTree>
-      <p:nvGrpSpPr>
-        <p:cNvPr id="1" name=""/>
-        <p:cNvGrpSpPr/>
-        <p:nvPr/>
-      </p:nvGrpSpPr>
-      <p:grpSpPr>
-        <a:xfrm>
-          <a:off x="0" y="0"/>
-          <a:ext cx="0" cy="0"/>
-          <a:chOff x="0" y="0"/>
-          <a:chExt cx="0" cy="0"/>
-        </a:xfrm>
-      </p:grpSpPr>
-      <p:sp>
-        <p:nvSpPr>
-          <p:cNvPr id="3" name="Content Placeholder 2"/>
-          <p:cNvSpPr>
-            <a:spLocks noGrp="1"/>
-          </p:cNvSpPr>
-          <p:nvPr>
-            <p:ph idx="1"/>
-          </p:nvPr>
-        </p:nvSpPr>
-        <p:spPr/>
-        <p:txBody>
-          <a:bodyPr/>
-          <a:lstStyle/>
-          <a:p>
-            <a:pPr lvl="0" indent="0" marL="0">
-              <a:buNone/>
-            </a:pPr>
-            <a:r>
-              <a:rPr b="1"/>
-              <a:t>How confident do you feel with the Zotero workflow of collection, organisation, and citing?</a:t>
-            </a:r>
-            <a:r>
-              <a:rPr/>
-              <a:t> </a:t>
-            </a:r>
-            <a:r>
-              <a:rPr i="1"/>
-              <a:t>(1 = Not confident at all, 5 = Very confident)</a:t>
-            </a:r>
-          </a:p>
-          <a:p>
-            <a:pPr lvl="0" indent="-342900" marL="342900">
-              <a:buAutoNum type="alphaLcPeriod"/>
-            </a:pPr>
-            <a:r>
-              <a:rPr/>
-              <a:t>1</a:t>
-            </a:r>
-          </a:p>
-          <a:p>
-            <a:pPr lvl="0" indent="-342900" marL="342900">
-              <a:buAutoNum type="alphaLcPeriod"/>
-            </a:pPr>
-            <a:r>
-              <a:rPr/>
-              <a:t>2</a:t>
-            </a:r>
-          </a:p>
-          <a:p>
-            <a:pPr lvl="0" indent="-342900" marL="342900">
-              <a:buAutoNum type="alphaLcPeriod"/>
-            </a:pPr>
-            <a:r>
-              <a:rPr/>
-              <a:t>3</a:t>
-            </a:r>
-          </a:p>
-          <a:p>
-            <a:pPr lvl="0" indent="-342900" marL="342900">
-              <a:buAutoNum type="alphaLcPeriod"/>
-            </a:pPr>
-            <a:r>
-              <a:rPr/>
-              <a:t>4</a:t>
-            </a:r>
-          </a:p>
-          <a:p>
-            <a:pPr lvl="0" indent="-342900" marL="342900">
-              <a:buAutoNum type="alphaLcPeriod"/>
-            </a:pPr>
-            <a:r>
-              <a:rPr/>
-              <a:t>5</a:t>
-            </a:r>
-          </a:p>
-        </p:txBody>
-      </p:sp>
-      <p:sp>
-        <p:nvSpPr>
-          <p:cNvPr id="7" name="Date Placeholder 6">
-            <a:extLst>
-              <a:ext uri="{FF2B5EF4-FFF2-40B4-BE49-F238E27FC236}">
-                <a16:creationId xmlns:a16="http://schemas.microsoft.com/office/drawing/2014/main" id="{E2ED1F55-3CE9-F618-3510-EE96FDC54304}"/>
-              </a:ext>
-            </a:extLst>
-          </p:cNvPr>
-          <p:cNvSpPr>
-            <a:spLocks noGrp="1"/>
-          </p:cNvSpPr>
-          <p:nvPr>
-            <p:ph idx="10" sz="half" type="dt"/>
-          </p:nvPr>
-        </p:nvSpPr>
-        <p:spPr/>
-        <p:txBody>
-          <a:bodyPr/>
-          <a:lstStyle/>
-          <a:p>
-            <a:pPr algn="ctr"/>
-            <a:r>
-              <a:rPr lang="en-US"/>
-              <a:t>September 30, 2020</a:t>
-            </a:r>
-            <a:endParaRPr dirty="0" lang="en-US"/>
-          </a:p>
-        </p:txBody>
-      </p:sp>
-      <p:sp>
-        <p:nvSpPr>
-          <p:cNvPr id="8" name="Footer Placeholder 7">
-            <a:extLst>
-              <a:ext uri="{FF2B5EF4-FFF2-40B4-BE49-F238E27FC236}">
-                <a16:creationId xmlns:a16="http://schemas.microsoft.com/office/drawing/2014/main" id="{0616AEA6-DD6E-40D4-2DDA-E355C068ABA2}"/>
-              </a:ext>
-            </a:extLst>
-          </p:cNvPr>
-          <p:cNvSpPr>
-            <a:spLocks noGrp="1"/>
-          </p:cNvSpPr>
-          <p:nvPr>
-            <p:ph idx="11" sz="quarter" type="ftr"/>
-          </p:nvPr>
-        </p:nvSpPr>
-        <p:spPr/>
-        <p:txBody>
-          <a:bodyPr/>
-          <a:lstStyle/>
-          <a:p>
-            <a:r>
-              <a:rPr lang="en-US"/>
-              <a:t>© LMU Open Science Center</a:t>
-            </a:r>
-            <a:endParaRPr dirty="0" lang="en-US"/>
-          </a:p>
-        </p:txBody>
-      </p:sp>
-      <p:sp>
-        <p:nvSpPr>
-          <p:cNvPr id="9" name="Slide Number Placeholder 8">
-            <a:extLst>
-              <a:ext uri="{FF2B5EF4-FFF2-40B4-BE49-F238E27FC236}">
-                <a16:creationId xmlns:a16="http://schemas.microsoft.com/office/drawing/2014/main" id="{BD632E70-5D06-CAE0-ED30-149A6C1E3F1E}"/>
-              </a:ext>
-            </a:extLst>
-          </p:cNvPr>
-          <p:cNvSpPr>
-            <a:spLocks noGrp="1"/>
-          </p:cNvSpPr>
-          <p:nvPr>
-            <p:ph idx="12" sz="quarter" type="sldNum"/>
-          </p:nvPr>
-        </p:nvSpPr>
-        <p:spPr/>
-        <p:txBody>
-          <a:bodyPr/>
-          <a:lstStyle/>
-          <a:p>
-            <a:pPr algn="ctr"/>
-            <a:r>
-              <a:rPr lang="en-US"/>
-              <a:t>Slide </a:t>
-            </a:r>
-            <a:fld id="{C5EF2332-01BF-834F-8236-50238282D533}" type="slidenum">
-              <a:rPr lang="en-US" smtClean="0"/>
-              <a:pPr algn="ctr"/>
-              <a:t>‹#›</a:t>
-            </a:fld>
-            <a:endParaRPr dirty="0" lang="en-US"/>
-          </a:p>
-        </p:txBody>
-      </p:sp>
-    </p:spTree>
-  </p:cSld>
-  <p:timing>
-    <p:tnLst>
-      <p:par>
-        <p:cTn id="1" dur="indefinite" restart="never" nodeType="tmRoot">
-          <p:childTnLst>
-            <p:seq concurrent="1" nextAc="seek">
-              <p:cTn id="2" dur="indefinite" nodeType="mainSeq">
-                <p:childTnLst>
-                  <p:par>
-                    <p:cTn id="3" fill="hold">
-                      <p:stCondLst>
-                        <p:cond delay="indefinite"/>
-                      </p:stCondLst>
-                      <p:childTnLst>
-                        <p:par>
-                          <p:cTn id="4" fill="hold">
-                            <p:stCondLst>
-                              <p:cond delay="0"/>
-                            </p:stCondLst>
-                            <p:childTnLst>
-                              <p:par>
-                                <p:cTn id="5" presetID="1" presetClass="entr" presetSubtype="0" fill="hold" grpId="0" nodeType="clickEffect">
-                                  <p:stCondLst>
-                                    <p:cond delay="0"/>
-                                  </p:stCondLst>
-                                  <p:childTnLst>
-                                    <p:set>
-                                      <p:cBhvr>
-                                        <p:cTn id="6" dur="1" fill="hold">
-                                          <p:stCondLst>
-                                            <p:cond delay="0"/>
-                                          </p:stCondLst>
-                                        </p:cTn>
-                                        <p:tgtEl>
-                                          <p:spTgt spid="3">
-                                            <p:txEl>
-                                              <p:pRg st="1" end="1"/>
-                                            </p:txEl>
-                                          </p:spTgt>
-                                        </p:tgtEl>
-                                        <p:attrNameLst>
-                                          <p:attrName>style.visibility</p:attrName>
-                                        </p:attrNameLst>
-                                      </p:cBhvr>
-                                      <p:to>
-                                        <p:strVal val="visible"/>
-                                      </p:to>
-                                    </p:set>
-                                  </p:childTnLst>
-                                </p:cTn>
-                              </p:par>
-                            </p:childTnLst>
-                          </p:cTn>
-                        </p:par>
-                      </p:childTnLst>
-                    </p:cTn>
-                  </p:par>
-                  <p:par>
-                    <p:cTn id="7" fill="hold">
-                      <p:stCondLst>
-                        <p:cond delay="indefinite"/>
-                      </p:stCondLst>
-                      <p:childTnLst>
-                        <p:par>
-                          <p:cTn id="8" fill="hold">
-                            <p:stCondLst>
-                              <p:cond delay="0"/>
-                            </p:stCondLst>
-                            <p:childTnLst>
-                              <p:par>
-                                <p:cTn id="9" presetID="1" presetClass="entr" presetSubtype="0" fill="hold" grpId="0" nodeType="clickEffect">
-                                  <p:stCondLst>
-                                    <p:cond delay="0"/>
-                                  </p:stCondLst>
-                                  <p:childTnLst>
-                                    <p:set>
-                                      <p:cBhvr>
-                                        <p:cTn id="10" dur="1" fill="hold">
-                                          <p:stCondLst>
-                                            <p:cond delay="0"/>
-                                          </p:stCondLst>
-                                        </p:cTn>
-                                        <p:tgtEl>
-                                          <p:spTgt spid="3">
-                                            <p:txEl>
-                                              <p:pRg st="2" end="2"/>
-                                            </p:txEl>
-                                          </p:spTgt>
-                                        </p:tgtEl>
-                                        <p:attrNameLst>
-                                          <p:attrName>style.visibility</p:attrName>
-                                        </p:attrNameLst>
-                                      </p:cBhvr>
-                                      <p:to>
-                                        <p:strVal val="visible"/>
-                                      </p:to>
-                                    </p:set>
-                                  </p:childTnLst>
-                                </p:cTn>
-                              </p:par>
-                            </p:childTnLst>
-                          </p:cTn>
-                        </p:par>
-                      </p:childTnLst>
-                    </p:cTn>
-                  </p:par>
-                  <p:par>
-                    <p:cTn id="11" fill="hold">
-                      <p:stCondLst>
-                        <p:cond delay="indefinite"/>
-                      </p:stCondLst>
-                      <p:childTnLst>
-                        <p:par>
-                          <p:cTn id="12" fill="hold">
-                            <p:stCondLst>
-                              <p:cond delay="0"/>
-                            </p:stCondLst>
-                            <p:childTnLst>
-                              <p:par>
-                                <p:cTn id="13" presetID="1" presetClass="entr" presetSubtype="0" fill="hold" grpId="0" nodeType="clickEffect">
-                                  <p:stCondLst>
-                                    <p:cond delay="0"/>
-                                  </p:stCondLst>
-                                  <p:childTnLst>
-                                    <p:set>
-                                      <p:cBhvr>
-                                        <p:cTn id="14" dur="1" fill="hold">
-                                          <p:stCondLst>
-                                            <p:cond delay="0"/>
-                                          </p:stCondLst>
-                                        </p:cTn>
-                                        <p:tgtEl>
-                                          <p:spTgt spid="3">
-                                            <p:txEl>
-                                              <p:pRg st="3" end="3"/>
-                                            </p:txEl>
-                                          </p:spTgt>
-                                        </p:tgtEl>
-                                        <p:attrNameLst>
-                                          <p:attrName>style.visibility</p:attrName>
-                                        </p:attrNameLst>
-                                      </p:cBhvr>
-                                      <p:to>
-                                        <p:strVal val="visible"/>
-                                      </p:to>
-                                    </p:set>
-                                  </p:childTnLst>
-                                </p:cTn>
-                              </p:par>
-                            </p:childTnLst>
-                          </p:cTn>
-                        </p:par>
-                      </p:childTnLst>
-                    </p:cTn>
-                  </p:par>
-                  <p:par>
-                    <p:cTn id="15" fill="hold">
-                      <p:stCondLst>
-                        <p:cond delay="indefinite"/>
-                      </p:stCondLst>
-                      <p:childTnLst>
-                        <p:par>
-                          <p:cTn id="16" fill="hold">
-                            <p:stCondLst>
-                              <p:cond delay="0"/>
-                            </p:stCondLst>
-                            <p:childTnLst>
-                              <p:par>
-                                <p:cTn id="17" presetID="1" presetClass="entr" presetSubtype="0" fill="hold" grpId="0" nodeType="clickEffect">
-                                  <p:stCondLst>
-                                    <p:cond delay="0"/>
-                                  </p:stCondLst>
-                                  <p:childTnLst>
-                                    <p:set>
-                                      <p:cBhvr>
-                                        <p:cTn id="18" dur="1" fill="hold">
-                                          <p:stCondLst>
-                                            <p:cond delay="0"/>
-                                          </p:stCondLst>
-                                        </p:cTn>
-                                        <p:tgtEl>
-                                          <p:spTgt spid="3">
-                                            <p:txEl>
-                                              <p:pRg st="4" end="4"/>
-                                            </p:txEl>
-                                          </p:spTgt>
-                                        </p:tgtEl>
-                                        <p:attrNameLst>
-                                          <p:attrName>style.visibility</p:attrName>
-                                        </p:attrNameLst>
-                                      </p:cBhvr>
-                                      <p:to>
-                                        <p:strVal val="visible"/>
-                                      </p:to>
-                                    </p:set>
-                                  </p:childTnLst>
-                                </p:cTn>
-                              </p:par>
-                            </p:childTnLst>
-                          </p:cTn>
-                        </p:par>
-                      </p:childTnLst>
-                    </p:cTn>
-                  </p:par>
-                  <p:par>
-                    <p:cTn id="19" fill="hold">
-                      <p:stCondLst>
-                        <p:cond delay="indefinite"/>
-                      </p:stCondLst>
-                      <p:childTnLst>
-                        <p:par>
-                          <p:cTn id="20" fill="hold">
-                            <p:stCondLst>
-                              <p:cond delay="0"/>
-                            </p:stCondLst>
-                            <p:childTnLst>
-                              <p:par>
-                                <p:cTn id="21" presetID="1" presetClass="entr" presetSubtype="0" fill="hold" grpId="0" nodeType="clickEffect">
-                                  <p:stCondLst>
-                                    <p:cond delay="0"/>
-                                  </p:stCondLst>
-                                  <p:childTnLst>
-                                    <p:set>
-                                      <p:cBhvr>
-                                        <p:cTn id="22" dur="1" fill="hold">
-                                          <p:stCondLst>
-                                            <p:cond delay="0"/>
-                                          </p:stCondLst>
-                                        </p:cTn>
-                                        <p:tgtEl>
-                                          <p:spTgt spid="3">
-                                            <p:txEl>
-                                              <p:pRg st="5" end="5"/>
-                                            </p:txEl>
-                                          </p:spTgt>
-                                        </p:tgtEl>
-                                        <p:attrNameLst>
-                                          <p:attrName>style.visibility</p:attrName>
-                                        </p:attrNameLst>
-                                      </p:cBhvr>
-                                      <p:to>
-                                        <p:strVal val="visible"/>
-                                      </p:to>
-                                    </p:set>
-                                  </p:childTnLst>
-                                </p:cTn>
-                              </p:par>
-                            </p:childTnLst>
-                          </p:cTn>
-                        </p:par>
-                      </p:childTnLst>
-                    </p:cTn>
-                  </p:par>
-                </p:childTnLst>
-              </p:cTn>
-              <p:prevCondLst>
-                <p:cond evt="onPrev" delay="0">
-                  <p:tgtEl>
-                    <p:sldTgt/>
-                  </p:tgtEl>
-                </p:cond>
-              </p:prevCondLst>
-              <p:nextCondLst>
-                <p:cond evt="onNext" delay="0">
-                  <p:tgtEl>
-                    <p:sldTgt/>
-                  </p:tgtEl>
-                </p:cond>
-              </p:nextCondLst>
-            </p:seq>
-          </p:childTnLst>
-        </p:cTn>
-      </p:par>
-    </p:tnLst>
-    <p:bldLst>
-      <p:bldP spid="3" grpId="0" uiExpand="1" build="p"/>
-    </p:bldLst>
-  </p:timing>
-</p:sld>
-</file>
-
-<file path=ppt/slides/slide15.xml><?xml version="1.0" encoding="utf-8"?>
-<p:sld xmlns:a="http://schemas.openxmlformats.org/drawingml/2006/main" xmlns:r="http://schemas.openxmlformats.org/officeDocument/2006/relationships" xmlns:p="http://schemas.openxmlformats.org/presentationml/2006/main">
-  <p:cSld>
-    <p:spTree>
-      <p:nvGrpSpPr>
-        <p:cNvPr id="1" name=""/>
-        <p:cNvGrpSpPr/>
-        <p:nvPr/>
-      </p:nvGrpSpPr>
-      <p:grpSpPr>
-        <a:xfrm>
-          <a:off x="0" y="0"/>
-          <a:ext cx="0" cy="0"/>
-          <a:chOff x="0" y="0"/>
-          <a:chExt cx="0" cy="0"/>
-        </a:xfrm>
-      </p:grpSpPr>
-      <p:sp>
-        <p:nvSpPr>
-          <p:cNvPr id="2" name="Title 1"/>
-          <p:cNvSpPr>
-            <a:spLocks noGrp="1"/>
-          </p:cNvSpPr>
-          <p:nvPr>
-            <p:ph type="title"/>
-          </p:nvPr>
-        </p:nvSpPr>
-        <p:spPr/>
-        <p:txBody>
-          <a:bodyPr/>
-          <a:lstStyle/>
-          <a:p>
-            <a:pPr lvl="0" indent="0" marL="0">
-              <a:buNone/>
-            </a:pPr>
-            <a:r>
-              <a:rPr/>
-              <a:t>Discussion of survey results</a:t>
-            </a:r>
-          </a:p>
-        </p:txBody>
-      </p:sp>
-      <p:sp>
-        <p:nvSpPr>
-          <p:cNvPr id="3" name="Content Placeholder 2"/>
-          <p:cNvSpPr>
-            <a:spLocks noGrp="1"/>
-          </p:cNvSpPr>
-          <p:nvPr>
-            <p:ph idx="1"/>
-          </p:nvPr>
-        </p:nvSpPr>
-        <p:spPr/>
-        <p:txBody>
-          <a:bodyPr/>
-          <a:lstStyle/>
-          <a:p>
-            <a:pPr lvl="0" indent="0" marL="0">
-              <a:buNone/>
-            </a:pPr>
-            <a:r>
-              <a:rPr b="1"/>
-              <a:t>What do we see in the results?</a:t>
-            </a:r>
-          </a:p>
-        </p:txBody>
-      </p:sp>
-      <p:sp>
-        <p:nvSpPr>
-          <p:cNvPr id="7" name="Date Placeholder 6">
-            <a:extLst>
-              <a:ext uri="{FF2B5EF4-FFF2-40B4-BE49-F238E27FC236}">
-                <a16:creationId xmlns:a16="http://schemas.microsoft.com/office/drawing/2014/main" id="{E2ED1F55-3CE9-F618-3510-EE96FDC54304}"/>
-              </a:ext>
-            </a:extLst>
-          </p:cNvPr>
-          <p:cNvSpPr>
-            <a:spLocks noGrp="1"/>
-          </p:cNvSpPr>
-          <p:nvPr>
-            <p:ph idx="10" sz="half" type="dt"/>
-          </p:nvPr>
-        </p:nvSpPr>
-        <p:spPr/>
-        <p:txBody>
-          <a:bodyPr/>
-          <a:lstStyle/>
-          <a:p>
-            <a:pPr algn="ctr"/>
-            <a:r>
-              <a:rPr lang="en-US"/>
-              <a:t>September 30, 2020</a:t>
-            </a:r>
-            <a:endParaRPr dirty="0" lang="en-US"/>
-          </a:p>
-        </p:txBody>
-      </p:sp>
-      <p:sp>
-        <p:nvSpPr>
-          <p:cNvPr id="8" name="Footer Placeholder 7">
-            <a:extLst>
-              <a:ext uri="{FF2B5EF4-FFF2-40B4-BE49-F238E27FC236}">
-                <a16:creationId xmlns:a16="http://schemas.microsoft.com/office/drawing/2014/main" id="{0616AEA6-DD6E-40D4-2DDA-E355C068ABA2}"/>
-              </a:ext>
-            </a:extLst>
-          </p:cNvPr>
-          <p:cNvSpPr>
-            <a:spLocks noGrp="1"/>
-          </p:cNvSpPr>
-          <p:nvPr>
-            <p:ph idx="11" sz="quarter" type="ftr"/>
-          </p:nvPr>
-        </p:nvSpPr>
-        <p:spPr/>
-        <p:txBody>
-          <a:bodyPr/>
-          <a:lstStyle/>
-          <a:p>
-            <a:r>
-              <a:rPr lang="en-US"/>
-              <a:t>© LMU Open Science Center</a:t>
-            </a:r>
-            <a:endParaRPr dirty="0" lang="en-US"/>
-          </a:p>
-        </p:txBody>
-      </p:sp>
-      <p:sp>
-        <p:nvSpPr>
-          <p:cNvPr id="9" name="Slide Number Placeholder 8">
-            <a:extLst>
-              <a:ext uri="{FF2B5EF4-FFF2-40B4-BE49-F238E27FC236}">
-                <a16:creationId xmlns:a16="http://schemas.microsoft.com/office/drawing/2014/main" id="{BD632E70-5D06-CAE0-ED30-149A6C1E3F1E}"/>
-              </a:ext>
-            </a:extLst>
-          </p:cNvPr>
-          <p:cNvSpPr>
-            <a:spLocks noGrp="1"/>
-          </p:cNvSpPr>
-          <p:nvPr>
-            <p:ph idx="12" sz="quarter" type="sldNum"/>
-          </p:nvPr>
-        </p:nvSpPr>
-        <p:spPr/>
-        <p:txBody>
-          <a:bodyPr/>
-          <a:lstStyle/>
-          <a:p>
-            <a:pPr algn="ctr"/>
-            <a:r>
-              <a:rPr lang="en-US"/>
-              <a:t>Slide </a:t>
-            </a:r>
-            <a:fld id="{C5EF2332-01BF-834F-8236-50238282D533}" type="slidenum">
-              <a:rPr lang="en-US" smtClean="0"/>
-              <a:pPr algn="ctr"/>
-              <a:t>‹#›</a:t>
-            </a:fld>
-            <a:endParaRPr dirty="0" lang="en-US"/>
-          </a:p>
-        </p:txBody>
-      </p:sp>
-    </p:spTree>
-  </p:cSld>
-</p:sld>
-</file>
-
-<file path=ppt/slides/slide16.xml><?xml version="1.0" encoding="utf-8"?>
+<file path=ppt/slides/slide11.xml><?xml version="1.0" encoding="utf-8"?>
 <p:sld xmlns:a="http://schemas.openxmlformats.org/drawingml/2006/main" xmlns:r="http://schemas.openxmlformats.org/officeDocument/2006/relationships" xmlns:p="http://schemas.openxmlformats.org/presentationml/2006/main">
   <p:cSld>
     <p:spTree>
@@ -10585,7 +9123,7 @@
 </p:sld>
 </file>
 
-<file path=ppt/slides/slide17.xml><?xml version="1.0" encoding="utf-8"?>
+<file path=ppt/slides/slide12.xml><?xml version="1.0" encoding="utf-8"?>
 <p:sld xmlns:a="http://schemas.openxmlformats.org/drawingml/2006/main" xmlns:r="http://schemas.openxmlformats.org/officeDocument/2006/relationships" xmlns:p="http://schemas.openxmlformats.org/presentationml/2006/main">
   <p:cSld>
     <p:spTree>
@@ -11075,7 +9613,7 @@
 </p:sld>
 </file>
 
-<file path=ppt/slides/slide18.xml><?xml version="1.0" encoding="utf-8"?>
+<file path=ppt/slides/slide13.xml><?xml version="1.0" encoding="utf-8"?>
 <p:sld xmlns:a="http://schemas.openxmlformats.org/drawingml/2006/main" xmlns:r="http://schemas.openxmlformats.org/officeDocument/2006/relationships" xmlns:p="http://schemas.openxmlformats.org/presentationml/2006/main">
   <p:cSld>
     <p:spTree>
@@ -11104,8 +9642,8 @@
         </p:nvSpPr>
         <p:spPr>
           <a:xfrm>
-            <a:off x="457201" y="204787"/>
-            <a:ext cx="3008313" cy="871538"/>
+            <a:off x="609602" y="273049"/>
+            <a:ext cx="4011084" cy="1162051"/>
           </a:xfrm>
         </p:spPr>
         <p:txBody>
@@ -11184,8 +9722,8 @@
         </p:blipFill>
         <p:spPr bwMode="auto">
           <a:xfrm>
-            <a:off x="3568700" y="1244600"/>
-            <a:ext cx="5105400" cy="1790700"/>
+            <a:off x="4762500" y="1739900"/>
+            <a:ext cx="6807200" cy="2387600"/>
           </a:xfrm>
           <a:prstGeom prst="rect">
             <a:avLst/>
@@ -11208,8 +9746,8 @@
         </p:nvSpPr>
         <p:spPr>
           <a:xfrm>
-            <a:off x="3568700" y="4076700"/>
-            <a:ext cx="5105400" cy="508000"/>
+            <a:off x="4762500" y="5600700"/>
+            <a:ext cx="6807200" cy="508000"/>
           </a:xfrm>
           <a:prstGeom prst="rect">
             <a:avLst/>
@@ -11362,7 +9900,7 @@
 </p:sld>
 </file>
 
-<file path=ppt/slides/slide19.xml><?xml version="1.0" encoding="utf-8"?>
+<file path=ppt/slides/slide14.xml><?xml version="1.0" encoding="utf-8"?>
 <p:sld xmlns:a="http://schemas.openxmlformats.org/drawingml/2006/main" xmlns:r="http://schemas.openxmlformats.org/officeDocument/2006/relationships" xmlns:p="http://schemas.openxmlformats.org/presentationml/2006/main">
   <p:cSld>
     <p:spTree>
@@ -11391,8 +9929,8 @@
         </p:nvSpPr>
         <p:spPr>
           <a:xfrm>
-            <a:off x="457201" y="204787"/>
-            <a:ext cx="3008313" cy="871538"/>
+            <a:off x="609602" y="273049"/>
+            <a:ext cx="4011084" cy="1162051"/>
           </a:xfrm>
         </p:spPr>
         <p:txBody>
@@ -11460,8 +9998,8 @@
         </p:blipFill>
         <p:spPr bwMode="auto">
           <a:xfrm>
-            <a:off x="3568700" y="2108200"/>
-            <a:ext cx="5105400" cy="584200"/>
+            <a:off x="4762500" y="2806700"/>
+            <a:ext cx="6807200" cy="774700"/>
           </a:xfrm>
           <a:prstGeom prst="rect">
             <a:avLst/>
@@ -11655,7 +10193,7 @@
 </p:sld>
 </file>
 
-<file path=ppt/slides/slide2.xml><?xml version="1.0" encoding="utf-8"?>
+<file path=ppt/slides/slide15.xml><?xml version="1.0" encoding="utf-8"?>
 <p:sld xmlns:a="http://schemas.openxmlformats.org/drawingml/2006/main" xmlns:r="http://schemas.openxmlformats.org/officeDocument/2006/relationships" xmlns:p="http://schemas.openxmlformats.org/presentationml/2006/main">
   <p:cSld>
     <p:spTree>
@@ -11682,200 +10220,10 @@
             <p:ph type="title"/>
           </p:nvPr>
         </p:nvSpPr>
-        <p:spPr/>
-        <p:txBody>
-          <a:bodyPr/>
-          <a:lstStyle/>
-          <a:p>
-            <a:pPr lvl="0" indent="0" marL="0">
-              <a:buNone/>
-            </a:pPr>
-            <a:r>
-              <a:rPr/>
-              <a:t>Testing Slide</a:t>
-            </a:r>
-          </a:p>
-        </p:txBody>
-      </p:sp>
-      <p:sp>
-        <p:nvSpPr>
-          <p:cNvPr id="3" name="Content Placeholder 2"/>
-          <p:cNvSpPr>
-            <a:spLocks noGrp="1"/>
-          </p:cNvSpPr>
-          <p:nvPr>
-            <p:ph idx="1"/>
-          </p:nvPr>
-        </p:nvSpPr>
-        <p:spPr/>
-        <p:txBody>
-          <a:bodyPr/>
-          <a:lstStyle/>
-          <a:p>
-            <a:pPr lvl="0" indent="0" marL="1270000">
-              <a:buNone/>
-            </a:pPr>
-            <a:r>
-              <a:rPr sz="2000" b="1"/>
-              <a:t>Tip</a:t>
-            </a:r>
-          </a:p>
-          <a:p>
-            <a:pPr lvl="0" indent="0" marL="1270000">
-              <a:buNone/>
-            </a:pPr>
-            <a:r>
-              <a:rPr sz="2000"/>
-              <a:t>This is a callout box test</a:t>
-            </a:r>
-          </a:p>
-          <a:p>
-            <a:pPr lvl="0" indent="0" marL="0">
-              <a:buNone/>
-            </a:pPr>
-            <a:r>
-              <a:rPr/>
-              <a:t>Test citation </a:t>
-            </a:r>
-            <a:r>
-              <a:rPr>
-                <a:hlinkClick r:id="rId2" action="ppaction://hlinksldjump"/>
-              </a:rPr>
-              <a:t>Jackson (1990)</a:t>
-            </a:r>
-          </a:p>
-        </p:txBody>
-      </p:sp>
-      <p:sp>
-        <p:nvSpPr>
-          <p:cNvPr id="7" name="Date Placeholder 6">
-            <a:extLst>
-              <a:ext uri="{FF2B5EF4-FFF2-40B4-BE49-F238E27FC236}">
-                <a16:creationId xmlns:a16="http://schemas.microsoft.com/office/drawing/2014/main" id="{E2ED1F55-3CE9-F618-3510-EE96FDC54304}"/>
-              </a:ext>
-            </a:extLst>
-          </p:cNvPr>
-          <p:cNvSpPr>
-            <a:spLocks noGrp="1"/>
-          </p:cNvSpPr>
-          <p:nvPr>
-            <p:ph idx="10" sz="half" type="dt"/>
-          </p:nvPr>
-        </p:nvSpPr>
-        <p:spPr/>
-        <p:txBody>
-          <a:bodyPr/>
-          <a:lstStyle/>
-          <a:p>
-            <a:pPr algn="ctr"/>
-            <a:r>
-              <a:rPr lang="en-US"/>
-              <a:t>September 30, 2020</a:t>
-            </a:r>
-            <a:endParaRPr dirty="0" lang="en-US"/>
-          </a:p>
-        </p:txBody>
-      </p:sp>
-      <p:sp>
-        <p:nvSpPr>
-          <p:cNvPr id="8" name="Footer Placeholder 7">
-            <a:extLst>
-              <a:ext uri="{FF2B5EF4-FFF2-40B4-BE49-F238E27FC236}">
-                <a16:creationId xmlns:a16="http://schemas.microsoft.com/office/drawing/2014/main" id="{0616AEA6-DD6E-40D4-2DDA-E355C068ABA2}"/>
-              </a:ext>
-            </a:extLst>
-          </p:cNvPr>
-          <p:cNvSpPr>
-            <a:spLocks noGrp="1"/>
-          </p:cNvSpPr>
-          <p:nvPr>
-            <p:ph idx="11" sz="quarter" type="ftr"/>
-          </p:nvPr>
-        </p:nvSpPr>
-        <p:spPr/>
-        <p:txBody>
-          <a:bodyPr/>
-          <a:lstStyle/>
-          <a:p>
-            <a:r>
-              <a:rPr lang="en-US"/>
-              <a:t>© LMU Open Science Center</a:t>
-            </a:r>
-            <a:endParaRPr dirty="0" lang="en-US"/>
-          </a:p>
-        </p:txBody>
-      </p:sp>
-      <p:sp>
-        <p:nvSpPr>
-          <p:cNvPr id="9" name="Slide Number Placeholder 8">
-            <a:extLst>
-              <a:ext uri="{FF2B5EF4-FFF2-40B4-BE49-F238E27FC236}">
-                <a16:creationId xmlns:a16="http://schemas.microsoft.com/office/drawing/2014/main" id="{BD632E70-5D06-CAE0-ED30-149A6C1E3F1E}"/>
-              </a:ext>
-            </a:extLst>
-          </p:cNvPr>
-          <p:cNvSpPr>
-            <a:spLocks noGrp="1"/>
-          </p:cNvSpPr>
-          <p:nvPr>
-            <p:ph idx="12" sz="quarter" type="sldNum"/>
-          </p:nvPr>
-        </p:nvSpPr>
-        <p:spPr/>
-        <p:txBody>
-          <a:bodyPr/>
-          <a:lstStyle/>
-          <a:p>
-            <a:pPr algn="ctr"/>
-            <a:r>
-              <a:rPr lang="en-US"/>
-              <a:t>Slide </a:t>
-            </a:r>
-            <a:fld id="{C5EF2332-01BF-834F-8236-50238282D533}" type="slidenum">
-              <a:rPr lang="en-US" smtClean="0"/>
-              <a:pPr algn="ctr"/>
-              <a:t>‹#›</a:t>
-            </a:fld>
-            <a:endParaRPr dirty="0" lang="en-US"/>
-          </a:p>
-        </p:txBody>
-      </p:sp>
-    </p:spTree>
-  </p:cSld>
-</p:sld>
-</file>
-
-<file path=ppt/slides/slide20.xml><?xml version="1.0" encoding="utf-8"?>
-<p:sld xmlns:a="http://schemas.openxmlformats.org/drawingml/2006/main" xmlns:r="http://schemas.openxmlformats.org/officeDocument/2006/relationships" xmlns:p="http://schemas.openxmlformats.org/presentationml/2006/main">
-  <p:cSld>
-    <p:spTree>
-      <p:nvGrpSpPr>
-        <p:cNvPr id="1" name=""/>
-        <p:cNvGrpSpPr/>
-        <p:nvPr/>
-      </p:nvGrpSpPr>
-      <p:grpSpPr>
-        <a:xfrm>
-          <a:off x="0" y="0"/>
-          <a:ext cx="0" cy="0"/>
-          <a:chOff x="0" y="0"/>
-          <a:chExt cx="0" cy="0"/>
-        </a:xfrm>
-      </p:grpSpPr>
-      <p:sp>
-        <p:nvSpPr>
-          <p:cNvPr id="2" name="Title 1"/>
-          <p:cNvSpPr>
-            <a:spLocks noGrp="1"/>
-          </p:cNvSpPr>
-          <p:nvPr>
-            <p:ph type="title"/>
-          </p:nvPr>
-        </p:nvSpPr>
         <p:spPr>
           <a:xfrm>
-            <a:off x="457201" y="204787"/>
-            <a:ext cx="3008313" cy="871538"/>
+            <a:off x="609602" y="273049"/>
+            <a:ext cx="4011084" cy="1162051"/>
           </a:xfrm>
         </p:spPr>
         <p:txBody>
@@ -11955,8 +10303,8 @@
         </p:blipFill>
         <p:spPr bwMode="auto">
           <a:xfrm>
-            <a:off x="3568700" y="1803400"/>
-            <a:ext cx="5105400" cy="1181100"/>
+            <a:off x="4762500" y="2400300"/>
+            <a:ext cx="6807200" cy="1574800"/>
           </a:xfrm>
           <a:prstGeom prst="rect">
             <a:avLst/>
@@ -12150,7 +10498,7 @@
 </p:sld>
 </file>
 
-<file path=ppt/slides/slide21.xml><?xml version="1.0" encoding="utf-8"?>
+<file path=ppt/slides/slide16.xml><?xml version="1.0" encoding="utf-8"?>
 <p:sld xmlns:a="http://schemas.openxmlformats.org/drawingml/2006/main" xmlns:r="http://schemas.openxmlformats.org/officeDocument/2006/relationships" xmlns:p="http://schemas.openxmlformats.org/presentationml/2006/main">
   <p:cSld>
     <p:spTree>
@@ -12597,7 +10945,7 @@
 </p:sld>
 </file>
 
-<file path=ppt/slides/slide22.xml><?xml version="1.0" encoding="utf-8"?>
+<file path=ppt/slides/slide17.xml><?xml version="1.0" encoding="utf-8"?>
 <p:sld xmlns:a="http://schemas.openxmlformats.org/drawingml/2006/main" xmlns:r="http://schemas.openxmlformats.org/officeDocument/2006/relationships" xmlns:p="http://schemas.openxmlformats.org/presentationml/2006/main">
   <p:cSld>
     <p:spTree>
@@ -12692,7 +11040,7 @@
             </a:r>
           </a:p>
           <a:p>
-            <a:pPr lvl="1" indent="-342900" marL="685800">
+            <a:pPr lvl="1" indent="-457188" marL="914377">
               <a:buAutoNum type="arabicPeriod"/>
             </a:pPr>
             <a:r>
@@ -12701,7 +11049,7 @@
             </a:r>
           </a:p>
           <a:p>
-            <a:pPr lvl="1" indent="-342900" marL="685800">
+            <a:pPr lvl="1" indent="-457188" marL="914377">
               <a:buAutoNum type="arabicPeriod"/>
             </a:pPr>
             <a:r>
@@ -12710,7 +11058,7 @@
             </a:r>
           </a:p>
           <a:p>
-            <a:pPr lvl="1" indent="-342900" marL="685800">
+            <a:pPr lvl="1" indent="-457188" marL="914377">
               <a:buAutoNum type="arabicPeriod"/>
             </a:pPr>
             <a:r>
@@ -12719,7 +11067,7 @@
             </a:r>
           </a:p>
           <a:p>
-            <a:pPr lvl="1" indent="-342900" marL="685800">
+            <a:pPr lvl="1" indent="-457188" marL="914377">
               <a:buAutoNum type="arabicPeriod"/>
             </a:pPr>
             <a:r>
@@ -13167,7 +11515,7 @@
 </p:sld>
 </file>
 
-<file path=ppt/slides/slide23.xml><?xml version="1.0" encoding="utf-8"?>
+<file path=ppt/slides/slide18.xml><?xml version="1.0" encoding="utf-8"?>
 <p:sld xmlns:a="http://schemas.openxmlformats.org/drawingml/2006/main" xmlns:r="http://schemas.openxmlformats.org/officeDocument/2006/relationships" xmlns:p="http://schemas.openxmlformats.org/presentationml/2006/main">
   <p:cSld>
     <p:spTree>
@@ -13262,7 +11610,7 @@
             </a:r>
           </a:p>
           <a:p>
-            <a:pPr lvl="1" indent="-342900" marL="685800">
+            <a:pPr lvl="1" indent="-457188" marL="914377">
               <a:buAutoNum type="arabicPeriod"/>
             </a:pPr>
             <a:r>
@@ -13271,7 +11619,7 @@
             </a:r>
           </a:p>
           <a:p>
-            <a:pPr lvl="1" indent="-342900" marL="685800">
+            <a:pPr lvl="1" indent="-457188" marL="914377">
               <a:buAutoNum type="arabicPeriod"/>
             </a:pPr>
             <a:r>
@@ -13280,7 +11628,7 @@
             </a:r>
           </a:p>
           <a:p>
-            <a:pPr lvl="1" indent="-342900" marL="685800">
+            <a:pPr lvl="1" indent="-457188" marL="914377">
               <a:buAutoNum type="arabicPeriod"/>
             </a:pPr>
             <a:r>
@@ -13289,7 +11637,7 @@
             </a:r>
           </a:p>
           <a:p>
-            <a:pPr lvl="1" indent="-342900" marL="685800">
+            <a:pPr lvl="1" indent="-457188" marL="914377">
               <a:buAutoNum type="arabicPeriod"/>
             </a:pPr>
             <a:r>
@@ -13758,7 +12106,7 @@
 </p:sld>
 </file>
 
-<file path=ppt/slides/slide24.xml><?xml version="1.0" encoding="utf-8"?>
+<file path=ppt/slides/slide19.xml><?xml version="1.0" encoding="utf-8"?>
 <p:sld xmlns:a="http://schemas.openxmlformats.org/drawingml/2006/main" xmlns:r="http://schemas.openxmlformats.org/officeDocument/2006/relationships" xmlns:p="http://schemas.openxmlformats.org/presentationml/2006/main">
   <p:cSld>
     <p:spTree>
@@ -13811,8 +12159,8 @@
           </p:nvPr>
         </p:nvGraphicFramePr>
         <p:xfrm>
-          <a:off x="457200" y="1193800"/>
-          <a:ext cx="8229600" cy="3390900"/>
+          <a:off x="609600" y="1600200"/>
+          <a:ext cx="10972800" cy="4521200"/>
         </p:xfrm>
         <a:graphic>
           <a:graphicData uri="http://schemas.openxmlformats.org/drawingml/2006/table">
@@ -13821,10 +12169,10 @@
                 <a:tableStyleId>{5C22544A-7EE6-4342-B048-85BDC9FD1C3A}</a:tableStyleId>
               </a:tblPr>
               <a:tblGrid>
-                <a:gridCol w="876300"/>
-                <a:gridCol w="1600200"/>
-                <a:gridCol w="1003300"/>
-                <a:gridCol w="4749800"/>
+                <a:gridCol w="1168400"/>
+                <a:gridCol w="2133600"/>
+                <a:gridCol w="1333500"/>
+                <a:gridCol w="6337300"/>
               </a:tblGrid>
               <a:tr h="0">
                 <a:tc>
@@ -14199,7 +12547,7 @@
 </p:sld>
 </file>
 
-<file path=ppt/slides/slide25.xml><?xml version="1.0" encoding="utf-8"?>
+<file path=ppt/slides/slide2.xml><?xml version="1.0" encoding="utf-8"?>
 <p:sld xmlns:a="http://schemas.openxmlformats.org/drawingml/2006/main" xmlns:r="http://schemas.openxmlformats.org/officeDocument/2006/relationships" xmlns:p="http://schemas.openxmlformats.org/presentationml/2006/main">
   <p:cSld>
     <p:spTree>
@@ -14236,6 +12584,232 @@
             </a:pPr>
             <a:r>
               <a:rPr/>
+              <a:t>Licence</a:t>
+            </a:r>
+          </a:p>
+        </p:txBody>
+      </p:sp>
+      <p:sp>
+        <p:nvSpPr>
+          <p:cNvPr id="3" name="Content Placeholder 2"/>
+          <p:cNvSpPr>
+            <a:spLocks noGrp="1"/>
+          </p:cNvSpPr>
+          <p:nvPr>
+            <p:ph idx="1"/>
+          </p:nvPr>
+        </p:nvSpPr>
+        <p:spPr/>
+        <p:txBody>
+          <a:bodyPr/>
+          <a:lstStyle/>
+          <a:p>
+            <a:pPr lvl="0" indent="0" marL="0">
+              <a:buNone/>
+            </a:pPr>
+            <a:r>
+              <a:rPr/>
+              <a:t>This work was originally created by Pat Callahan and Dejana Damjanovic under a CC-BY-SA 4.0 </a:t>
+            </a:r>
+            <a:r>
+              <a:rPr>
+                <a:hlinkClick r:id="rId3"/>
+              </a:rPr>
+              <a:t>Creative Commons Attribution 4.0 International License</a:t>
+            </a:r>
+            <a:r>
+              <a:rPr/>
+              <a:t> and a CC0 1.0 </a:t>
+            </a:r>
+            <a:r>
+              <a:rPr>
+                <a:hlinkClick r:id="rId4"/>
+              </a:rPr>
+              <a:t>Creative Commons Universal</a:t>
+            </a:r>
+            <a:r>
+              <a:rPr/>
+              <a:t> licence for code snippets. It was subsequently adapted and revised by </a:t>
+            </a:r>
+            <a:r>
+              <a:rPr>
+                <a:hlinkClick r:id="rId5"/>
+              </a:rPr>
+              <a:t>Sarah von Grebmer zu Wolfsthurn</a:t>
+            </a:r>
+            <a:r>
+              <a:rPr/>
+              <a:t>. This current work by </a:t>
+            </a:r>
+            <a:r>
+              <a:rPr>
+                <a:hlinkClick r:id="rId6"/>
+              </a:rPr>
+              <a:t>Tejaswini Sharma</a:t>
+            </a:r>
+            <a:r>
+              <a:rPr/>
+              <a:t> and Sarah von Grebmer zu Wolfsthurn is licensed under a CC-BY-SA 4.0 </a:t>
+            </a:r>
+            <a:r>
+              <a:rPr>
+                <a:hlinkClick r:id="rId7"/>
+              </a:rPr>
+              <a:t>Creative Commons Attribution 4.0 International SA License</a:t>
+            </a:r>
+            <a:r>
+              <a:rPr/>
+              <a:t>. permits unrestricted re-use, distribution, and reproduction in any medium, provided the original work is properly cited. If you remix, transform, or build upon the material, you must distribute your contributions under the same license as the original. Code snippets are dedicated to the public domain and licenced under a CC0 1.0 </a:t>
+            </a:r>
+            <a:r>
+              <a:rPr>
+                <a:hlinkClick r:id="rId8"/>
+              </a:rPr>
+              <a:t>Creative Commons Universal Licence</a:t>
+            </a:r>
+            <a:r>
+              <a:rPr/>
+              <a:t>. You may use, modify, distribute, and sell the code snippets for any purpose, without permission or attribution. The code snippets are provided “as is”, without warranty of any kind.</a:t>
+            </a:r>
+          </a:p>
+        </p:txBody>
+      </p:sp>
+      <p:sp>
+        <p:nvSpPr>
+          <p:cNvPr id="7" name="Date Placeholder 6">
+            <a:extLst>
+              <a:ext uri="{FF2B5EF4-FFF2-40B4-BE49-F238E27FC236}">
+                <a16:creationId xmlns:a16="http://schemas.microsoft.com/office/drawing/2014/main" id="{E2ED1F55-3CE9-F618-3510-EE96FDC54304}"/>
+              </a:ext>
+            </a:extLst>
+          </p:cNvPr>
+          <p:cNvSpPr>
+            <a:spLocks noGrp="1"/>
+          </p:cNvSpPr>
+          <p:nvPr>
+            <p:ph idx="10" sz="half" type="dt"/>
+          </p:nvPr>
+        </p:nvSpPr>
+        <p:spPr/>
+        <p:txBody>
+          <a:bodyPr/>
+          <a:lstStyle/>
+          <a:p>
+            <a:pPr algn="ctr"/>
+            <a:r>
+              <a:rPr lang="en-US"/>
+              <a:t>September 30, 2020</a:t>
+            </a:r>
+            <a:endParaRPr dirty="0" lang="en-US"/>
+          </a:p>
+        </p:txBody>
+      </p:sp>
+      <p:sp>
+        <p:nvSpPr>
+          <p:cNvPr id="8" name="Footer Placeholder 7">
+            <a:extLst>
+              <a:ext uri="{FF2B5EF4-FFF2-40B4-BE49-F238E27FC236}">
+                <a16:creationId xmlns:a16="http://schemas.microsoft.com/office/drawing/2014/main" id="{0616AEA6-DD6E-40D4-2DDA-E355C068ABA2}"/>
+              </a:ext>
+            </a:extLst>
+          </p:cNvPr>
+          <p:cNvSpPr>
+            <a:spLocks noGrp="1"/>
+          </p:cNvSpPr>
+          <p:nvPr>
+            <p:ph idx="11" sz="quarter" type="ftr"/>
+          </p:nvPr>
+        </p:nvSpPr>
+        <p:spPr/>
+        <p:txBody>
+          <a:bodyPr/>
+          <a:lstStyle/>
+          <a:p>
+            <a:r>
+              <a:rPr lang="en-US"/>
+              <a:t>© LMU Open Science Center</a:t>
+            </a:r>
+            <a:endParaRPr dirty="0" lang="en-US"/>
+          </a:p>
+        </p:txBody>
+      </p:sp>
+      <p:sp>
+        <p:nvSpPr>
+          <p:cNvPr id="9" name="Slide Number Placeholder 8">
+            <a:extLst>
+              <a:ext uri="{FF2B5EF4-FFF2-40B4-BE49-F238E27FC236}">
+                <a16:creationId xmlns:a16="http://schemas.microsoft.com/office/drawing/2014/main" id="{BD632E70-5D06-CAE0-ED30-149A6C1E3F1E}"/>
+              </a:ext>
+            </a:extLst>
+          </p:cNvPr>
+          <p:cNvSpPr>
+            <a:spLocks noGrp="1"/>
+          </p:cNvSpPr>
+          <p:nvPr>
+            <p:ph idx="12" sz="quarter" type="sldNum"/>
+          </p:nvPr>
+        </p:nvSpPr>
+        <p:spPr/>
+        <p:txBody>
+          <a:bodyPr/>
+          <a:lstStyle/>
+          <a:p>
+            <a:pPr algn="ctr"/>
+            <a:r>
+              <a:rPr lang="en-US"/>
+              <a:t>Slide </a:t>
+            </a:r>
+            <a:fld id="{C5EF2332-01BF-834F-8236-50238282D533}" type="slidenum">
+              <a:rPr lang="en-US" smtClean="0"/>
+              <a:pPr algn="ctr"/>
+              <a:t>‹#›</a:t>
+            </a:fld>
+            <a:endParaRPr dirty="0" lang="en-US"/>
+          </a:p>
+        </p:txBody>
+      </p:sp>
+    </p:spTree>
+  </p:cSld>
+</p:sld>
+</file>
+
+<file path=ppt/slides/slide20.xml><?xml version="1.0" encoding="utf-8"?>
+<p:sld xmlns:a="http://schemas.openxmlformats.org/drawingml/2006/main" xmlns:r="http://schemas.openxmlformats.org/officeDocument/2006/relationships" xmlns:p="http://schemas.openxmlformats.org/presentationml/2006/main">
+  <p:cSld>
+    <p:spTree>
+      <p:nvGrpSpPr>
+        <p:cNvPr id="1" name=""/>
+        <p:cNvGrpSpPr/>
+        <p:nvPr/>
+      </p:nvGrpSpPr>
+      <p:grpSpPr>
+        <a:xfrm>
+          <a:off x="0" y="0"/>
+          <a:ext cx="0" cy="0"/>
+          <a:chOff x="0" y="0"/>
+          <a:chExt cx="0" cy="0"/>
+        </a:xfrm>
+      </p:grpSpPr>
+      <p:sp>
+        <p:nvSpPr>
+          <p:cNvPr id="2" name="Title 1"/>
+          <p:cNvSpPr>
+            <a:spLocks noGrp="1"/>
+          </p:cNvSpPr>
+          <p:nvPr>
+            <p:ph type="title"/>
+          </p:nvPr>
+        </p:nvSpPr>
+        <p:spPr/>
+        <p:txBody>
+          <a:bodyPr/>
+          <a:lstStyle/>
+          <a:p>
+            <a:pPr lvl="0" indent="0" marL="0">
+              <a:buNone/>
+            </a:pPr>
+            <a:r>
+              <a:rPr/>
               <a:t>Citation styles (cont.)</a:t>
             </a:r>
           </a:p>
@@ -14252,8 +12826,8 @@
           </p:nvPr>
         </p:nvGraphicFramePr>
         <p:xfrm>
-          <a:off x="457200" y="1193800"/>
-          <a:ext cx="8229600" cy="3390900"/>
+          <a:off x="609600" y="1600200"/>
+          <a:ext cx="10972800" cy="4521200"/>
         </p:xfrm>
         <a:graphic>
           <a:graphicData uri="http://schemas.openxmlformats.org/drawingml/2006/table">
@@ -14262,10 +12836,10 @@
                 <a:tableStyleId>{5C22544A-7EE6-4342-B048-85BDC9FD1C3A}</a:tableStyleId>
               </a:tblPr>
               <a:tblGrid>
-                <a:gridCol w="876300"/>
-                <a:gridCol w="1600200"/>
-                <a:gridCol w="1003300"/>
-                <a:gridCol w="4749800"/>
+                <a:gridCol w="1168400"/>
+                <a:gridCol w="2133600"/>
+                <a:gridCol w="1333500"/>
+                <a:gridCol w="6337300"/>
               </a:tblGrid>
               <a:tr h="0">
                 <a:tc>
@@ -14568,7 +13142,7 @@
 </p:sld>
 </file>
 
-<file path=ppt/slides/slide26.xml><?xml version="1.0" encoding="utf-8"?>
+<file path=ppt/slides/slide21.xml><?xml version="1.0" encoding="utf-8"?>
 <p:sld xmlns:a="http://schemas.openxmlformats.org/drawingml/2006/main" xmlns:r="http://schemas.openxmlformats.org/officeDocument/2006/relationships" xmlns:p="http://schemas.openxmlformats.org/presentationml/2006/main">
   <p:cSld>
     <p:spTree>
@@ -14742,7 +13316,7 @@
 </p:sld>
 </file>
 
-<file path=ppt/slides/slide27.xml><?xml version="1.0" encoding="utf-8"?>
+<file path=ppt/slides/slide22.xml><?xml version="1.0" encoding="utf-8"?>
 <p:sld xmlns:a="http://schemas.openxmlformats.org/drawingml/2006/main" xmlns:r="http://schemas.openxmlformats.org/officeDocument/2006/relationships" xmlns:p="http://schemas.openxmlformats.org/presentationml/2006/main">
   <p:cSld>
     <p:spTree>
@@ -15147,7 +13721,7 @@
 </p:sld>
 </file>
 
-<file path=ppt/slides/slide28.xml><?xml version="1.0" encoding="utf-8"?>
+<file path=ppt/slides/slide23.xml><?xml version="1.0" encoding="utf-8"?>
 <p:sld xmlns:a="http://schemas.openxmlformats.org/drawingml/2006/main" xmlns:r="http://schemas.openxmlformats.org/officeDocument/2006/relationships" xmlns:p="http://schemas.openxmlformats.org/presentationml/2006/main">
   <p:cSld>
     <p:spTree>
@@ -15723,7 +14297,7 @@
 </p:sld>
 </file>
 
-<file path=ppt/slides/slide29.xml><?xml version="1.0" encoding="utf-8"?>
+<file path=ppt/slides/slide24.xml><?xml version="1.0" encoding="utf-8"?>
 <p:sld xmlns:a="http://schemas.openxmlformats.org/drawingml/2006/main" xmlns:r="http://schemas.openxmlformats.org/officeDocument/2006/relationships" xmlns:p="http://schemas.openxmlformats.org/presentationml/2006/main">
   <p:cSld>
     <p:spTree>
@@ -15864,7 +14438,7 @@
 </p:sld>
 </file>
 
-<file path=ppt/slides/slide3.xml><?xml version="1.0" encoding="utf-8"?>
+<file path=ppt/slides/slide25.xml><?xml version="1.0" encoding="utf-8"?>
 <p:sld xmlns:a="http://schemas.openxmlformats.org/drawingml/2006/main" xmlns:r="http://schemas.openxmlformats.org/officeDocument/2006/relationships" xmlns:p="http://schemas.openxmlformats.org/presentationml/2006/main">
   <p:cSld>
     <p:spTree>
@@ -15893,8 +14467,8 @@
         </p:nvSpPr>
         <p:spPr>
           <a:xfrm>
-            <a:off x="722313" y="2375222"/>
-            <a:ext cx="7772400" cy="1021556"/>
+            <a:off x="963084" y="3166963"/>
+            <a:ext cx="10363200" cy="1362075"/>
           </a:xfrm>
         </p:spPr>
         <p:txBody>
@@ -15906,7 +14480,7 @@
             </a:pPr>
             <a:r>
               <a:rPr/>
-              <a:t>Section Header?</a:t>
+              <a:t>Brief overview of Zotero</a:t>
             </a:r>
           </a:p>
         </p:txBody>
@@ -16010,153 +14584,7 @@
 </p:sld>
 </file>
 
-<file path=ppt/slides/slide30.xml><?xml version="1.0" encoding="utf-8"?>
-<p:sld xmlns:a="http://schemas.openxmlformats.org/drawingml/2006/main" xmlns:r="http://schemas.openxmlformats.org/officeDocument/2006/relationships" xmlns:p="http://schemas.openxmlformats.org/presentationml/2006/main">
-  <p:cSld>
-    <p:spTree>
-      <p:nvGrpSpPr>
-        <p:cNvPr id="1" name=""/>
-        <p:cNvGrpSpPr/>
-        <p:nvPr/>
-      </p:nvGrpSpPr>
-      <p:grpSpPr>
-        <a:xfrm>
-          <a:off x="0" y="0"/>
-          <a:ext cx="0" cy="0"/>
-          <a:chOff x="0" y="0"/>
-          <a:chExt cx="0" cy="0"/>
-        </a:xfrm>
-      </p:grpSpPr>
-      <p:sp>
-        <p:nvSpPr>
-          <p:cNvPr id="2" name="Title 1"/>
-          <p:cNvSpPr>
-            <a:spLocks noGrp="1"/>
-          </p:cNvSpPr>
-          <p:nvPr>
-            <p:ph hasCustomPrompt="1" type="title"/>
-          </p:nvPr>
-        </p:nvSpPr>
-        <p:spPr>
-          <a:xfrm>
-            <a:off x="722313" y="2375222"/>
-            <a:ext cx="7772400" cy="1021556"/>
-          </a:xfrm>
-        </p:spPr>
-        <p:txBody>
-          <a:bodyPr/>
-          <a:lstStyle/>
-          <a:p>
-            <a:pPr lvl="0" indent="0" marL="0">
-              <a:buNone/>
-            </a:pPr>
-            <a:r>
-              <a:rPr/>
-              <a:t>Brief overview of Zotero</a:t>
-            </a:r>
-          </a:p>
-        </p:txBody>
-      </p:sp>
-      <p:sp>
-        <p:nvSpPr>
-          <p:cNvPr id="7" name="Date Placeholder 6">
-            <a:extLst>
-              <a:ext uri="{FF2B5EF4-FFF2-40B4-BE49-F238E27FC236}">
-                <a16:creationId xmlns:a16="http://schemas.microsoft.com/office/drawing/2014/main" id="{7A3D4B62-A9D4-A224-853C-F47B5EEC33A2}"/>
-              </a:ext>
-            </a:extLst>
-          </p:cNvPr>
-          <p:cNvSpPr>
-            <a:spLocks noGrp="1"/>
-          </p:cNvSpPr>
-          <p:nvPr>
-            <p:ph idx="10" sz="half" type="dt"/>
-          </p:nvPr>
-        </p:nvSpPr>
-        <p:spPr/>
-        <p:txBody>
-          <a:bodyPr/>
-          <a:lstStyle/>
-          <a:p>
-            <a:pPr algn="ctr"/>
-            <a:r>
-              <a:rPr lang="en-US"/>
-              <a:t>September 30, 2020</a:t>
-            </a:r>
-            <a:endParaRPr dirty="0" lang="en-US"/>
-          </a:p>
-        </p:txBody>
-      </p:sp>
-      <p:sp>
-        <p:nvSpPr>
-          <p:cNvPr id="8" name="Footer Placeholder 7">
-            <a:extLst>
-              <a:ext uri="{FF2B5EF4-FFF2-40B4-BE49-F238E27FC236}">
-                <a16:creationId xmlns:a16="http://schemas.microsoft.com/office/drawing/2014/main" id="{FC227C7C-21CB-0721-ADC3-A51EEAD51D56}"/>
-              </a:ext>
-            </a:extLst>
-          </p:cNvPr>
-          <p:cNvSpPr>
-            <a:spLocks noGrp="1"/>
-          </p:cNvSpPr>
-          <p:nvPr>
-            <p:ph idx="11" sz="quarter" type="ftr"/>
-          </p:nvPr>
-        </p:nvSpPr>
-        <p:spPr/>
-        <p:txBody>
-          <a:bodyPr/>
-          <a:lstStyle/>
-          <a:p>
-            <a:r>
-              <a:rPr lang="en-US"/>
-              <a:t>© LMU Open Science Center</a:t>
-            </a:r>
-            <a:endParaRPr dirty="0" lang="en-US"/>
-          </a:p>
-        </p:txBody>
-      </p:sp>
-      <p:sp>
-        <p:nvSpPr>
-          <p:cNvPr id="9" name="Slide Number Placeholder 8">
-            <a:extLst>
-              <a:ext uri="{FF2B5EF4-FFF2-40B4-BE49-F238E27FC236}">
-                <a16:creationId xmlns:a16="http://schemas.microsoft.com/office/drawing/2014/main" id="{E630E53C-392D-BD97-174E-961B24066A76}"/>
-              </a:ext>
-            </a:extLst>
-          </p:cNvPr>
-          <p:cNvSpPr>
-            <a:spLocks noGrp="1"/>
-          </p:cNvSpPr>
-          <p:nvPr>
-            <p:ph idx="12" sz="quarter" type="sldNum"/>
-          </p:nvPr>
-        </p:nvSpPr>
-        <p:spPr/>
-        <p:txBody>
-          <a:bodyPr/>
-          <a:lstStyle/>
-          <a:p>
-            <a:pPr algn="ctr"/>
-            <a:r>
-              <a:rPr lang="en-US"/>
-              <a:t>Slide </a:t>
-            </a:r>
-            <a:fld id="{C5EF2332-01BF-834F-8236-50238282D533}" type="slidenum">
-              <a:rPr lang="en-US" smtClean="0"/>
-              <a:pPr algn="ctr"/>
-              <a:t>‹#›</a:t>
-            </a:fld>
-            <a:endParaRPr dirty="0" lang="en-US"/>
-          </a:p>
-        </p:txBody>
-      </p:sp>
-    </p:spTree>
-  </p:cSld>
-</p:sld>
-</file>
-
-<file path=ppt/slides/slide31.xml><?xml version="1.0" encoding="utf-8"?>
+<file path=ppt/slides/slide26.xml><?xml version="1.0" encoding="utf-8"?>
 <p:sld xmlns:a="http://schemas.openxmlformats.org/drawingml/2006/main" xmlns:r="http://schemas.openxmlformats.org/officeDocument/2006/relationships" xmlns:p="http://schemas.openxmlformats.org/presentationml/2006/main">
   <p:cSld>
     <p:spTree>
@@ -16526,7 +14954,7 @@
 </p:sld>
 </file>
 
-<file path=ppt/slides/slide32.xml><?xml version="1.0" encoding="utf-8"?>
+<file path=ppt/slides/slide27.xml><?xml version="1.0" encoding="utf-8"?>
 <p:sld xmlns:a="http://schemas.openxmlformats.org/drawingml/2006/main" xmlns:r="http://schemas.openxmlformats.org/officeDocument/2006/relationships" xmlns:p="http://schemas.openxmlformats.org/presentationml/2006/main">
   <p:cSld>
     <p:spTree>
@@ -16584,8 +15012,8 @@
         </p:blipFill>
         <p:spPr bwMode="auto">
           <a:xfrm>
-            <a:off x="1727200" y="1193800"/>
-            <a:ext cx="5676900" cy="3390900"/>
+            <a:off x="2311400" y="1600200"/>
+            <a:ext cx="7569200" cy="4521200"/>
           </a:xfrm>
           <a:prstGeom prst="rect">
             <a:avLst/>
@@ -16697,7 +15125,7 @@
 </p:sld>
 </file>
 
-<file path=ppt/slides/slide33.xml><?xml version="1.0" encoding="utf-8"?>
+<file path=ppt/slides/slide28.xml><?xml version="1.0" encoding="utf-8"?>
 <p:sld xmlns:a="http://schemas.openxmlformats.org/drawingml/2006/main" xmlns:r="http://schemas.openxmlformats.org/officeDocument/2006/relationships" xmlns:p="http://schemas.openxmlformats.org/presentationml/2006/main">
   <p:cSld>
     <p:spTree>
@@ -17070,7 +15498,7 @@
 </p:sld>
 </file>
 
-<file path=ppt/slides/slide34.xml><?xml version="1.0" encoding="utf-8"?>
+<file path=ppt/slides/slide29.xml><?xml version="1.0" encoding="utf-8"?>
 <p:sld xmlns:a="http://schemas.openxmlformats.org/drawingml/2006/main" xmlns:r="http://schemas.openxmlformats.org/officeDocument/2006/relationships" xmlns:p="http://schemas.openxmlformats.org/presentationml/2006/main">
   <p:cSld>
     <p:spTree>
@@ -17548,7 +15976,7 @@
 </p:sld>
 </file>
 
-<file path=ppt/slides/slide35.xml><?xml version="1.0" encoding="utf-8"?>
+<file path=ppt/slides/slide3.xml><?xml version="1.0" encoding="utf-8"?>
 <p:sld xmlns:a="http://schemas.openxmlformats.org/drawingml/2006/main" xmlns:r="http://schemas.openxmlformats.org/officeDocument/2006/relationships" xmlns:p="http://schemas.openxmlformats.org/presentationml/2006/main">
   <p:cSld>
     <p:spTree>
@@ -17567,6 +15995,196 @@
       </p:grpSpPr>
       <p:sp>
         <p:nvSpPr>
+          <p:cNvPr id="3" name="Content Placeholder 2"/>
+          <p:cNvSpPr>
+            <a:spLocks noGrp="1"/>
+          </p:cNvSpPr>
+          <p:nvPr>
+            <p:ph idx="1"/>
+          </p:nvPr>
+        </p:nvSpPr>
+        <p:spPr/>
+        <p:txBody>
+          <a:bodyPr/>
+          <a:lstStyle/>
+          <a:p>
+            <a:pPr lvl="0" indent="0" marL="0">
+              <a:spcBef>
+                <a:spcPts val="3000"/>
+              </a:spcBef>
+              <a:buNone/>
+            </a:pPr>
+            <a:r>
+              <a:rPr b="1"/>
+              <a:t>Contribution statement</a:t>
+            </a:r>
+          </a:p>
+          <a:p>
+            <a:pPr lvl="0" indent="0" marL="0">
+              <a:buNone/>
+            </a:pPr>
+            <a:r>
+              <a:rPr b="1"/>
+              <a:t>Creator</a:t>
+            </a:r>
+            <a:r>
+              <a:rPr/>
+              <a:t>: Sharma, Tejaswini (</a:t>
+            </a:r>
+            <a:r>
+              <a:rPr>
+                <a:hlinkClick r:id="rId2"/>
+              </a:rPr>
+              <a:t>Orcid-ID: 00009-0000-0305-9751</a:t>
+            </a:r>
+            <a:r>
+              <a:rPr/>
+              <a:t>)</a:t>
+            </a:r>
+          </a:p>
+          <a:p>
+            <a:pPr lvl="0" indent="0" marL="0">
+              <a:buNone/>
+            </a:pPr>
+            <a:r>
+              <a:rPr b="1"/>
+              <a:t>Reviewer</a:t>
+            </a:r>
+            <a:r>
+              <a:rPr/>
+              <a:t>: Von Grebmer zu Wolfsthurn, Sarah (</a:t>
+            </a:r>
+            <a:r>
+              <a:rPr>
+                <a:hlinkClick r:id="rId3"/>
+              </a:rPr>
+              <a:t>Ordcid-ID: 0000-0002-6413-3895</a:t>
+            </a:r>
+            <a:r>
+              <a:rPr/>
+              <a:t>)</a:t>
+            </a:r>
+          </a:p>
+        </p:txBody>
+      </p:sp>
+      <p:sp>
+        <p:nvSpPr>
+          <p:cNvPr id="7" name="Date Placeholder 6">
+            <a:extLst>
+              <a:ext uri="{FF2B5EF4-FFF2-40B4-BE49-F238E27FC236}">
+                <a16:creationId xmlns:a16="http://schemas.microsoft.com/office/drawing/2014/main" id="{E2ED1F55-3CE9-F618-3510-EE96FDC54304}"/>
+              </a:ext>
+            </a:extLst>
+          </p:cNvPr>
+          <p:cNvSpPr>
+            <a:spLocks noGrp="1"/>
+          </p:cNvSpPr>
+          <p:nvPr>
+            <p:ph idx="10" sz="half" type="dt"/>
+          </p:nvPr>
+        </p:nvSpPr>
+        <p:spPr/>
+        <p:txBody>
+          <a:bodyPr/>
+          <a:lstStyle/>
+          <a:p>
+            <a:pPr algn="ctr"/>
+            <a:r>
+              <a:rPr lang="en-US"/>
+              <a:t>September 30, 2020</a:t>
+            </a:r>
+            <a:endParaRPr dirty="0" lang="en-US"/>
+          </a:p>
+        </p:txBody>
+      </p:sp>
+      <p:sp>
+        <p:nvSpPr>
+          <p:cNvPr id="8" name="Footer Placeholder 7">
+            <a:extLst>
+              <a:ext uri="{FF2B5EF4-FFF2-40B4-BE49-F238E27FC236}">
+                <a16:creationId xmlns:a16="http://schemas.microsoft.com/office/drawing/2014/main" id="{0616AEA6-DD6E-40D4-2DDA-E355C068ABA2}"/>
+              </a:ext>
+            </a:extLst>
+          </p:cNvPr>
+          <p:cNvSpPr>
+            <a:spLocks noGrp="1"/>
+          </p:cNvSpPr>
+          <p:nvPr>
+            <p:ph idx="11" sz="quarter" type="ftr"/>
+          </p:nvPr>
+        </p:nvSpPr>
+        <p:spPr/>
+        <p:txBody>
+          <a:bodyPr/>
+          <a:lstStyle/>
+          <a:p>
+            <a:r>
+              <a:rPr lang="en-US"/>
+              <a:t>© LMU Open Science Center</a:t>
+            </a:r>
+            <a:endParaRPr dirty="0" lang="en-US"/>
+          </a:p>
+        </p:txBody>
+      </p:sp>
+      <p:sp>
+        <p:nvSpPr>
+          <p:cNvPr id="9" name="Slide Number Placeholder 8">
+            <a:extLst>
+              <a:ext uri="{FF2B5EF4-FFF2-40B4-BE49-F238E27FC236}">
+                <a16:creationId xmlns:a16="http://schemas.microsoft.com/office/drawing/2014/main" id="{BD632E70-5D06-CAE0-ED30-149A6C1E3F1E}"/>
+              </a:ext>
+            </a:extLst>
+          </p:cNvPr>
+          <p:cNvSpPr>
+            <a:spLocks noGrp="1"/>
+          </p:cNvSpPr>
+          <p:nvPr>
+            <p:ph idx="12" sz="quarter" type="sldNum"/>
+          </p:nvPr>
+        </p:nvSpPr>
+        <p:spPr/>
+        <p:txBody>
+          <a:bodyPr/>
+          <a:lstStyle/>
+          <a:p>
+            <a:pPr algn="ctr"/>
+            <a:r>
+              <a:rPr lang="en-US"/>
+              <a:t>Slide </a:t>
+            </a:r>
+            <a:fld id="{C5EF2332-01BF-834F-8236-50238282D533}" type="slidenum">
+              <a:rPr lang="en-US" smtClean="0"/>
+              <a:pPr algn="ctr"/>
+              <a:t>‹#›</a:t>
+            </a:fld>
+            <a:endParaRPr dirty="0" lang="en-US"/>
+          </a:p>
+        </p:txBody>
+      </p:sp>
+    </p:spTree>
+  </p:cSld>
+</p:sld>
+</file>
+
+<file path=ppt/slides/slide30.xml><?xml version="1.0" encoding="utf-8"?>
+<p:sld xmlns:a="http://schemas.openxmlformats.org/drawingml/2006/main" xmlns:r="http://schemas.openxmlformats.org/officeDocument/2006/relationships" xmlns:p="http://schemas.openxmlformats.org/presentationml/2006/main">
+  <p:cSld>
+    <p:spTree>
+      <p:nvGrpSpPr>
+        <p:cNvPr id="1" name=""/>
+        <p:cNvGrpSpPr/>
+        <p:nvPr/>
+      </p:nvGrpSpPr>
+      <p:grpSpPr>
+        <a:xfrm>
+          <a:off x="0" y="0"/>
+          <a:ext cx="0" cy="0"/>
+          <a:chOff x="0" y="0"/>
+          <a:chExt cx="0" cy="0"/>
+        </a:xfrm>
+      </p:grpSpPr>
+      <p:sp>
+        <p:nvSpPr>
           <p:cNvPr id="2" name="Title 1"/>
           <p:cNvSpPr>
             <a:spLocks noGrp="1"/>
@@ -17605,7 +16223,7 @@
           <a:bodyPr/>
           <a:lstStyle/>
           <a:p>
-            <a:pPr lvl="0" indent="-342900" marL="342900">
+            <a:pPr lvl="0" indent="-457189" marL="457189">
               <a:buAutoNum type="arabicPeriod"/>
             </a:pPr>
             <a:r>
@@ -17659,7 +16277,7 @@
             </a:r>
           </a:p>
           <a:p>
-            <a:pPr lvl="0" indent="-342900" marL="342900">
+            <a:pPr lvl="0" indent="-457189" marL="457189">
               <a:buAutoNum startAt="2" type="arabicPeriod"/>
             </a:pPr>
             <a:r>
@@ -18046,7 +16664,7 @@
 </p:sld>
 </file>
 
-<file path=ppt/slides/slide36.xml><?xml version="1.0" encoding="utf-8"?>
+<file path=ppt/slides/slide31.xml><?xml version="1.0" encoding="utf-8"?>
 <p:sld xmlns:a="http://schemas.openxmlformats.org/drawingml/2006/main" xmlns:r="http://schemas.openxmlformats.org/officeDocument/2006/relationships" xmlns:p="http://schemas.openxmlformats.org/presentationml/2006/main">
   <p:cSld>
     <p:spTree>
@@ -18398,7 +17016,7 @@
 </p:sld>
 </file>
 
-<file path=ppt/slides/slide37.xml><?xml version="1.0" encoding="utf-8"?>
+<file path=ppt/slides/slide32.xml><?xml version="1.0" encoding="utf-8"?>
 <p:sld xmlns:a="http://schemas.openxmlformats.org/drawingml/2006/main" xmlns:r="http://schemas.openxmlformats.org/officeDocument/2006/relationships" xmlns:p="http://schemas.openxmlformats.org/presentationml/2006/main">
   <p:cSld>
     <p:spTree>
@@ -18897,7 +17515,7 @@
 </p:sld>
 </file>
 
-<file path=ppt/slides/slide38.xml><?xml version="1.0" encoding="utf-8"?>
+<file path=ppt/slides/slide33.xml><?xml version="1.0" encoding="utf-8"?>
 <p:sld xmlns:a="http://schemas.openxmlformats.org/drawingml/2006/main" xmlns:r="http://schemas.openxmlformats.org/officeDocument/2006/relationships" xmlns:p="http://schemas.openxmlformats.org/presentationml/2006/main">
   <p:cSld>
     <p:spTree>
@@ -19038,7 +17656,7 @@
 </p:sld>
 </file>
 
-<file path=ppt/slides/slide39.xml><?xml version="1.0" encoding="utf-8"?>
+<file path=ppt/slides/slide34.xml><?xml version="1.0" encoding="utf-8"?>
 <p:sld xmlns:a="http://schemas.openxmlformats.org/drawingml/2006/main" xmlns:r="http://schemas.openxmlformats.org/officeDocument/2006/relationships" xmlns:p="http://schemas.openxmlformats.org/presentationml/2006/main">
   <p:cSld>
     <p:spTree>
@@ -19079,7 +17697,7 @@
             </a:r>
           </a:p>
           <a:p>
-            <a:pPr lvl="0" indent="-342900" marL="342900">
+            <a:pPr lvl="0" indent="-457189" marL="457189">
               <a:buAutoNum type="alphaLcPeriod"/>
             </a:pPr>
             <a:r>
@@ -19088,7 +17706,7 @@
             </a:r>
           </a:p>
           <a:p>
-            <a:pPr lvl="0" indent="-342900" marL="342900">
+            <a:pPr lvl="0" indent="-457189" marL="457189">
               <a:buAutoNum type="alphaLcPeriod"/>
             </a:pPr>
             <a:r>
@@ -19097,7 +17715,7 @@
             </a:r>
           </a:p>
           <a:p>
-            <a:pPr lvl="0" indent="-342900" marL="342900">
+            <a:pPr lvl="0" indent="-457189" marL="457189">
               <a:buAutoNum type="alphaLcPeriod"/>
             </a:pPr>
             <a:r>
@@ -19106,7 +17724,7 @@
             </a:r>
           </a:p>
           <a:p>
-            <a:pPr lvl="0" indent="-342900" marL="342900">
+            <a:pPr lvl="0" indent="-457189" marL="457189">
               <a:buAutoNum type="alphaLcPeriod"/>
             </a:pPr>
             <a:r>
@@ -19444,7 +18062,7 @@
 </p:sld>
 </file>
 
-<file path=ppt/slides/slide4.xml><?xml version="1.0" encoding="utf-8"?>
+<file path=ppt/slides/slide35.xml><?xml version="1.0" encoding="utf-8"?>
 <p:sld xmlns:a="http://schemas.openxmlformats.org/drawingml/2006/main" xmlns:r="http://schemas.openxmlformats.org/officeDocument/2006/relationships" xmlns:p="http://schemas.openxmlformats.org/presentationml/2006/main">
   <p:cSld>
     <p:spTree>
@@ -19480,147 +18098,6 @@
               <a:buNone/>
             </a:pPr>
             <a:r>
-              <a:rPr/>
-              <a:t>content in section header?</a:t>
-            </a:r>
-          </a:p>
-        </p:txBody>
-      </p:sp>
-      <p:sp>
-        <p:nvSpPr>
-          <p:cNvPr id="7" name="Date Placeholder 6">
-            <a:extLst>
-              <a:ext uri="{FF2B5EF4-FFF2-40B4-BE49-F238E27FC236}">
-                <a16:creationId xmlns:a16="http://schemas.microsoft.com/office/drawing/2014/main" id="{E2ED1F55-3CE9-F618-3510-EE96FDC54304}"/>
-              </a:ext>
-            </a:extLst>
-          </p:cNvPr>
-          <p:cNvSpPr>
-            <a:spLocks noGrp="1"/>
-          </p:cNvSpPr>
-          <p:nvPr>
-            <p:ph idx="10" sz="half" type="dt"/>
-          </p:nvPr>
-        </p:nvSpPr>
-        <p:spPr/>
-        <p:txBody>
-          <a:bodyPr/>
-          <a:lstStyle/>
-          <a:p>
-            <a:pPr algn="ctr"/>
-            <a:r>
-              <a:rPr lang="en-US"/>
-              <a:t>September 30, 2020</a:t>
-            </a:r>
-            <a:endParaRPr dirty="0" lang="en-US"/>
-          </a:p>
-        </p:txBody>
-      </p:sp>
-      <p:sp>
-        <p:nvSpPr>
-          <p:cNvPr id="8" name="Footer Placeholder 7">
-            <a:extLst>
-              <a:ext uri="{FF2B5EF4-FFF2-40B4-BE49-F238E27FC236}">
-                <a16:creationId xmlns:a16="http://schemas.microsoft.com/office/drawing/2014/main" id="{0616AEA6-DD6E-40D4-2DDA-E355C068ABA2}"/>
-              </a:ext>
-            </a:extLst>
-          </p:cNvPr>
-          <p:cNvSpPr>
-            <a:spLocks noGrp="1"/>
-          </p:cNvSpPr>
-          <p:nvPr>
-            <p:ph idx="11" sz="quarter" type="ftr"/>
-          </p:nvPr>
-        </p:nvSpPr>
-        <p:spPr/>
-        <p:txBody>
-          <a:bodyPr/>
-          <a:lstStyle/>
-          <a:p>
-            <a:r>
-              <a:rPr lang="en-US"/>
-              <a:t>© LMU Open Science Center</a:t>
-            </a:r>
-            <a:endParaRPr dirty="0" lang="en-US"/>
-          </a:p>
-        </p:txBody>
-      </p:sp>
-      <p:sp>
-        <p:nvSpPr>
-          <p:cNvPr id="9" name="Slide Number Placeholder 8">
-            <a:extLst>
-              <a:ext uri="{FF2B5EF4-FFF2-40B4-BE49-F238E27FC236}">
-                <a16:creationId xmlns:a16="http://schemas.microsoft.com/office/drawing/2014/main" id="{BD632E70-5D06-CAE0-ED30-149A6C1E3F1E}"/>
-              </a:ext>
-            </a:extLst>
-          </p:cNvPr>
-          <p:cNvSpPr>
-            <a:spLocks noGrp="1"/>
-          </p:cNvSpPr>
-          <p:nvPr>
-            <p:ph idx="12" sz="quarter" type="sldNum"/>
-          </p:nvPr>
-        </p:nvSpPr>
-        <p:spPr/>
-        <p:txBody>
-          <a:bodyPr/>
-          <a:lstStyle/>
-          <a:p>
-            <a:pPr algn="ctr"/>
-            <a:r>
-              <a:rPr lang="en-US"/>
-              <a:t>Slide </a:t>
-            </a:r>
-            <a:fld id="{C5EF2332-01BF-834F-8236-50238282D533}" type="slidenum">
-              <a:rPr lang="en-US" smtClean="0"/>
-              <a:pPr algn="ctr"/>
-              <a:t>‹#›</a:t>
-            </a:fld>
-            <a:endParaRPr dirty="0" lang="en-US"/>
-          </a:p>
-        </p:txBody>
-      </p:sp>
-    </p:spTree>
-  </p:cSld>
-</p:sld>
-</file>
-
-<file path=ppt/slides/slide40.xml><?xml version="1.0" encoding="utf-8"?>
-<p:sld xmlns:a="http://schemas.openxmlformats.org/drawingml/2006/main" xmlns:r="http://schemas.openxmlformats.org/officeDocument/2006/relationships" xmlns:p="http://schemas.openxmlformats.org/presentationml/2006/main">
-  <p:cSld>
-    <p:spTree>
-      <p:nvGrpSpPr>
-        <p:cNvPr id="1" name=""/>
-        <p:cNvGrpSpPr/>
-        <p:nvPr/>
-      </p:nvGrpSpPr>
-      <p:grpSpPr>
-        <a:xfrm>
-          <a:off x="0" y="0"/>
-          <a:ext cx="0" cy="0"/>
-          <a:chOff x="0" y="0"/>
-          <a:chExt cx="0" cy="0"/>
-        </a:xfrm>
-      </p:grpSpPr>
-      <p:sp>
-        <p:nvSpPr>
-          <p:cNvPr id="3" name="Content Placeholder 2"/>
-          <p:cNvSpPr>
-            <a:spLocks noGrp="1"/>
-          </p:cNvSpPr>
-          <p:nvPr>
-            <p:ph idx="1"/>
-          </p:nvPr>
-        </p:nvSpPr>
-        <p:spPr/>
-        <p:txBody>
-          <a:bodyPr/>
-          <a:lstStyle/>
-          <a:p>
-            <a:pPr lvl="0" indent="0" marL="0">
-              <a:buNone/>
-            </a:pPr>
-            <a:r>
               <a:rPr b="1"/>
               <a:t>How confident do you feel with the Zotero workflow of collection, organisation, and citing?</a:t>
             </a:r>
@@ -19634,7 +18111,7 @@
             </a:r>
           </a:p>
           <a:p>
-            <a:pPr lvl="0" indent="-342900" marL="342900">
+            <a:pPr lvl="0" indent="-457189" marL="457189">
               <a:buAutoNum type="alphaLcPeriod"/>
             </a:pPr>
             <a:r>
@@ -19643,7 +18120,7 @@
             </a:r>
           </a:p>
           <a:p>
-            <a:pPr lvl="0" indent="-342900" marL="342900">
+            <a:pPr lvl="0" indent="-457189" marL="457189">
               <a:buAutoNum type="alphaLcPeriod"/>
             </a:pPr>
             <a:r>
@@ -19652,7 +18129,7 @@
             </a:r>
           </a:p>
           <a:p>
-            <a:pPr lvl="0" indent="-342900" marL="342900">
+            <a:pPr lvl="0" indent="-457189" marL="457189">
               <a:buAutoNum type="alphaLcPeriod"/>
             </a:pPr>
             <a:r>
@@ -19661,7 +18138,7 @@
             </a:r>
           </a:p>
           <a:p>
-            <a:pPr lvl="0" indent="-342900" marL="342900">
+            <a:pPr lvl="0" indent="-457189" marL="457189">
               <a:buAutoNum type="alphaLcPeriod"/>
             </a:pPr>
             <a:r>
@@ -19670,7 +18147,7 @@
             </a:r>
           </a:p>
           <a:p>
-            <a:pPr lvl="0" indent="-342900" marL="342900">
+            <a:pPr lvl="0" indent="-457189" marL="457189">
               <a:buAutoNum type="alphaLcPeriod"/>
             </a:pPr>
             <a:r>
@@ -20057,7 +18534,7 @@
 </p:sld>
 </file>
 
-<file path=ppt/slides/slide41.xml><?xml version="1.0" encoding="utf-8"?>
+<file path=ppt/slides/slide36.xml><?xml version="1.0" encoding="utf-8"?>
 <p:sld xmlns:a="http://schemas.openxmlformats.org/drawingml/2006/main" xmlns:r="http://schemas.openxmlformats.org/officeDocument/2006/relationships" xmlns:p="http://schemas.openxmlformats.org/presentationml/2006/main">
   <p:cSld>
     <p:spTree>
@@ -20223,7 +18700,7 @@
 </p:sld>
 </file>
 
-<file path=ppt/slides/slide42.xml><?xml version="1.0" encoding="utf-8"?>
+<file path=ppt/slides/slide37.xml><?xml version="1.0" encoding="utf-8"?>
 <p:sld xmlns:a="http://schemas.openxmlformats.org/drawingml/2006/main" xmlns:r="http://schemas.openxmlformats.org/officeDocument/2006/relationships" xmlns:p="http://schemas.openxmlformats.org/presentationml/2006/main">
   <p:cSld>
     <p:spTree>
@@ -20267,39 +18744,6 @@
       </p:sp>
       <p:sp>
         <p:nvSpPr>
-          <p:cNvPr id="3" name="Content Placeholder 2"/>
-          <p:cNvSpPr>
-            <a:spLocks noGrp="1"/>
-          </p:cNvSpPr>
-          <p:nvPr>
-            <p:ph idx="1"/>
-          </p:nvPr>
-        </p:nvSpPr>
-        <p:spPr/>
-        <p:txBody>
-          <a:bodyPr/>
-          <a:lstStyle/>
-          <a:p>
-            <a:pPr lvl="0" indent="0" marL="0">
-              <a:buNone/>
-            </a:pPr>
-            <a:r>
-              <a:rPr/>
-              <a:t>Jackson, P. (1990). The Daily Grind. In </a:t>
-            </a:r>
-            <a:r>
-              <a:rPr i="1"/>
-              <a:t>Life in Classrooms</a:t>
-            </a:r>
-            <a:r>
-              <a:rPr/>
-              <a:t> (2nd ed., pp. 34–35). Teachers College Press.</a:t>
-            </a:r>
-          </a:p>
-        </p:txBody>
-      </p:sp>
-      <p:sp>
-        <p:nvSpPr>
           <p:cNvPr id="7" name="Date Placeholder 6">
             <a:extLst>
               <a:ext uri="{FF2B5EF4-FFF2-40B4-BE49-F238E27FC236}">
@@ -20397,7 +18841,7 @@
 </p:sld>
 </file>
 
-<file path=ppt/slides/slide43.xml><?xml version="1.0" encoding="utf-8"?>
+<file path=ppt/slides/slide38.xml><?xml version="1.0" encoding="utf-8"?>
 <p:sld xmlns:a="http://schemas.openxmlformats.org/drawingml/2006/main" xmlns:r="http://schemas.openxmlformats.org/officeDocument/2006/relationships" xmlns:p="http://schemas.openxmlformats.org/presentationml/2006/main">
   <p:cSld>
     <p:spTree>
@@ -20563,7 +19007,7 @@
 </p:sld>
 </file>
 
-<file path=ppt/slides/slide44.xml><?xml version="1.0" encoding="utf-8"?>
+<file path=ppt/slides/slide39.xml><?xml version="1.0" encoding="utf-8"?>
 <p:sld xmlns:a="http://schemas.openxmlformats.org/drawingml/2006/main" xmlns:r="http://schemas.openxmlformats.org/officeDocument/2006/relationships" xmlns:p="http://schemas.openxmlformats.org/presentationml/2006/main">
   <p:cSld>
     <p:spTree>
@@ -20813,7 +19257,7 @@
 </p:sld>
 </file>
 
-<file path=ppt/slides/slide45.xml><?xml version="1.0" encoding="utf-8"?>
+<file path=ppt/slides/slide4.xml><?xml version="1.0" encoding="utf-8"?>
 <p:sld xmlns:a="http://schemas.openxmlformats.org/drawingml/2006/main" xmlns:r="http://schemas.openxmlformats.org/officeDocument/2006/relationships" xmlns:p="http://schemas.openxmlformats.org/presentationml/2006/main">
   <p:cSld>
     <p:spTree>
@@ -20840,1179 +19284,10 @@
             <p:ph type="title"/>
           </p:nvPr>
         </p:nvSpPr>
-        <p:spPr/>
-        <p:txBody>
-          <a:bodyPr/>
-          <a:lstStyle/>
-          <a:p>
-            <a:pPr lvl="0" indent="0" marL="0">
-              <a:buNone/>
-            </a:pPr>
-            <a:r>
-              <a:rPr/>
-              <a:t>CREDiT Contribution Statement - TO DO</a:t>
-            </a:r>
-          </a:p>
-        </p:txBody>
-      </p:sp>
-      <p:sp>
-        <p:nvSpPr>
-          <p:cNvPr id="3" name="Content Placeholder 2"/>
-          <p:cNvSpPr>
-            <a:spLocks noGrp="1"/>
-          </p:cNvSpPr>
-          <p:nvPr>
-            <p:ph idx="1"/>
-          </p:nvPr>
-        </p:nvSpPr>
-        <p:spPr/>
-        <p:txBody>
-          <a:bodyPr/>
-          <a:lstStyle/>
-          <a:p>
-            <a:pPr lvl="0" indent="0" marL="0">
-              <a:buNone/>
-            </a:pPr>
-            <a:r>
-              <a:rPr/>
-              <a:t>Possible roles using the CRediT contribition system or the Zenodo Contribution System:</a:t>
-            </a:r>
-          </a:p>
-          <a:p>
-            <a:pPr lvl="0" indent="0" marL="0">
-              <a:buNone/>
-            </a:pPr>
-            <a:r>
-              <a:rPr b="1"/>
-              <a:t>Name main content creator</a:t>
-            </a:r>
-            <a:r>
-              <a:rPr/>
-              <a:t>: Conceptualization, Software, Writing - Original Draft, Visualization. </a:t>
-            </a:r>
-            <a:r>
-              <a:rPr b="1"/>
-              <a:t>Sara Lil Middleton</a:t>
-            </a:r>
-            <a:r>
-              <a:rPr/>
-              <a:t>: Writing - Review &amp; Editing, Supervision. </a:t>
-            </a:r>
-            <a:r>
-              <a:rPr b="1"/>
-              <a:t>Sarah von Grebmer zu Wolfsthurn</a:t>
-            </a:r>
-            <a:r>
-              <a:rPr/>
-              <a:t>: Conceptualisation, Writing - Review &amp; Editing, Supervision, Project Administration, Validation.</a:t>
-            </a:r>
-          </a:p>
-        </p:txBody>
-      </p:sp>
-      <p:sp>
-        <p:nvSpPr>
-          <p:cNvPr id="7" name="Date Placeholder 6">
-            <a:extLst>
-              <a:ext uri="{FF2B5EF4-FFF2-40B4-BE49-F238E27FC236}">
-                <a16:creationId xmlns:a16="http://schemas.microsoft.com/office/drawing/2014/main" id="{E2ED1F55-3CE9-F618-3510-EE96FDC54304}"/>
-              </a:ext>
-            </a:extLst>
-          </p:cNvPr>
-          <p:cNvSpPr>
-            <a:spLocks noGrp="1"/>
-          </p:cNvSpPr>
-          <p:nvPr>
-            <p:ph idx="10" sz="half" type="dt"/>
-          </p:nvPr>
-        </p:nvSpPr>
-        <p:spPr/>
-        <p:txBody>
-          <a:bodyPr/>
-          <a:lstStyle/>
-          <a:p>
-            <a:pPr algn="ctr"/>
-            <a:r>
-              <a:rPr lang="en-US"/>
-              <a:t>September 30, 2020</a:t>
-            </a:r>
-            <a:endParaRPr dirty="0" lang="en-US"/>
-          </a:p>
-        </p:txBody>
-      </p:sp>
-      <p:sp>
-        <p:nvSpPr>
-          <p:cNvPr id="8" name="Footer Placeholder 7">
-            <a:extLst>
-              <a:ext uri="{FF2B5EF4-FFF2-40B4-BE49-F238E27FC236}">
-                <a16:creationId xmlns:a16="http://schemas.microsoft.com/office/drawing/2014/main" id="{0616AEA6-DD6E-40D4-2DDA-E355C068ABA2}"/>
-              </a:ext>
-            </a:extLst>
-          </p:cNvPr>
-          <p:cNvSpPr>
-            <a:spLocks noGrp="1"/>
-          </p:cNvSpPr>
-          <p:nvPr>
-            <p:ph idx="11" sz="quarter" type="ftr"/>
-          </p:nvPr>
-        </p:nvSpPr>
-        <p:spPr/>
-        <p:txBody>
-          <a:bodyPr/>
-          <a:lstStyle/>
-          <a:p>
-            <a:r>
-              <a:rPr lang="en-US"/>
-              <a:t>© LMU Open Science Center</a:t>
-            </a:r>
-            <a:endParaRPr dirty="0" lang="en-US"/>
-          </a:p>
-        </p:txBody>
-      </p:sp>
-      <p:sp>
-        <p:nvSpPr>
-          <p:cNvPr id="9" name="Slide Number Placeholder 8">
-            <a:extLst>
-              <a:ext uri="{FF2B5EF4-FFF2-40B4-BE49-F238E27FC236}">
-                <a16:creationId xmlns:a16="http://schemas.microsoft.com/office/drawing/2014/main" id="{BD632E70-5D06-CAE0-ED30-149A6C1E3F1E}"/>
-              </a:ext>
-            </a:extLst>
-          </p:cNvPr>
-          <p:cNvSpPr>
-            <a:spLocks noGrp="1"/>
-          </p:cNvSpPr>
-          <p:nvPr>
-            <p:ph idx="12" sz="quarter" type="sldNum"/>
-          </p:nvPr>
-        </p:nvSpPr>
-        <p:spPr/>
-        <p:txBody>
-          <a:bodyPr/>
-          <a:lstStyle/>
-          <a:p>
-            <a:pPr algn="ctr"/>
-            <a:r>
-              <a:rPr lang="en-US"/>
-              <a:t>Slide </a:t>
-            </a:r>
-            <a:fld id="{C5EF2332-01BF-834F-8236-50238282D533}" type="slidenum">
-              <a:rPr lang="en-US" smtClean="0"/>
-              <a:pPr algn="ctr"/>
-              <a:t>‹#›</a:t>
-            </a:fld>
-            <a:endParaRPr dirty="0" lang="en-US"/>
-          </a:p>
-        </p:txBody>
-      </p:sp>
-    </p:spTree>
-  </p:cSld>
-</p:sld>
-</file>
-
-<file path=ppt/slides/slide5.xml><?xml version="1.0" encoding="utf-8"?>
-<p:sld xmlns:a="http://schemas.openxmlformats.org/drawingml/2006/main" xmlns:r="http://schemas.openxmlformats.org/officeDocument/2006/relationships" xmlns:p="http://schemas.openxmlformats.org/presentationml/2006/main">
-  <p:cSld>
-    <p:spTree>
-      <p:nvGrpSpPr>
-        <p:cNvPr id="1" name=""/>
-        <p:cNvGrpSpPr/>
-        <p:nvPr/>
-      </p:nvGrpSpPr>
-      <p:grpSpPr>
-        <a:xfrm>
-          <a:off x="0" y="0"/>
-          <a:ext cx="0" cy="0"/>
-          <a:chOff x="0" y="0"/>
-          <a:chExt cx="0" cy="0"/>
-        </a:xfrm>
-      </p:grpSpPr>
-      <p:sp>
-        <p:nvSpPr>
-          <p:cNvPr id="2" name="Title 1"/>
-          <p:cNvSpPr>
-            <a:spLocks noGrp="1"/>
-          </p:cNvSpPr>
-          <p:nvPr>
-            <p:ph type="title"/>
-          </p:nvPr>
-        </p:nvSpPr>
-        <p:spPr/>
-        <p:txBody>
-          <a:bodyPr/>
-          <a:lstStyle/>
-          <a:p>
-            <a:pPr lvl="0" indent="0" marL="0">
-              <a:buNone/>
-            </a:pPr>
-            <a:r>
-              <a:rPr/>
-              <a:t>a section</a:t>
-            </a:r>
-          </a:p>
-        </p:txBody>
-      </p:sp>
-      <p:sp>
-        <p:nvSpPr>
-          <p:cNvPr id="3" name="Content Placeholder 2"/>
-          <p:cNvSpPr>
-            <a:spLocks noGrp="1"/>
-          </p:cNvSpPr>
-          <p:nvPr>
-            <p:ph idx="1"/>
-          </p:nvPr>
-        </p:nvSpPr>
-        <p:spPr/>
-        <p:txBody>
-          <a:bodyPr/>
-          <a:lstStyle/>
-          <a:p>
-            <a:pPr lvl="0"/>
-            <a:r>
-              <a:rPr/>
-              <a:t>some text</a:t>
-            </a:r>
-          </a:p>
-          <a:p>
-            <a:pPr lvl="0"/>
-            <a:r>
-              <a:rPr/>
-              <a:t>another bullet point</a:t>
-            </a:r>
-          </a:p>
-          <a:p>
-            <a:pPr lvl="0"/>
-            <a:r>
-              <a:rPr b="1"/>
-              <a:t>bold</a:t>
-            </a:r>
-          </a:p>
-          <a:p>
-            <a:pPr lvl="0"/>
-            <a:r>
-              <a:rPr i="1"/>
-              <a:t>italics</a:t>
-            </a:r>
-          </a:p>
-        </p:txBody>
-      </p:sp>
-      <p:sp>
-        <p:nvSpPr>
-          <p:cNvPr id="7" name="Date Placeholder 6">
-            <a:extLst>
-              <a:ext uri="{FF2B5EF4-FFF2-40B4-BE49-F238E27FC236}">
-                <a16:creationId xmlns:a16="http://schemas.microsoft.com/office/drawing/2014/main" id="{E2ED1F55-3CE9-F618-3510-EE96FDC54304}"/>
-              </a:ext>
-            </a:extLst>
-          </p:cNvPr>
-          <p:cNvSpPr>
-            <a:spLocks noGrp="1"/>
-          </p:cNvSpPr>
-          <p:nvPr>
-            <p:ph idx="10" sz="half" type="dt"/>
-          </p:nvPr>
-        </p:nvSpPr>
-        <p:spPr/>
-        <p:txBody>
-          <a:bodyPr/>
-          <a:lstStyle/>
-          <a:p>
-            <a:pPr algn="ctr"/>
-            <a:r>
-              <a:rPr lang="en-US"/>
-              <a:t>September 30, 2020</a:t>
-            </a:r>
-            <a:endParaRPr dirty="0" lang="en-US"/>
-          </a:p>
-        </p:txBody>
-      </p:sp>
-      <p:sp>
-        <p:nvSpPr>
-          <p:cNvPr id="8" name="Footer Placeholder 7">
-            <a:extLst>
-              <a:ext uri="{FF2B5EF4-FFF2-40B4-BE49-F238E27FC236}">
-                <a16:creationId xmlns:a16="http://schemas.microsoft.com/office/drawing/2014/main" id="{0616AEA6-DD6E-40D4-2DDA-E355C068ABA2}"/>
-              </a:ext>
-            </a:extLst>
-          </p:cNvPr>
-          <p:cNvSpPr>
-            <a:spLocks noGrp="1"/>
-          </p:cNvSpPr>
-          <p:nvPr>
-            <p:ph idx="11" sz="quarter" type="ftr"/>
-          </p:nvPr>
-        </p:nvSpPr>
-        <p:spPr/>
-        <p:txBody>
-          <a:bodyPr/>
-          <a:lstStyle/>
-          <a:p>
-            <a:r>
-              <a:rPr lang="en-US"/>
-              <a:t>© LMU Open Science Center</a:t>
-            </a:r>
-            <a:endParaRPr dirty="0" lang="en-US"/>
-          </a:p>
-        </p:txBody>
-      </p:sp>
-      <p:sp>
-        <p:nvSpPr>
-          <p:cNvPr id="9" name="Slide Number Placeholder 8">
-            <a:extLst>
-              <a:ext uri="{FF2B5EF4-FFF2-40B4-BE49-F238E27FC236}">
-                <a16:creationId xmlns:a16="http://schemas.microsoft.com/office/drawing/2014/main" id="{BD632E70-5D06-CAE0-ED30-149A6C1E3F1E}"/>
-              </a:ext>
-            </a:extLst>
-          </p:cNvPr>
-          <p:cNvSpPr>
-            <a:spLocks noGrp="1"/>
-          </p:cNvSpPr>
-          <p:nvPr>
-            <p:ph idx="12" sz="quarter" type="sldNum"/>
-          </p:nvPr>
-        </p:nvSpPr>
-        <p:spPr/>
-        <p:txBody>
-          <a:bodyPr/>
-          <a:lstStyle/>
-          <a:p>
-            <a:pPr algn="ctr"/>
-            <a:r>
-              <a:rPr lang="en-US"/>
-              <a:t>Slide </a:t>
-            </a:r>
-            <a:fld id="{C5EF2332-01BF-834F-8236-50238282D533}" type="slidenum">
-              <a:rPr lang="en-US" smtClean="0"/>
-              <a:pPr algn="ctr"/>
-              <a:t>‹#›</a:t>
-            </a:fld>
-            <a:endParaRPr dirty="0" lang="en-US"/>
-          </a:p>
-        </p:txBody>
-      </p:sp>
-    </p:spTree>
-  </p:cSld>
-  <p:timing>
-    <p:tnLst>
-      <p:par>
-        <p:cTn id="1" dur="indefinite" restart="never" nodeType="tmRoot">
-          <p:childTnLst>
-            <p:seq concurrent="1" nextAc="seek">
-              <p:cTn id="2" dur="indefinite" nodeType="mainSeq">
-                <p:childTnLst>
-                  <p:par>
-                    <p:cTn id="3" fill="hold">
-                      <p:stCondLst>
-                        <p:cond delay="indefinite"/>
-                      </p:stCondLst>
-                      <p:childTnLst>
-                        <p:par>
-                          <p:cTn id="4" fill="hold">
-                            <p:stCondLst>
-                              <p:cond delay="0"/>
-                            </p:stCondLst>
-                            <p:childTnLst>
-                              <p:par>
-                                <p:cTn id="5" presetID="1" presetClass="entr" presetSubtype="0" fill="hold" grpId="0" nodeType="clickEffect">
-                                  <p:stCondLst>
-                                    <p:cond delay="0"/>
-                                  </p:stCondLst>
-                                  <p:childTnLst>
-                                    <p:set>
-                                      <p:cBhvr>
-                                        <p:cTn id="6" dur="1" fill="hold">
-                                          <p:stCondLst>
-                                            <p:cond delay="0"/>
-                                          </p:stCondLst>
-                                        </p:cTn>
-                                        <p:tgtEl>
-                                          <p:spTgt spid="3">
-                                            <p:txEl>
-                                              <p:pRg st="0" end="0"/>
-                                            </p:txEl>
-                                          </p:spTgt>
-                                        </p:tgtEl>
-                                        <p:attrNameLst>
-                                          <p:attrName>style.visibility</p:attrName>
-                                        </p:attrNameLst>
-                                      </p:cBhvr>
-                                      <p:to>
-                                        <p:strVal val="visible"/>
-                                      </p:to>
-                                    </p:set>
-                                  </p:childTnLst>
-                                </p:cTn>
-                              </p:par>
-                            </p:childTnLst>
-                          </p:cTn>
-                        </p:par>
-                      </p:childTnLst>
-                    </p:cTn>
-                  </p:par>
-                  <p:par>
-                    <p:cTn id="7" fill="hold">
-                      <p:stCondLst>
-                        <p:cond delay="indefinite"/>
-                      </p:stCondLst>
-                      <p:childTnLst>
-                        <p:par>
-                          <p:cTn id="8" fill="hold">
-                            <p:stCondLst>
-                              <p:cond delay="0"/>
-                            </p:stCondLst>
-                            <p:childTnLst>
-                              <p:par>
-                                <p:cTn id="9" presetID="1" presetClass="entr" presetSubtype="0" fill="hold" grpId="0" nodeType="clickEffect">
-                                  <p:stCondLst>
-                                    <p:cond delay="0"/>
-                                  </p:stCondLst>
-                                  <p:childTnLst>
-                                    <p:set>
-                                      <p:cBhvr>
-                                        <p:cTn id="10" dur="1" fill="hold">
-                                          <p:stCondLst>
-                                            <p:cond delay="0"/>
-                                          </p:stCondLst>
-                                        </p:cTn>
-                                        <p:tgtEl>
-                                          <p:spTgt spid="3">
-                                            <p:txEl>
-                                              <p:pRg st="1" end="1"/>
-                                            </p:txEl>
-                                          </p:spTgt>
-                                        </p:tgtEl>
-                                        <p:attrNameLst>
-                                          <p:attrName>style.visibility</p:attrName>
-                                        </p:attrNameLst>
-                                      </p:cBhvr>
-                                      <p:to>
-                                        <p:strVal val="visible"/>
-                                      </p:to>
-                                    </p:set>
-                                  </p:childTnLst>
-                                </p:cTn>
-                              </p:par>
-                            </p:childTnLst>
-                          </p:cTn>
-                        </p:par>
-                      </p:childTnLst>
-                    </p:cTn>
-                  </p:par>
-                  <p:par>
-                    <p:cTn id="11" fill="hold">
-                      <p:stCondLst>
-                        <p:cond delay="indefinite"/>
-                      </p:stCondLst>
-                      <p:childTnLst>
-                        <p:par>
-                          <p:cTn id="12" fill="hold">
-                            <p:stCondLst>
-                              <p:cond delay="0"/>
-                            </p:stCondLst>
-                            <p:childTnLst>
-                              <p:par>
-                                <p:cTn id="13" presetID="1" presetClass="entr" presetSubtype="0" fill="hold" grpId="0" nodeType="clickEffect">
-                                  <p:stCondLst>
-                                    <p:cond delay="0"/>
-                                  </p:stCondLst>
-                                  <p:childTnLst>
-                                    <p:set>
-                                      <p:cBhvr>
-                                        <p:cTn id="14" dur="1" fill="hold">
-                                          <p:stCondLst>
-                                            <p:cond delay="0"/>
-                                          </p:stCondLst>
-                                        </p:cTn>
-                                        <p:tgtEl>
-                                          <p:spTgt spid="3">
-                                            <p:txEl>
-                                              <p:pRg st="2" end="2"/>
-                                            </p:txEl>
-                                          </p:spTgt>
-                                        </p:tgtEl>
-                                        <p:attrNameLst>
-                                          <p:attrName>style.visibility</p:attrName>
-                                        </p:attrNameLst>
-                                      </p:cBhvr>
-                                      <p:to>
-                                        <p:strVal val="visible"/>
-                                      </p:to>
-                                    </p:set>
-                                  </p:childTnLst>
-                                </p:cTn>
-                              </p:par>
-                            </p:childTnLst>
-                          </p:cTn>
-                        </p:par>
-                      </p:childTnLst>
-                    </p:cTn>
-                  </p:par>
-                  <p:par>
-                    <p:cTn id="15" fill="hold">
-                      <p:stCondLst>
-                        <p:cond delay="indefinite"/>
-                      </p:stCondLst>
-                      <p:childTnLst>
-                        <p:par>
-                          <p:cTn id="16" fill="hold">
-                            <p:stCondLst>
-                              <p:cond delay="0"/>
-                            </p:stCondLst>
-                            <p:childTnLst>
-                              <p:par>
-                                <p:cTn id="17" presetID="1" presetClass="entr" presetSubtype="0" fill="hold" grpId="0" nodeType="clickEffect">
-                                  <p:stCondLst>
-                                    <p:cond delay="0"/>
-                                  </p:stCondLst>
-                                  <p:childTnLst>
-                                    <p:set>
-                                      <p:cBhvr>
-                                        <p:cTn id="18" dur="1" fill="hold">
-                                          <p:stCondLst>
-                                            <p:cond delay="0"/>
-                                          </p:stCondLst>
-                                        </p:cTn>
-                                        <p:tgtEl>
-                                          <p:spTgt spid="3">
-                                            <p:txEl>
-                                              <p:pRg st="3" end="3"/>
-                                            </p:txEl>
-                                          </p:spTgt>
-                                        </p:tgtEl>
-                                        <p:attrNameLst>
-                                          <p:attrName>style.visibility</p:attrName>
-                                        </p:attrNameLst>
-                                      </p:cBhvr>
-                                      <p:to>
-                                        <p:strVal val="visible"/>
-                                      </p:to>
-                                    </p:set>
-                                  </p:childTnLst>
-                                </p:cTn>
-                              </p:par>
-                            </p:childTnLst>
-                          </p:cTn>
-                        </p:par>
-                      </p:childTnLst>
-                    </p:cTn>
-                  </p:par>
-                </p:childTnLst>
-              </p:cTn>
-              <p:prevCondLst>
-                <p:cond evt="onPrev" delay="0">
-                  <p:tgtEl>
-                    <p:sldTgt/>
-                  </p:tgtEl>
-                </p:cond>
-              </p:prevCondLst>
-              <p:nextCondLst>
-                <p:cond evt="onNext" delay="0">
-                  <p:tgtEl>
-                    <p:sldTgt/>
-                  </p:tgtEl>
-                </p:cond>
-              </p:nextCondLst>
-            </p:seq>
-          </p:childTnLst>
-        </p:cTn>
-      </p:par>
-    </p:tnLst>
-    <p:bldLst>
-      <p:bldP spid="3" grpId="0" uiExpand="1" build="p"/>
-    </p:bldLst>
-  </p:timing>
-</p:sld>
-</file>
-
-<file path=ppt/slides/slide6.xml><?xml version="1.0" encoding="utf-8"?>
-<p:sld xmlns:a="http://schemas.openxmlformats.org/drawingml/2006/main" xmlns:r="http://schemas.openxmlformats.org/officeDocument/2006/relationships" xmlns:p="http://schemas.openxmlformats.org/presentationml/2006/main">
-  <p:cSld>
-    <p:spTree>
-      <p:nvGrpSpPr>
-        <p:cNvPr id="1" name=""/>
-        <p:cNvGrpSpPr/>
-        <p:nvPr/>
-      </p:nvGrpSpPr>
-      <p:grpSpPr>
-        <a:xfrm>
-          <a:off x="0" y="0"/>
-          <a:ext cx="0" cy="0"/>
-          <a:chOff x="0" y="0"/>
-          <a:chExt cx="0" cy="0"/>
-        </a:xfrm>
-      </p:grpSpPr>
-      <p:sp>
-        <p:nvSpPr>
-          <p:cNvPr id="3" name="Content Placeholder 2"/>
-          <p:cNvSpPr>
-            <a:spLocks noGrp="1"/>
-          </p:cNvSpPr>
-          <p:nvPr>
-            <p:ph idx="1"/>
-          </p:nvPr>
-        </p:nvSpPr>
-        <p:spPr/>
-        <p:txBody>
-          <a:bodyPr/>
-          <a:lstStyle/>
-          <a:p>
-            <a:pPr lvl="0" indent="0" marL="0">
-              <a:spcBef>
-                <a:spcPts val="3000"/>
-              </a:spcBef>
-              <a:buNone/>
-            </a:pPr>
-            <a:r>
-              <a:rPr b="1"/>
-              <a:t>this is a level three headers</a:t>
-            </a:r>
-          </a:p>
-        </p:txBody>
-      </p:sp>
-      <p:sp>
-        <p:nvSpPr>
-          <p:cNvPr id="7" name="Date Placeholder 6">
-            <a:extLst>
-              <a:ext uri="{FF2B5EF4-FFF2-40B4-BE49-F238E27FC236}">
-                <a16:creationId xmlns:a16="http://schemas.microsoft.com/office/drawing/2014/main" id="{E2ED1F55-3CE9-F618-3510-EE96FDC54304}"/>
-              </a:ext>
-            </a:extLst>
-          </p:cNvPr>
-          <p:cNvSpPr>
-            <a:spLocks noGrp="1"/>
-          </p:cNvSpPr>
-          <p:nvPr>
-            <p:ph idx="10" sz="half" type="dt"/>
-          </p:nvPr>
-        </p:nvSpPr>
-        <p:spPr/>
-        <p:txBody>
-          <a:bodyPr/>
-          <a:lstStyle/>
-          <a:p>
-            <a:pPr algn="ctr"/>
-            <a:r>
-              <a:rPr lang="en-US"/>
-              <a:t>September 30, 2020</a:t>
-            </a:r>
-            <a:endParaRPr dirty="0" lang="en-US"/>
-          </a:p>
-        </p:txBody>
-      </p:sp>
-      <p:sp>
-        <p:nvSpPr>
-          <p:cNvPr id="8" name="Footer Placeholder 7">
-            <a:extLst>
-              <a:ext uri="{FF2B5EF4-FFF2-40B4-BE49-F238E27FC236}">
-                <a16:creationId xmlns:a16="http://schemas.microsoft.com/office/drawing/2014/main" id="{0616AEA6-DD6E-40D4-2DDA-E355C068ABA2}"/>
-              </a:ext>
-            </a:extLst>
-          </p:cNvPr>
-          <p:cNvSpPr>
-            <a:spLocks noGrp="1"/>
-          </p:cNvSpPr>
-          <p:nvPr>
-            <p:ph idx="11" sz="quarter" type="ftr"/>
-          </p:nvPr>
-        </p:nvSpPr>
-        <p:spPr/>
-        <p:txBody>
-          <a:bodyPr/>
-          <a:lstStyle/>
-          <a:p>
-            <a:r>
-              <a:rPr lang="en-US"/>
-              <a:t>© LMU Open Science Center</a:t>
-            </a:r>
-            <a:endParaRPr dirty="0" lang="en-US"/>
-          </a:p>
-        </p:txBody>
-      </p:sp>
-      <p:sp>
-        <p:nvSpPr>
-          <p:cNvPr id="9" name="Slide Number Placeholder 8">
-            <a:extLst>
-              <a:ext uri="{FF2B5EF4-FFF2-40B4-BE49-F238E27FC236}">
-                <a16:creationId xmlns:a16="http://schemas.microsoft.com/office/drawing/2014/main" id="{BD632E70-5D06-CAE0-ED30-149A6C1E3F1E}"/>
-              </a:ext>
-            </a:extLst>
-          </p:cNvPr>
-          <p:cNvSpPr>
-            <a:spLocks noGrp="1"/>
-          </p:cNvSpPr>
-          <p:nvPr>
-            <p:ph idx="12" sz="quarter" type="sldNum"/>
-          </p:nvPr>
-        </p:nvSpPr>
-        <p:spPr/>
-        <p:txBody>
-          <a:bodyPr/>
-          <a:lstStyle/>
-          <a:p>
-            <a:pPr algn="ctr"/>
-            <a:r>
-              <a:rPr lang="en-US"/>
-              <a:t>Slide </a:t>
-            </a:r>
-            <a:fld id="{C5EF2332-01BF-834F-8236-50238282D533}" type="slidenum">
-              <a:rPr lang="en-US" smtClean="0"/>
-              <a:pPr algn="ctr"/>
-              <a:t>‹#›</a:t>
-            </a:fld>
-            <a:endParaRPr dirty="0" lang="en-US"/>
-          </a:p>
-        </p:txBody>
-      </p:sp>
-    </p:spTree>
-  </p:cSld>
-</p:sld>
-</file>
-
-<file path=ppt/slides/slide7.xml><?xml version="1.0" encoding="utf-8"?>
-<p:sld xmlns:a="http://schemas.openxmlformats.org/drawingml/2006/main" xmlns:r="http://schemas.openxmlformats.org/officeDocument/2006/relationships" xmlns:p="http://schemas.openxmlformats.org/presentationml/2006/main">
-  <p:cSld>
-    <p:spTree>
-      <p:nvGrpSpPr>
-        <p:cNvPr id="1" name=""/>
-        <p:cNvGrpSpPr/>
-        <p:nvPr/>
-      </p:nvGrpSpPr>
-      <p:grpSpPr>
-        <a:xfrm>
-          <a:off x="0" y="0"/>
-          <a:ext cx="0" cy="0"/>
-          <a:chOff x="0" y="0"/>
-          <a:chExt cx="0" cy="0"/>
-        </a:xfrm>
-      </p:grpSpPr>
-      <p:sp>
-        <p:nvSpPr>
-          <p:cNvPr id="2" name="Title 1"/>
-          <p:cNvSpPr>
-            <a:spLocks noGrp="1"/>
-          </p:cNvSpPr>
-          <p:nvPr>
-            <p:ph type="title"/>
-          </p:nvPr>
-        </p:nvSpPr>
-        <p:spPr/>
-        <p:txBody>
-          <a:bodyPr/>
-          <a:lstStyle/>
-          <a:p>
-            <a:pPr lvl="0" indent="0" marL="0">
-              <a:buNone/>
-            </a:pPr>
-            <a:r>
-              <a:rPr/>
-              <a:t>Licence</a:t>
-            </a:r>
-          </a:p>
-        </p:txBody>
-      </p:sp>
-      <p:sp>
-        <p:nvSpPr>
-          <p:cNvPr id="3" name="Content Placeholder 2"/>
-          <p:cNvSpPr>
-            <a:spLocks noGrp="1"/>
-          </p:cNvSpPr>
-          <p:nvPr>
-            <p:ph idx="1"/>
-          </p:nvPr>
-        </p:nvSpPr>
-        <p:spPr/>
-        <p:txBody>
-          <a:bodyPr/>
-          <a:lstStyle/>
-          <a:p>
-            <a:pPr lvl="0" indent="0" marL="0">
-              <a:buNone/>
-            </a:pPr>
-            <a:r>
-              <a:rPr/>
-              <a:t>This work was originally created by Pat Callahan and Dejana Damjanovic under a CC-BY-SA 4.0 </a:t>
-            </a:r>
-            <a:r>
-              <a:rPr>
-                <a:hlinkClick r:id="rId3"/>
-              </a:rPr>
-              <a:t>Creative Commons Attribution 4.0 International License</a:t>
-            </a:r>
-            <a:r>
-              <a:rPr/>
-              <a:t> and a CC0 1.0 </a:t>
-            </a:r>
-            <a:r>
-              <a:rPr>
-                <a:hlinkClick r:id="rId4"/>
-              </a:rPr>
-              <a:t>Creative Commons Universal</a:t>
-            </a:r>
-            <a:r>
-              <a:rPr/>
-              <a:t> licence for code snippets. It was subsequently adapted and revised by </a:t>
-            </a:r>
-            <a:r>
-              <a:rPr>
-                <a:hlinkClick r:id="rId5"/>
-              </a:rPr>
-              <a:t>Sarah von Grebmer zu Wolfsthurn</a:t>
-            </a:r>
-            <a:r>
-              <a:rPr/>
-              <a:t>. This current work by </a:t>
-            </a:r>
-            <a:r>
-              <a:rPr>
-                <a:hlinkClick r:id="rId6"/>
-              </a:rPr>
-              <a:t>Tejaswini Sharma</a:t>
-            </a:r>
-            <a:r>
-              <a:rPr/>
-              <a:t> and Sarah von Grebmer zu Wolfsthurn is licensed under a CC-BY-SA 4.0 </a:t>
-            </a:r>
-            <a:r>
-              <a:rPr>
-                <a:hlinkClick r:id="rId7"/>
-              </a:rPr>
-              <a:t>Creative Commons Attribution 4.0 International SA License</a:t>
-            </a:r>
-            <a:r>
-              <a:rPr/>
-              <a:t>. permits unrestricted re-use, distribution, and reproduction in any medium, provided the original work is properly cited. If you remix, transform, or build upon the material, you must distribute your contributions under the same license as the original. Code snippets are dedicated to the public domain and licenced under a CC0 1.0 </a:t>
-            </a:r>
-            <a:r>
-              <a:rPr>
-                <a:hlinkClick r:id="rId8"/>
-              </a:rPr>
-              <a:t>Creative Commons Universal Licence</a:t>
-            </a:r>
-            <a:r>
-              <a:rPr/>
-              <a:t>. You may use, modify, distribute, and sell the code snippets for any purpose, without permission or attribution. The code snippets are provided “as is”, without warranty of any kind.</a:t>
-            </a:r>
-          </a:p>
-        </p:txBody>
-      </p:sp>
-      <p:sp>
-        <p:nvSpPr>
-          <p:cNvPr id="7" name="Date Placeholder 6">
-            <a:extLst>
-              <a:ext uri="{FF2B5EF4-FFF2-40B4-BE49-F238E27FC236}">
-                <a16:creationId xmlns:a16="http://schemas.microsoft.com/office/drawing/2014/main" id="{E2ED1F55-3CE9-F618-3510-EE96FDC54304}"/>
-              </a:ext>
-            </a:extLst>
-          </p:cNvPr>
-          <p:cNvSpPr>
-            <a:spLocks noGrp="1"/>
-          </p:cNvSpPr>
-          <p:nvPr>
-            <p:ph idx="10" sz="half" type="dt"/>
-          </p:nvPr>
-        </p:nvSpPr>
-        <p:spPr/>
-        <p:txBody>
-          <a:bodyPr/>
-          <a:lstStyle/>
-          <a:p>
-            <a:pPr algn="ctr"/>
-            <a:r>
-              <a:rPr lang="en-US"/>
-              <a:t>September 30, 2020</a:t>
-            </a:r>
-            <a:endParaRPr dirty="0" lang="en-US"/>
-          </a:p>
-        </p:txBody>
-      </p:sp>
-      <p:sp>
-        <p:nvSpPr>
-          <p:cNvPr id="8" name="Footer Placeholder 7">
-            <a:extLst>
-              <a:ext uri="{FF2B5EF4-FFF2-40B4-BE49-F238E27FC236}">
-                <a16:creationId xmlns:a16="http://schemas.microsoft.com/office/drawing/2014/main" id="{0616AEA6-DD6E-40D4-2DDA-E355C068ABA2}"/>
-              </a:ext>
-            </a:extLst>
-          </p:cNvPr>
-          <p:cNvSpPr>
-            <a:spLocks noGrp="1"/>
-          </p:cNvSpPr>
-          <p:nvPr>
-            <p:ph idx="11" sz="quarter" type="ftr"/>
-          </p:nvPr>
-        </p:nvSpPr>
-        <p:spPr/>
-        <p:txBody>
-          <a:bodyPr/>
-          <a:lstStyle/>
-          <a:p>
-            <a:r>
-              <a:rPr lang="en-US"/>
-              <a:t>© LMU Open Science Center</a:t>
-            </a:r>
-            <a:endParaRPr dirty="0" lang="en-US"/>
-          </a:p>
-        </p:txBody>
-      </p:sp>
-      <p:sp>
-        <p:nvSpPr>
-          <p:cNvPr id="9" name="Slide Number Placeholder 8">
-            <a:extLst>
-              <a:ext uri="{FF2B5EF4-FFF2-40B4-BE49-F238E27FC236}">
-                <a16:creationId xmlns:a16="http://schemas.microsoft.com/office/drawing/2014/main" id="{BD632E70-5D06-CAE0-ED30-149A6C1E3F1E}"/>
-              </a:ext>
-            </a:extLst>
-          </p:cNvPr>
-          <p:cNvSpPr>
-            <a:spLocks noGrp="1"/>
-          </p:cNvSpPr>
-          <p:nvPr>
-            <p:ph idx="12" sz="quarter" type="sldNum"/>
-          </p:nvPr>
-        </p:nvSpPr>
-        <p:spPr/>
-        <p:txBody>
-          <a:bodyPr/>
-          <a:lstStyle/>
-          <a:p>
-            <a:pPr algn="ctr"/>
-            <a:r>
-              <a:rPr lang="en-US"/>
-              <a:t>Slide </a:t>
-            </a:r>
-            <a:fld id="{C5EF2332-01BF-834F-8236-50238282D533}" type="slidenum">
-              <a:rPr lang="en-US" smtClean="0"/>
-              <a:pPr algn="ctr"/>
-              <a:t>‹#›</a:t>
-            </a:fld>
-            <a:endParaRPr dirty="0" lang="en-US"/>
-          </a:p>
-        </p:txBody>
-      </p:sp>
-    </p:spTree>
-  </p:cSld>
-</p:sld>
-</file>
-
-<file path=ppt/slides/slide8.xml><?xml version="1.0" encoding="utf-8"?>
-<p:sld xmlns:a="http://schemas.openxmlformats.org/drawingml/2006/main" xmlns:r="http://schemas.openxmlformats.org/officeDocument/2006/relationships" xmlns:p="http://schemas.openxmlformats.org/presentationml/2006/main">
-  <p:cSld>
-    <p:spTree>
-      <p:nvGrpSpPr>
-        <p:cNvPr id="1" name=""/>
-        <p:cNvGrpSpPr/>
-        <p:nvPr/>
-      </p:nvGrpSpPr>
-      <p:grpSpPr>
-        <a:xfrm>
-          <a:off x="0" y="0"/>
-          <a:ext cx="0" cy="0"/>
-          <a:chOff x="0" y="0"/>
-          <a:chExt cx="0" cy="0"/>
-        </a:xfrm>
-      </p:grpSpPr>
-      <p:sp>
-        <p:nvSpPr>
-          <p:cNvPr id="3" name="Content Placeholder 2"/>
-          <p:cNvSpPr>
-            <a:spLocks noGrp="1"/>
-          </p:cNvSpPr>
-          <p:nvPr>
-            <p:ph idx="1"/>
-          </p:nvPr>
-        </p:nvSpPr>
-        <p:spPr/>
-        <p:txBody>
-          <a:bodyPr/>
-          <a:lstStyle/>
-          <a:p>
-            <a:pPr lvl="0" indent="0" marL="0">
-              <a:spcBef>
-                <a:spcPts val="3000"/>
-              </a:spcBef>
-              <a:buNone/>
-            </a:pPr>
-            <a:r>
-              <a:rPr b="1"/>
-              <a:t>Contribution statement</a:t>
-            </a:r>
-          </a:p>
-          <a:p>
-            <a:pPr lvl="0" indent="0" marL="0">
-              <a:buNone/>
-            </a:pPr>
-            <a:r>
-              <a:rPr b="1"/>
-              <a:t>Creator</a:t>
-            </a:r>
-            <a:r>
-              <a:rPr/>
-              <a:t>: Sharma, Tejaswini (</a:t>
-            </a:r>
-            <a:r>
-              <a:rPr>
-                <a:hlinkClick r:id="rId2"/>
-              </a:rPr>
-              <a:t>Orcid-ID: 00009-0000-0305-9751</a:t>
-            </a:r>
-            <a:r>
-              <a:rPr/>
-              <a:t>)</a:t>
-            </a:r>
-          </a:p>
-          <a:p>
-            <a:pPr lvl="0" indent="0" marL="0">
-              <a:buNone/>
-            </a:pPr>
-            <a:r>
-              <a:rPr b="1"/>
-              <a:t>Reviewer</a:t>
-            </a:r>
-            <a:r>
-              <a:rPr/>
-              <a:t>: Von Grebmer zu Wolfsthurn, Sarah (</a:t>
-            </a:r>
-            <a:r>
-              <a:rPr>
-                <a:hlinkClick r:id="rId3"/>
-              </a:rPr>
-              <a:t>Ordcid-ID: 0000-0002-6413-3895</a:t>
-            </a:r>
-            <a:r>
-              <a:rPr/>
-              <a:t>)</a:t>
-            </a:r>
-          </a:p>
-        </p:txBody>
-      </p:sp>
-      <p:sp>
-        <p:nvSpPr>
-          <p:cNvPr id="7" name="Date Placeholder 6">
-            <a:extLst>
-              <a:ext uri="{FF2B5EF4-FFF2-40B4-BE49-F238E27FC236}">
-                <a16:creationId xmlns:a16="http://schemas.microsoft.com/office/drawing/2014/main" id="{E2ED1F55-3CE9-F618-3510-EE96FDC54304}"/>
-              </a:ext>
-            </a:extLst>
-          </p:cNvPr>
-          <p:cNvSpPr>
-            <a:spLocks noGrp="1"/>
-          </p:cNvSpPr>
-          <p:nvPr>
-            <p:ph idx="10" sz="half" type="dt"/>
-          </p:nvPr>
-        </p:nvSpPr>
-        <p:spPr/>
-        <p:txBody>
-          <a:bodyPr/>
-          <a:lstStyle/>
-          <a:p>
-            <a:pPr algn="ctr"/>
-            <a:r>
-              <a:rPr lang="en-US"/>
-              <a:t>September 30, 2020</a:t>
-            </a:r>
-            <a:endParaRPr dirty="0" lang="en-US"/>
-          </a:p>
-        </p:txBody>
-      </p:sp>
-      <p:sp>
-        <p:nvSpPr>
-          <p:cNvPr id="8" name="Footer Placeholder 7">
-            <a:extLst>
-              <a:ext uri="{FF2B5EF4-FFF2-40B4-BE49-F238E27FC236}">
-                <a16:creationId xmlns:a16="http://schemas.microsoft.com/office/drawing/2014/main" id="{0616AEA6-DD6E-40D4-2DDA-E355C068ABA2}"/>
-              </a:ext>
-            </a:extLst>
-          </p:cNvPr>
-          <p:cNvSpPr>
-            <a:spLocks noGrp="1"/>
-          </p:cNvSpPr>
-          <p:nvPr>
-            <p:ph idx="11" sz="quarter" type="ftr"/>
-          </p:nvPr>
-        </p:nvSpPr>
-        <p:spPr/>
-        <p:txBody>
-          <a:bodyPr/>
-          <a:lstStyle/>
-          <a:p>
-            <a:r>
-              <a:rPr lang="en-US"/>
-              <a:t>© LMU Open Science Center</a:t>
-            </a:r>
-            <a:endParaRPr dirty="0" lang="en-US"/>
-          </a:p>
-        </p:txBody>
-      </p:sp>
-      <p:sp>
-        <p:nvSpPr>
-          <p:cNvPr id="9" name="Slide Number Placeholder 8">
-            <a:extLst>
-              <a:ext uri="{FF2B5EF4-FFF2-40B4-BE49-F238E27FC236}">
-                <a16:creationId xmlns:a16="http://schemas.microsoft.com/office/drawing/2014/main" id="{BD632E70-5D06-CAE0-ED30-149A6C1E3F1E}"/>
-              </a:ext>
-            </a:extLst>
-          </p:cNvPr>
-          <p:cNvSpPr>
-            <a:spLocks noGrp="1"/>
-          </p:cNvSpPr>
-          <p:nvPr>
-            <p:ph idx="12" sz="quarter" type="sldNum"/>
-          </p:nvPr>
-        </p:nvSpPr>
-        <p:spPr/>
-        <p:txBody>
-          <a:bodyPr/>
-          <a:lstStyle/>
-          <a:p>
-            <a:pPr algn="ctr"/>
-            <a:r>
-              <a:rPr lang="en-US"/>
-              <a:t>Slide </a:t>
-            </a:r>
-            <a:fld id="{C5EF2332-01BF-834F-8236-50238282D533}" type="slidenum">
-              <a:rPr lang="en-US" smtClean="0"/>
-              <a:pPr algn="ctr"/>
-              <a:t>‹#›</a:t>
-            </a:fld>
-            <a:endParaRPr dirty="0" lang="en-US"/>
-          </a:p>
-        </p:txBody>
-      </p:sp>
-    </p:spTree>
-  </p:cSld>
-</p:sld>
-</file>
-
-<file path=ppt/slides/slide9.xml><?xml version="1.0" encoding="utf-8"?>
-<p:sld xmlns:a="http://schemas.openxmlformats.org/drawingml/2006/main" xmlns:r="http://schemas.openxmlformats.org/officeDocument/2006/relationships" xmlns:p="http://schemas.openxmlformats.org/presentationml/2006/main">
-  <p:cSld>
-    <p:spTree>
-      <p:nvGrpSpPr>
-        <p:cNvPr id="1" name=""/>
-        <p:cNvGrpSpPr/>
-        <p:nvPr/>
-      </p:nvGrpSpPr>
-      <p:grpSpPr>
-        <a:xfrm>
-          <a:off x="0" y="0"/>
-          <a:ext cx="0" cy="0"/>
-          <a:chOff x="0" y="0"/>
-          <a:chExt cx="0" cy="0"/>
-        </a:xfrm>
-      </p:grpSpPr>
-      <p:sp>
-        <p:nvSpPr>
-          <p:cNvPr id="2" name="Title 1"/>
-          <p:cNvSpPr>
-            <a:spLocks noGrp="1"/>
-          </p:cNvSpPr>
-          <p:nvPr>
-            <p:ph type="title"/>
-          </p:nvPr>
-        </p:nvSpPr>
         <p:spPr>
           <a:xfrm>
-            <a:off x="457201" y="204787"/>
-            <a:ext cx="3008313" cy="871538"/>
+            <a:off x="609602" y="273049"/>
+            <a:ext cx="4011084" cy="1162051"/>
           </a:xfrm>
         </p:spPr>
         <p:txBody>
@@ -22069,8 +19344,8 @@
           </p:nvPr>
         </p:nvGraphicFramePr>
         <p:xfrm>
-          <a:off x="3568700" y="203200"/>
-          <a:ext cx="5105400" cy="4381500"/>
+          <a:off x="4762500" y="266700"/>
+          <a:ext cx="6807200" cy="5842000"/>
         </p:xfrm>
         <a:graphic>
           <a:graphicData uri="http://schemas.openxmlformats.org/drawingml/2006/table">
@@ -22079,9 +19354,9 @@
                 <a:tableStyleId>{5C22544A-7EE6-4342-B048-85BDC9FD1C3A}</a:tableStyleId>
               </a:tblPr>
               <a:tblGrid>
-                <a:gridCol w="1701800"/>
-                <a:gridCol w="1701800"/>
-                <a:gridCol w="1701800"/>
+                <a:gridCol w="2273300"/>
+                <a:gridCol w="2273300"/>
+                <a:gridCol w="2273300"/>
               </a:tblGrid>
               <a:tr h="0">
                 <a:tc>
@@ -22380,6 +19655,1658 @@
       </p:sp>
     </p:spTree>
   </p:cSld>
+</p:sld>
+</file>
+
+<file path=ppt/slides/slide40.xml><?xml version="1.0" encoding="utf-8"?>
+<p:sld xmlns:a="http://schemas.openxmlformats.org/drawingml/2006/main" xmlns:r="http://schemas.openxmlformats.org/officeDocument/2006/relationships" xmlns:p="http://schemas.openxmlformats.org/presentationml/2006/main">
+  <p:cSld>
+    <p:spTree>
+      <p:nvGrpSpPr>
+        <p:cNvPr id="1" name=""/>
+        <p:cNvGrpSpPr/>
+        <p:nvPr/>
+      </p:nvGrpSpPr>
+      <p:grpSpPr>
+        <a:xfrm>
+          <a:off x="0" y="0"/>
+          <a:ext cx="0" cy="0"/>
+          <a:chOff x="0" y="0"/>
+          <a:chExt cx="0" cy="0"/>
+        </a:xfrm>
+      </p:grpSpPr>
+      <p:sp>
+        <p:nvSpPr>
+          <p:cNvPr id="2" name="Title 1"/>
+          <p:cNvSpPr>
+            <a:spLocks noGrp="1"/>
+          </p:cNvSpPr>
+          <p:nvPr>
+            <p:ph type="title"/>
+          </p:nvPr>
+        </p:nvSpPr>
+        <p:spPr/>
+        <p:txBody>
+          <a:bodyPr/>
+          <a:lstStyle/>
+          <a:p>
+            <a:pPr lvl="0" indent="0" marL="0">
+              <a:buNone/>
+            </a:pPr>
+            <a:r>
+              <a:rPr/>
+              <a:t>CREDiT Contribution Statement - TO DO</a:t>
+            </a:r>
+          </a:p>
+        </p:txBody>
+      </p:sp>
+      <p:sp>
+        <p:nvSpPr>
+          <p:cNvPr id="3" name="Content Placeholder 2"/>
+          <p:cNvSpPr>
+            <a:spLocks noGrp="1"/>
+          </p:cNvSpPr>
+          <p:nvPr>
+            <p:ph idx="1"/>
+          </p:nvPr>
+        </p:nvSpPr>
+        <p:spPr/>
+        <p:txBody>
+          <a:bodyPr/>
+          <a:lstStyle/>
+          <a:p>
+            <a:pPr lvl="0" indent="0" marL="0">
+              <a:buNone/>
+            </a:pPr>
+            <a:r>
+              <a:rPr/>
+              <a:t>Possible roles using the CRediT contribition system or the Zenodo Contribution System:</a:t>
+            </a:r>
+          </a:p>
+          <a:p>
+            <a:pPr lvl="0" indent="0" marL="0">
+              <a:buNone/>
+            </a:pPr>
+            <a:r>
+              <a:rPr b="1"/>
+              <a:t>Name main content creator</a:t>
+            </a:r>
+            <a:r>
+              <a:rPr/>
+              <a:t>: Conceptualization, Software, Writing - Original Draft, Visualization. </a:t>
+            </a:r>
+            <a:r>
+              <a:rPr b="1"/>
+              <a:t>Sara Lil Middleton</a:t>
+            </a:r>
+            <a:r>
+              <a:rPr/>
+              <a:t>: Writing - Review &amp; Editing, Supervision. </a:t>
+            </a:r>
+            <a:r>
+              <a:rPr b="1"/>
+              <a:t>Sarah von Grebmer zu Wolfsthurn</a:t>
+            </a:r>
+            <a:r>
+              <a:rPr/>
+              <a:t>: Conceptualisation, Writing - Review &amp; Editing, Supervision, Project Administration, Validation.</a:t>
+            </a:r>
+          </a:p>
+        </p:txBody>
+      </p:sp>
+      <p:sp>
+        <p:nvSpPr>
+          <p:cNvPr id="7" name="Date Placeholder 6">
+            <a:extLst>
+              <a:ext uri="{FF2B5EF4-FFF2-40B4-BE49-F238E27FC236}">
+                <a16:creationId xmlns:a16="http://schemas.microsoft.com/office/drawing/2014/main" id="{E2ED1F55-3CE9-F618-3510-EE96FDC54304}"/>
+              </a:ext>
+            </a:extLst>
+          </p:cNvPr>
+          <p:cNvSpPr>
+            <a:spLocks noGrp="1"/>
+          </p:cNvSpPr>
+          <p:nvPr>
+            <p:ph idx="10" sz="half" type="dt"/>
+          </p:nvPr>
+        </p:nvSpPr>
+        <p:spPr/>
+        <p:txBody>
+          <a:bodyPr/>
+          <a:lstStyle/>
+          <a:p>
+            <a:pPr algn="ctr"/>
+            <a:r>
+              <a:rPr lang="en-US"/>
+              <a:t>September 30, 2020</a:t>
+            </a:r>
+            <a:endParaRPr dirty="0" lang="en-US"/>
+          </a:p>
+        </p:txBody>
+      </p:sp>
+      <p:sp>
+        <p:nvSpPr>
+          <p:cNvPr id="8" name="Footer Placeholder 7">
+            <a:extLst>
+              <a:ext uri="{FF2B5EF4-FFF2-40B4-BE49-F238E27FC236}">
+                <a16:creationId xmlns:a16="http://schemas.microsoft.com/office/drawing/2014/main" id="{0616AEA6-DD6E-40D4-2DDA-E355C068ABA2}"/>
+              </a:ext>
+            </a:extLst>
+          </p:cNvPr>
+          <p:cNvSpPr>
+            <a:spLocks noGrp="1"/>
+          </p:cNvSpPr>
+          <p:nvPr>
+            <p:ph idx="11" sz="quarter" type="ftr"/>
+          </p:nvPr>
+        </p:nvSpPr>
+        <p:spPr/>
+        <p:txBody>
+          <a:bodyPr/>
+          <a:lstStyle/>
+          <a:p>
+            <a:r>
+              <a:rPr lang="en-US"/>
+              <a:t>© LMU Open Science Center</a:t>
+            </a:r>
+            <a:endParaRPr dirty="0" lang="en-US"/>
+          </a:p>
+        </p:txBody>
+      </p:sp>
+      <p:sp>
+        <p:nvSpPr>
+          <p:cNvPr id="9" name="Slide Number Placeholder 8">
+            <a:extLst>
+              <a:ext uri="{FF2B5EF4-FFF2-40B4-BE49-F238E27FC236}">
+                <a16:creationId xmlns:a16="http://schemas.microsoft.com/office/drawing/2014/main" id="{BD632E70-5D06-CAE0-ED30-149A6C1E3F1E}"/>
+              </a:ext>
+            </a:extLst>
+          </p:cNvPr>
+          <p:cNvSpPr>
+            <a:spLocks noGrp="1"/>
+          </p:cNvSpPr>
+          <p:nvPr>
+            <p:ph idx="12" sz="quarter" type="sldNum"/>
+          </p:nvPr>
+        </p:nvSpPr>
+        <p:spPr/>
+        <p:txBody>
+          <a:bodyPr/>
+          <a:lstStyle/>
+          <a:p>
+            <a:pPr algn="ctr"/>
+            <a:r>
+              <a:rPr lang="en-US"/>
+              <a:t>Slide </a:t>
+            </a:r>
+            <a:fld id="{C5EF2332-01BF-834F-8236-50238282D533}" type="slidenum">
+              <a:rPr lang="en-US" smtClean="0"/>
+              <a:pPr algn="ctr"/>
+              <a:t>‹#›</a:t>
+            </a:fld>
+            <a:endParaRPr dirty="0" lang="en-US"/>
+          </a:p>
+        </p:txBody>
+      </p:sp>
+    </p:spTree>
+  </p:cSld>
+</p:sld>
+</file>
+
+<file path=ppt/slides/slide5.xml><?xml version="1.0" encoding="utf-8"?>
+<p:sld xmlns:a="http://schemas.openxmlformats.org/drawingml/2006/main" xmlns:r="http://schemas.openxmlformats.org/officeDocument/2006/relationships" xmlns:p="http://schemas.openxmlformats.org/presentationml/2006/main">
+  <p:cSld>
+    <p:spTree>
+      <p:nvGrpSpPr>
+        <p:cNvPr id="1" name=""/>
+        <p:cNvGrpSpPr/>
+        <p:nvPr/>
+      </p:nvGrpSpPr>
+      <p:grpSpPr>
+        <a:xfrm>
+          <a:off x="0" y="0"/>
+          <a:ext cx="0" cy="0"/>
+          <a:chOff x="0" y="0"/>
+          <a:chExt cx="0" cy="0"/>
+        </a:xfrm>
+      </p:grpSpPr>
+      <p:sp>
+        <p:nvSpPr>
+          <p:cNvPr id="2" name="Title 1"/>
+          <p:cNvSpPr>
+            <a:spLocks noGrp="1"/>
+          </p:cNvSpPr>
+          <p:nvPr>
+            <p:ph type="title"/>
+          </p:nvPr>
+        </p:nvSpPr>
+        <p:spPr>
+          <a:xfrm>
+            <a:off x="609602" y="273049"/>
+            <a:ext cx="4011084" cy="1162051"/>
+          </a:xfrm>
+        </p:spPr>
+        <p:txBody>
+          <a:bodyPr/>
+          <a:lstStyle/>
+          <a:p>
+            <a:pPr lvl="0" indent="0" marL="0">
+              <a:buNone/>
+            </a:pPr>
+            <a:r>
+              <a:rPr/>
+              <a:t>Prerequisites (cont.)</a:t>
+            </a:r>
+          </a:p>
+        </p:txBody>
+      </p:sp>
+      <p:sp>
+        <p:nvSpPr>
+          <p:cNvPr id="4" name="Text Placeholder 3"/>
+          <p:cNvSpPr>
+            <a:spLocks noGrp="1"/>
+          </p:cNvSpPr>
+          <p:nvPr>
+            <p:ph idx="2" sz="half" type="body"/>
+          </p:nvPr>
+        </p:nvSpPr>
+        <p:spPr/>
+        <p:txBody>
+          <a:bodyPr/>
+          <a:lstStyle/>
+          <a:p>
+            <a:pPr lvl="0"/>
+            <a:r>
+              <a:rPr/>
+              <a:t>Familiarity with the concept of </a:t>
+            </a:r>
+            <a:r>
+              <a:rPr b="1"/>
+              <a:t>literature review</a:t>
+            </a:r>
+            <a:r>
+              <a:rPr/>
+              <a:t>; how and where to access scientific papers, such as </a:t>
+            </a:r>
+            <a:r>
+              <a:rPr i="1"/>
+              <a:t>Google Scholar</a:t>
+            </a:r>
+            <a:r>
+              <a:rPr/>
+              <a:t>.</a:t>
+            </a:r>
+          </a:p>
+        </p:txBody>
+      </p:sp>
+      <p:pic>
+        <p:nvPicPr>
+          <p:cNvPr descr="images/GoogleScholar.png" id="0" name="Picture 1"/>
+          <p:cNvPicPr>
+            <a:picLocks noGrp="1" noChangeAspect="1"/>
+          </p:cNvPicPr>
+          <p:nvPr/>
+        </p:nvPicPr>
+        <p:blipFill>
+          <a:blip r:embed="rId3"/>
+          <a:stretch>
+            <a:fillRect/>
+          </a:stretch>
+        </p:blipFill>
+        <p:spPr bwMode="auto">
+          <a:xfrm>
+            <a:off x="4762500" y="1143000"/>
+            <a:ext cx="6807200" cy="4076700"/>
+          </a:xfrm>
+          <a:prstGeom prst="rect">
+            <a:avLst/>
+          </a:prstGeom>
+          <a:noFill/>
+          <a:ln w="9525">
+            <a:noFill/>
+            <a:headEnd/>
+            <a:tailEnd/>
+          </a:ln>
+        </p:spPr>
+      </p:pic>
+      <p:sp>
+        <p:nvSpPr>
+          <p:cNvPr id="8" name="Date Placeholder 7">
+            <a:extLst>
+              <a:ext uri="{FF2B5EF4-FFF2-40B4-BE49-F238E27FC236}">
+                <a16:creationId xmlns:a16="http://schemas.microsoft.com/office/drawing/2014/main" id="{E6D5126F-053F-910F-7F76-D928AC61372D}"/>
+              </a:ext>
+            </a:extLst>
+          </p:cNvPr>
+          <p:cNvSpPr>
+            <a:spLocks noGrp="1"/>
+          </p:cNvSpPr>
+          <p:nvPr>
+            <p:ph idx="10" sz="half" type="dt"/>
+          </p:nvPr>
+        </p:nvSpPr>
+        <p:spPr/>
+        <p:txBody>
+          <a:bodyPr/>
+          <a:lstStyle/>
+          <a:p>
+            <a:pPr algn="ctr"/>
+            <a:r>
+              <a:rPr lang="en-US"/>
+              <a:t>September 30, 2020</a:t>
+            </a:r>
+            <a:endParaRPr dirty="0" lang="en-US"/>
+          </a:p>
+        </p:txBody>
+      </p:sp>
+      <p:sp>
+        <p:nvSpPr>
+          <p:cNvPr id="9" name="Footer Placeholder 8">
+            <a:extLst>
+              <a:ext uri="{FF2B5EF4-FFF2-40B4-BE49-F238E27FC236}">
+                <a16:creationId xmlns:a16="http://schemas.microsoft.com/office/drawing/2014/main" id="{8EEF7D04-FF72-0698-CE48-A9A4F70D774F}"/>
+              </a:ext>
+            </a:extLst>
+          </p:cNvPr>
+          <p:cNvSpPr>
+            <a:spLocks noGrp="1"/>
+          </p:cNvSpPr>
+          <p:nvPr>
+            <p:ph idx="11" sz="quarter" type="ftr"/>
+          </p:nvPr>
+        </p:nvSpPr>
+        <p:spPr/>
+        <p:txBody>
+          <a:bodyPr/>
+          <a:lstStyle/>
+          <a:p>
+            <a:r>
+              <a:rPr lang="en-US"/>
+              <a:t>© LMU Open Science Center</a:t>
+            </a:r>
+            <a:endParaRPr dirty="0" lang="en-US"/>
+          </a:p>
+        </p:txBody>
+      </p:sp>
+      <p:sp>
+        <p:nvSpPr>
+          <p:cNvPr id="10" name="Slide Number Placeholder 9">
+            <a:extLst>
+              <a:ext uri="{FF2B5EF4-FFF2-40B4-BE49-F238E27FC236}">
+                <a16:creationId xmlns:a16="http://schemas.microsoft.com/office/drawing/2014/main" id="{C8B1F07D-59FC-87D1-1BB5-7C86711059AF}"/>
+              </a:ext>
+            </a:extLst>
+          </p:cNvPr>
+          <p:cNvSpPr>
+            <a:spLocks noGrp="1"/>
+          </p:cNvSpPr>
+          <p:nvPr>
+            <p:ph idx="12" sz="quarter" type="sldNum"/>
+          </p:nvPr>
+        </p:nvSpPr>
+        <p:spPr/>
+        <p:txBody>
+          <a:bodyPr/>
+          <a:lstStyle/>
+          <a:p>
+            <a:pPr algn="ctr"/>
+            <a:r>
+              <a:rPr lang="en-US"/>
+              <a:t>Slide </a:t>
+            </a:r>
+            <a:fld id="{C5EF2332-01BF-834F-8236-50238282D533}" type="slidenum">
+              <a:rPr lang="en-US" smtClean="0"/>
+              <a:pPr algn="ctr"/>
+              <a:t>‹#›</a:t>
+            </a:fld>
+            <a:endParaRPr dirty="0" lang="en-US"/>
+          </a:p>
+        </p:txBody>
+      </p:sp>
+    </p:spTree>
+  </p:cSld>
+  <p:timing>
+    <p:tnLst>
+      <p:par>
+        <p:cTn id="1" dur="indefinite" restart="never" nodeType="tmRoot">
+          <p:childTnLst>
+            <p:seq concurrent="1" nextAc="seek">
+              <p:cTn id="2" dur="indefinite" nodeType="mainSeq">
+                <p:childTnLst>
+                  <p:par>
+                    <p:cTn id="3" fill="hold">
+                      <p:stCondLst>
+                        <p:cond delay="indefinite"/>
+                      </p:stCondLst>
+                      <p:childTnLst>
+                        <p:par>
+                          <p:cTn id="4" fill="hold">
+                            <p:stCondLst>
+                              <p:cond delay="0"/>
+                            </p:stCondLst>
+                            <p:childTnLst>
+                              <p:par>
+                                <p:cTn id="5" presetID="1" presetClass="entr" presetSubtype="0" fill="hold" grpId="0" nodeType="clickEffect">
+                                  <p:stCondLst>
+                                    <p:cond delay="0"/>
+                                  </p:stCondLst>
+                                  <p:childTnLst>
+                                    <p:set>
+                                      <p:cBhvr>
+                                        <p:cTn id="6" dur="1" fill="hold">
+                                          <p:stCondLst>
+                                            <p:cond delay="0"/>
+                                          </p:stCondLst>
+                                        </p:cTn>
+                                        <p:tgtEl>
+                                          <p:spTgt spid="4">
+                                            <p:txEl>
+                                              <p:pRg st="0" end="0"/>
+                                            </p:txEl>
+                                          </p:spTgt>
+                                        </p:tgtEl>
+                                        <p:attrNameLst>
+                                          <p:attrName>style.visibility</p:attrName>
+                                        </p:attrNameLst>
+                                      </p:cBhvr>
+                                      <p:to>
+                                        <p:strVal val="visible"/>
+                                      </p:to>
+                                    </p:set>
+                                  </p:childTnLst>
+                                </p:cTn>
+                              </p:par>
+                            </p:childTnLst>
+                          </p:cTn>
+                        </p:par>
+                      </p:childTnLst>
+                    </p:cTn>
+                  </p:par>
+                </p:childTnLst>
+              </p:cTn>
+              <p:prevCondLst>
+                <p:cond evt="onPrev" delay="0">
+                  <p:tgtEl>
+                    <p:sldTgt/>
+                  </p:tgtEl>
+                </p:cond>
+              </p:prevCondLst>
+              <p:nextCondLst>
+                <p:cond evt="onNext" delay="0">
+                  <p:tgtEl>
+                    <p:sldTgt/>
+                  </p:tgtEl>
+                </p:cond>
+              </p:nextCondLst>
+            </p:seq>
+          </p:childTnLst>
+        </p:cTn>
+      </p:par>
+    </p:tnLst>
+    <p:bldLst>
+      <p:bldP spid="4" grpId="0" uiExpand="1" build="p"/>
+    </p:bldLst>
+  </p:timing>
+</p:sld>
+</file>
+
+<file path=ppt/slides/slide6.xml><?xml version="1.0" encoding="utf-8"?>
+<p:sld xmlns:a="http://schemas.openxmlformats.org/drawingml/2006/main" xmlns:r="http://schemas.openxmlformats.org/officeDocument/2006/relationships" xmlns:p="http://schemas.openxmlformats.org/presentationml/2006/main">
+  <p:cSld>
+    <p:spTree>
+      <p:nvGrpSpPr>
+        <p:cNvPr id="1" name=""/>
+        <p:cNvGrpSpPr/>
+        <p:nvPr/>
+      </p:nvGrpSpPr>
+      <p:grpSpPr>
+        <a:xfrm>
+          <a:off x="0" y="0"/>
+          <a:ext cx="0" cy="0"/>
+          <a:chOff x="0" y="0"/>
+          <a:chExt cx="0" cy="0"/>
+        </a:xfrm>
+      </p:grpSpPr>
+      <p:sp>
+        <p:nvSpPr>
+          <p:cNvPr id="2" name="Title 1"/>
+          <p:cNvSpPr>
+            <a:spLocks noGrp="1"/>
+          </p:cNvSpPr>
+          <p:nvPr>
+            <p:ph type="title"/>
+          </p:nvPr>
+        </p:nvSpPr>
+        <p:spPr/>
+        <p:txBody>
+          <a:bodyPr/>
+          <a:lstStyle/>
+          <a:p>
+            <a:pPr lvl="0" indent="0" marL="0">
+              <a:buNone/>
+            </a:pPr>
+            <a:r>
+              <a:rPr/>
+              <a:t>Questions from the previous submodule?</a:t>
+            </a:r>
+          </a:p>
+        </p:txBody>
+      </p:sp>
+      <p:sp>
+        <p:nvSpPr>
+          <p:cNvPr id="7" name="Date Placeholder 6">
+            <a:extLst>
+              <a:ext uri="{FF2B5EF4-FFF2-40B4-BE49-F238E27FC236}">
+                <a16:creationId xmlns:a16="http://schemas.microsoft.com/office/drawing/2014/main" id="{E2ED1F55-3CE9-F618-3510-EE96FDC54304}"/>
+              </a:ext>
+            </a:extLst>
+          </p:cNvPr>
+          <p:cNvSpPr>
+            <a:spLocks noGrp="1"/>
+          </p:cNvSpPr>
+          <p:nvPr>
+            <p:ph idx="10" sz="half" type="dt"/>
+          </p:nvPr>
+        </p:nvSpPr>
+        <p:spPr/>
+        <p:txBody>
+          <a:bodyPr/>
+          <a:lstStyle/>
+          <a:p>
+            <a:pPr algn="ctr"/>
+            <a:r>
+              <a:rPr lang="en-US"/>
+              <a:t>September 30, 2020</a:t>
+            </a:r>
+            <a:endParaRPr dirty="0" lang="en-US"/>
+          </a:p>
+        </p:txBody>
+      </p:sp>
+      <p:sp>
+        <p:nvSpPr>
+          <p:cNvPr id="8" name="Footer Placeholder 7">
+            <a:extLst>
+              <a:ext uri="{FF2B5EF4-FFF2-40B4-BE49-F238E27FC236}">
+                <a16:creationId xmlns:a16="http://schemas.microsoft.com/office/drawing/2014/main" id="{0616AEA6-DD6E-40D4-2DDA-E355C068ABA2}"/>
+              </a:ext>
+            </a:extLst>
+          </p:cNvPr>
+          <p:cNvSpPr>
+            <a:spLocks noGrp="1"/>
+          </p:cNvSpPr>
+          <p:nvPr>
+            <p:ph idx="11" sz="quarter" type="ftr"/>
+          </p:nvPr>
+        </p:nvSpPr>
+        <p:spPr/>
+        <p:txBody>
+          <a:bodyPr/>
+          <a:lstStyle/>
+          <a:p>
+            <a:r>
+              <a:rPr lang="en-US"/>
+              <a:t>© LMU Open Science Center</a:t>
+            </a:r>
+            <a:endParaRPr dirty="0" lang="en-US"/>
+          </a:p>
+        </p:txBody>
+      </p:sp>
+      <p:sp>
+        <p:nvSpPr>
+          <p:cNvPr id="9" name="Slide Number Placeholder 8">
+            <a:extLst>
+              <a:ext uri="{FF2B5EF4-FFF2-40B4-BE49-F238E27FC236}">
+                <a16:creationId xmlns:a16="http://schemas.microsoft.com/office/drawing/2014/main" id="{BD632E70-5D06-CAE0-ED30-149A6C1E3F1E}"/>
+              </a:ext>
+            </a:extLst>
+          </p:cNvPr>
+          <p:cNvSpPr>
+            <a:spLocks noGrp="1"/>
+          </p:cNvSpPr>
+          <p:nvPr>
+            <p:ph idx="12" sz="quarter" type="sldNum"/>
+          </p:nvPr>
+        </p:nvSpPr>
+        <p:spPr/>
+        <p:txBody>
+          <a:bodyPr/>
+          <a:lstStyle/>
+          <a:p>
+            <a:pPr algn="ctr"/>
+            <a:r>
+              <a:rPr lang="en-US"/>
+              <a:t>Slide </a:t>
+            </a:r>
+            <a:fld id="{C5EF2332-01BF-834F-8236-50238282D533}" type="slidenum">
+              <a:rPr lang="en-US" smtClean="0"/>
+              <a:pPr algn="ctr"/>
+              <a:t>‹#›</a:t>
+            </a:fld>
+            <a:endParaRPr dirty="0" lang="en-US"/>
+          </a:p>
+        </p:txBody>
+      </p:sp>
+    </p:spTree>
+  </p:cSld>
+</p:sld>
+</file>
+
+<file path=ppt/slides/slide7.xml><?xml version="1.0" encoding="utf-8"?>
+<p:sld xmlns:a="http://schemas.openxmlformats.org/drawingml/2006/main" xmlns:r="http://schemas.openxmlformats.org/officeDocument/2006/relationships" xmlns:p="http://schemas.openxmlformats.org/presentationml/2006/main">
+  <p:cSld>
+    <p:spTree>
+      <p:nvGrpSpPr>
+        <p:cNvPr id="1" name=""/>
+        <p:cNvGrpSpPr/>
+        <p:nvPr/>
+      </p:nvGrpSpPr>
+      <p:grpSpPr>
+        <a:xfrm>
+          <a:off x="0" y="0"/>
+          <a:ext cx="0" cy="0"/>
+          <a:chOff x="0" y="0"/>
+          <a:chExt cx="0" cy="0"/>
+        </a:xfrm>
+      </p:grpSpPr>
+      <p:sp>
+        <p:nvSpPr>
+          <p:cNvPr id="2" name="Title 1"/>
+          <p:cNvSpPr>
+            <a:spLocks noGrp="1"/>
+          </p:cNvSpPr>
+          <p:nvPr>
+            <p:ph type="title"/>
+          </p:nvPr>
+        </p:nvSpPr>
+        <p:spPr/>
+        <p:txBody>
+          <a:bodyPr/>
+          <a:lstStyle/>
+          <a:p>
+            <a:pPr lvl="0" indent="0" marL="0">
+              <a:buNone/>
+            </a:pPr>
+            <a:r>
+              <a:rPr/>
+              <a:t>Before we start: Survey time!</a:t>
+            </a:r>
+          </a:p>
+        </p:txBody>
+      </p:sp>
+      <p:sp>
+        <p:nvSpPr>
+          <p:cNvPr id="7" name="Date Placeholder 6">
+            <a:extLst>
+              <a:ext uri="{FF2B5EF4-FFF2-40B4-BE49-F238E27FC236}">
+                <a16:creationId xmlns:a16="http://schemas.microsoft.com/office/drawing/2014/main" id="{E2ED1F55-3CE9-F618-3510-EE96FDC54304}"/>
+              </a:ext>
+            </a:extLst>
+          </p:cNvPr>
+          <p:cNvSpPr>
+            <a:spLocks noGrp="1"/>
+          </p:cNvSpPr>
+          <p:nvPr>
+            <p:ph idx="10" sz="half" type="dt"/>
+          </p:nvPr>
+        </p:nvSpPr>
+        <p:spPr/>
+        <p:txBody>
+          <a:bodyPr/>
+          <a:lstStyle/>
+          <a:p>
+            <a:pPr algn="ctr"/>
+            <a:r>
+              <a:rPr lang="en-US"/>
+              <a:t>September 30, 2020</a:t>
+            </a:r>
+            <a:endParaRPr dirty="0" lang="en-US"/>
+          </a:p>
+        </p:txBody>
+      </p:sp>
+      <p:sp>
+        <p:nvSpPr>
+          <p:cNvPr id="8" name="Footer Placeholder 7">
+            <a:extLst>
+              <a:ext uri="{FF2B5EF4-FFF2-40B4-BE49-F238E27FC236}">
+                <a16:creationId xmlns:a16="http://schemas.microsoft.com/office/drawing/2014/main" id="{0616AEA6-DD6E-40D4-2DDA-E355C068ABA2}"/>
+              </a:ext>
+            </a:extLst>
+          </p:cNvPr>
+          <p:cNvSpPr>
+            <a:spLocks noGrp="1"/>
+          </p:cNvSpPr>
+          <p:nvPr>
+            <p:ph idx="11" sz="quarter" type="ftr"/>
+          </p:nvPr>
+        </p:nvSpPr>
+        <p:spPr/>
+        <p:txBody>
+          <a:bodyPr/>
+          <a:lstStyle/>
+          <a:p>
+            <a:r>
+              <a:rPr lang="en-US"/>
+              <a:t>© LMU Open Science Center</a:t>
+            </a:r>
+            <a:endParaRPr dirty="0" lang="en-US"/>
+          </a:p>
+        </p:txBody>
+      </p:sp>
+      <p:sp>
+        <p:nvSpPr>
+          <p:cNvPr id="9" name="Slide Number Placeholder 8">
+            <a:extLst>
+              <a:ext uri="{FF2B5EF4-FFF2-40B4-BE49-F238E27FC236}">
+                <a16:creationId xmlns:a16="http://schemas.microsoft.com/office/drawing/2014/main" id="{BD632E70-5D06-CAE0-ED30-149A6C1E3F1E}"/>
+              </a:ext>
+            </a:extLst>
+          </p:cNvPr>
+          <p:cNvSpPr>
+            <a:spLocks noGrp="1"/>
+          </p:cNvSpPr>
+          <p:nvPr>
+            <p:ph idx="12" sz="quarter" type="sldNum"/>
+          </p:nvPr>
+        </p:nvSpPr>
+        <p:spPr/>
+        <p:txBody>
+          <a:bodyPr/>
+          <a:lstStyle/>
+          <a:p>
+            <a:pPr algn="ctr"/>
+            <a:r>
+              <a:rPr lang="en-US"/>
+              <a:t>Slide </a:t>
+            </a:r>
+            <a:fld id="{C5EF2332-01BF-834F-8236-50238282D533}" type="slidenum">
+              <a:rPr lang="en-US" smtClean="0"/>
+              <a:pPr algn="ctr"/>
+              <a:t>‹#›</a:t>
+            </a:fld>
+            <a:endParaRPr dirty="0" lang="en-US"/>
+          </a:p>
+        </p:txBody>
+      </p:sp>
+    </p:spTree>
+  </p:cSld>
+</p:sld>
+</file>
+
+<file path=ppt/slides/slide8.xml><?xml version="1.0" encoding="utf-8"?>
+<p:sld xmlns:a="http://schemas.openxmlformats.org/drawingml/2006/main" xmlns:r="http://schemas.openxmlformats.org/officeDocument/2006/relationships" xmlns:p="http://schemas.openxmlformats.org/presentationml/2006/main">
+  <p:cSld>
+    <p:spTree>
+      <p:nvGrpSpPr>
+        <p:cNvPr id="1" name=""/>
+        <p:cNvGrpSpPr/>
+        <p:nvPr/>
+      </p:nvGrpSpPr>
+      <p:grpSpPr>
+        <a:xfrm>
+          <a:off x="0" y="0"/>
+          <a:ext cx="0" cy="0"/>
+          <a:chOff x="0" y="0"/>
+          <a:chExt cx="0" cy="0"/>
+        </a:xfrm>
+      </p:grpSpPr>
+      <p:sp>
+        <p:nvSpPr>
+          <p:cNvPr id="3" name="Content Placeholder 2"/>
+          <p:cNvSpPr>
+            <a:spLocks noGrp="1"/>
+          </p:cNvSpPr>
+          <p:nvPr>
+            <p:ph idx="1"/>
+          </p:nvPr>
+        </p:nvSpPr>
+        <p:spPr/>
+        <p:txBody>
+          <a:bodyPr/>
+          <a:lstStyle/>
+          <a:p>
+            <a:pPr lvl="0" indent="0" marL="0">
+              <a:buNone/>
+            </a:pPr>
+            <a:r>
+              <a:rPr b="1"/>
+              <a:t>What is your level of familiarity with citing and referencing scientific papers?</a:t>
+            </a:r>
+          </a:p>
+          <a:p>
+            <a:pPr lvl="0" indent="-457189" marL="457189">
+              <a:buAutoNum type="alphaLcPeriod"/>
+            </a:pPr>
+            <a:r>
+              <a:rPr/>
+              <a:t>I have never heard of it before.</a:t>
+            </a:r>
+          </a:p>
+          <a:p>
+            <a:pPr lvl="0" indent="-457189" marL="457189">
+              <a:buAutoNum type="alphaLcPeriod"/>
+            </a:pPr>
+            <a:r>
+              <a:rPr/>
+              <a:t>I have heard of it but have never worked with it.</a:t>
+            </a:r>
+          </a:p>
+          <a:p>
+            <a:pPr lvl="0" indent="-457189" marL="457189">
+              <a:buAutoNum type="alphaLcPeriod"/>
+            </a:pPr>
+            <a:r>
+              <a:rPr/>
+              <a:t>I have basic understanding and experience with it.</a:t>
+            </a:r>
+          </a:p>
+          <a:p>
+            <a:pPr lvl="0" indent="-457189" marL="457189">
+              <a:buAutoNum type="alphaLcPeriod"/>
+            </a:pPr>
+            <a:r>
+              <a:rPr/>
+              <a:t>I am very familiar and have worked with it extensively.</a:t>
+            </a:r>
+          </a:p>
+        </p:txBody>
+      </p:sp>
+      <p:sp>
+        <p:nvSpPr>
+          <p:cNvPr id="7" name="Date Placeholder 6">
+            <a:extLst>
+              <a:ext uri="{FF2B5EF4-FFF2-40B4-BE49-F238E27FC236}">
+                <a16:creationId xmlns:a16="http://schemas.microsoft.com/office/drawing/2014/main" id="{E2ED1F55-3CE9-F618-3510-EE96FDC54304}"/>
+              </a:ext>
+            </a:extLst>
+          </p:cNvPr>
+          <p:cNvSpPr>
+            <a:spLocks noGrp="1"/>
+          </p:cNvSpPr>
+          <p:nvPr>
+            <p:ph idx="10" sz="half" type="dt"/>
+          </p:nvPr>
+        </p:nvSpPr>
+        <p:spPr/>
+        <p:txBody>
+          <a:bodyPr/>
+          <a:lstStyle/>
+          <a:p>
+            <a:pPr algn="ctr"/>
+            <a:r>
+              <a:rPr lang="en-US"/>
+              <a:t>September 30, 2020</a:t>
+            </a:r>
+            <a:endParaRPr dirty="0" lang="en-US"/>
+          </a:p>
+        </p:txBody>
+      </p:sp>
+      <p:sp>
+        <p:nvSpPr>
+          <p:cNvPr id="8" name="Footer Placeholder 7">
+            <a:extLst>
+              <a:ext uri="{FF2B5EF4-FFF2-40B4-BE49-F238E27FC236}">
+                <a16:creationId xmlns:a16="http://schemas.microsoft.com/office/drawing/2014/main" id="{0616AEA6-DD6E-40D4-2DDA-E355C068ABA2}"/>
+              </a:ext>
+            </a:extLst>
+          </p:cNvPr>
+          <p:cNvSpPr>
+            <a:spLocks noGrp="1"/>
+          </p:cNvSpPr>
+          <p:nvPr>
+            <p:ph idx="11" sz="quarter" type="ftr"/>
+          </p:nvPr>
+        </p:nvSpPr>
+        <p:spPr/>
+        <p:txBody>
+          <a:bodyPr/>
+          <a:lstStyle/>
+          <a:p>
+            <a:r>
+              <a:rPr lang="en-US"/>
+              <a:t>© LMU Open Science Center</a:t>
+            </a:r>
+            <a:endParaRPr dirty="0" lang="en-US"/>
+          </a:p>
+        </p:txBody>
+      </p:sp>
+      <p:sp>
+        <p:nvSpPr>
+          <p:cNvPr id="9" name="Slide Number Placeholder 8">
+            <a:extLst>
+              <a:ext uri="{FF2B5EF4-FFF2-40B4-BE49-F238E27FC236}">
+                <a16:creationId xmlns:a16="http://schemas.microsoft.com/office/drawing/2014/main" id="{BD632E70-5D06-CAE0-ED30-149A6C1E3F1E}"/>
+              </a:ext>
+            </a:extLst>
+          </p:cNvPr>
+          <p:cNvSpPr>
+            <a:spLocks noGrp="1"/>
+          </p:cNvSpPr>
+          <p:nvPr>
+            <p:ph idx="12" sz="quarter" type="sldNum"/>
+          </p:nvPr>
+        </p:nvSpPr>
+        <p:spPr/>
+        <p:txBody>
+          <a:bodyPr/>
+          <a:lstStyle/>
+          <a:p>
+            <a:pPr algn="ctr"/>
+            <a:r>
+              <a:rPr lang="en-US"/>
+              <a:t>Slide </a:t>
+            </a:r>
+            <a:fld id="{C5EF2332-01BF-834F-8236-50238282D533}" type="slidenum">
+              <a:rPr lang="en-US" smtClean="0"/>
+              <a:pPr algn="ctr"/>
+              <a:t>‹#›</a:t>
+            </a:fld>
+            <a:endParaRPr dirty="0" lang="en-US"/>
+          </a:p>
+        </p:txBody>
+      </p:sp>
+    </p:spTree>
+  </p:cSld>
+  <p:timing>
+    <p:tnLst>
+      <p:par>
+        <p:cTn id="1" dur="indefinite" restart="never" nodeType="tmRoot">
+          <p:childTnLst>
+            <p:seq concurrent="1" nextAc="seek">
+              <p:cTn id="2" dur="indefinite" nodeType="mainSeq">
+                <p:childTnLst>
+                  <p:par>
+                    <p:cTn id="3" fill="hold">
+                      <p:stCondLst>
+                        <p:cond delay="indefinite"/>
+                      </p:stCondLst>
+                      <p:childTnLst>
+                        <p:par>
+                          <p:cTn id="4" fill="hold">
+                            <p:stCondLst>
+                              <p:cond delay="0"/>
+                            </p:stCondLst>
+                            <p:childTnLst>
+                              <p:par>
+                                <p:cTn id="5" presetID="1" presetClass="entr" presetSubtype="0" fill="hold" grpId="0" nodeType="clickEffect">
+                                  <p:stCondLst>
+                                    <p:cond delay="0"/>
+                                  </p:stCondLst>
+                                  <p:childTnLst>
+                                    <p:set>
+                                      <p:cBhvr>
+                                        <p:cTn id="6" dur="1" fill="hold">
+                                          <p:stCondLst>
+                                            <p:cond delay="0"/>
+                                          </p:stCondLst>
+                                        </p:cTn>
+                                        <p:tgtEl>
+                                          <p:spTgt spid="3">
+                                            <p:txEl>
+                                              <p:pRg st="1" end="1"/>
+                                            </p:txEl>
+                                          </p:spTgt>
+                                        </p:tgtEl>
+                                        <p:attrNameLst>
+                                          <p:attrName>style.visibility</p:attrName>
+                                        </p:attrNameLst>
+                                      </p:cBhvr>
+                                      <p:to>
+                                        <p:strVal val="visible"/>
+                                      </p:to>
+                                    </p:set>
+                                  </p:childTnLst>
+                                </p:cTn>
+                              </p:par>
+                            </p:childTnLst>
+                          </p:cTn>
+                        </p:par>
+                      </p:childTnLst>
+                    </p:cTn>
+                  </p:par>
+                  <p:par>
+                    <p:cTn id="7" fill="hold">
+                      <p:stCondLst>
+                        <p:cond delay="indefinite"/>
+                      </p:stCondLst>
+                      <p:childTnLst>
+                        <p:par>
+                          <p:cTn id="8" fill="hold">
+                            <p:stCondLst>
+                              <p:cond delay="0"/>
+                            </p:stCondLst>
+                            <p:childTnLst>
+                              <p:par>
+                                <p:cTn id="9" presetID="1" presetClass="entr" presetSubtype="0" fill="hold" grpId="0" nodeType="clickEffect">
+                                  <p:stCondLst>
+                                    <p:cond delay="0"/>
+                                  </p:stCondLst>
+                                  <p:childTnLst>
+                                    <p:set>
+                                      <p:cBhvr>
+                                        <p:cTn id="10" dur="1" fill="hold">
+                                          <p:stCondLst>
+                                            <p:cond delay="0"/>
+                                          </p:stCondLst>
+                                        </p:cTn>
+                                        <p:tgtEl>
+                                          <p:spTgt spid="3">
+                                            <p:txEl>
+                                              <p:pRg st="2" end="2"/>
+                                            </p:txEl>
+                                          </p:spTgt>
+                                        </p:tgtEl>
+                                        <p:attrNameLst>
+                                          <p:attrName>style.visibility</p:attrName>
+                                        </p:attrNameLst>
+                                      </p:cBhvr>
+                                      <p:to>
+                                        <p:strVal val="visible"/>
+                                      </p:to>
+                                    </p:set>
+                                  </p:childTnLst>
+                                </p:cTn>
+                              </p:par>
+                            </p:childTnLst>
+                          </p:cTn>
+                        </p:par>
+                      </p:childTnLst>
+                    </p:cTn>
+                  </p:par>
+                  <p:par>
+                    <p:cTn id="11" fill="hold">
+                      <p:stCondLst>
+                        <p:cond delay="indefinite"/>
+                      </p:stCondLst>
+                      <p:childTnLst>
+                        <p:par>
+                          <p:cTn id="12" fill="hold">
+                            <p:stCondLst>
+                              <p:cond delay="0"/>
+                            </p:stCondLst>
+                            <p:childTnLst>
+                              <p:par>
+                                <p:cTn id="13" presetID="1" presetClass="entr" presetSubtype="0" fill="hold" grpId="0" nodeType="clickEffect">
+                                  <p:stCondLst>
+                                    <p:cond delay="0"/>
+                                  </p:stCondLst>
+                                  <p:childTnLst>
+                                    <p:set>
+                                      <p:cBhvr>
+                                        <p:cTn id="14" dur="1" fill="hold">
+                                          <p:stCondLst>
+                                            <p:cond delay="0"/>
+                                          </p:stCondLst>
+                                        </p:cTn>
+                                        <p:tgtEl>
+                                          <p:spTgt spid="3">
+                                            <p:txEl>
+                                              <p:pRg st="3" end="3"/>
+                                            </p:txEl>
+                                          </p:spTgt>
+                                        </p:tgtEl>
+                                        <p:attrNameLst>
+                                          <p:attrName>style.visibility</p:attrName>
+                                        </p:attrNameLst>
+                                      </p:cBhvr>
+                                      <p:to>
+                                        <p:strVal val="visible"/>
+                                      </p:to>
+                                    </p:set>
+                                  </p:childTnLst>
+                                </p:cTn>
+                              </p:par>
+                            </p:childTnLst>
+                          </p:cTn>
+                        </p:par>
+                      </p:childTnLst>
+                    </p:cTn>
+                  </p:par>
+                  <p:par>
+                    <p:cTn id="15" fill="hold">
+                      <p:stCondLst>
+                        <p:cond delay="indefinite"/>
+                      </p:stCondLst>
+                      <p:childTnLst>
+                        <p:par>
+                          <p:cTn id="16" fill="hold">
+                            <p:stCondLst>
+                              <p:cond delay="0"/>
+                            </p:stCondLst>
+                            <p:childTnLst>
+                              <p:par>
+                                <p:cTn id="17" presetID="1" presetClass="entr" presetSubtype="0" fill="hold" grpId="0" nodeType="clickEffect">
+                                  <p:stCondLst>
+                                    <p:cond delay="0"/>
+                                  </p:stCondLst>
+                                  <p:childTnLst>
+                                    <p:set>
+                                      <p:cBhvr>
+                                        <p:cTn id="18" dur="1" fill="hold">
+                                          <p:stCondLst>
+                                            <p:cond delay="0"/>
+                                          </p:stCondLst>
+                                        </p:cTn>
+                                        <p:tgtEl>
+                                          <p:spTgt spid="3">
+                                            <p:txEl>
+                                              <p:pRg st="4" end="4"/>
+                                            </p:txEl>
+                                          </p:spTgt>
+                                        </p:tgtEl>
+                                        <p:attrNameLst>
+                                          <p:attrName>style.visibility</p:attrName>
+                                        </p:attrNameLst>
+                                      </p:cBhvr>
+                                      <p:to>
+                                        <p:strVal val="visible"/>
+                                      </p:to>
+                                    </p:set>
+                                  </p:childTnLst>
+                                </p:cTn>
+                              </p:par>
+                            </p:childTnLst>
+                          </p:cTn>
+                        </p:par>
+                      </p:childTnLst>
+                    </p:cTn>
+                  </p:par>
+                </p:childTnLst>
+              </p:cTn>
+              <p:prevCondLst>
+                <p:cond evt="onPrev" delay="0">
+                  <p:tgtEl>
+                    <p:sldTgt/>
+                  </p:tgtEl>
+                </p:cond>
+              </p:prevCondLst>
+              <p:nextCondLst>
+                <p:cond evt="onNext" delay="0">
+                  <p:tgtEl>
+                    <p:sldTgt/>
+                  </p:tgtEl>
+                </p:cond>
+              </p:nextCondLst>
+            </p:seq>
+          </p:childTnLst>
+        </p:cTn>
+      </p:par>
+    </p:tnLst>
+    <p:bldLst>
+      <p:bldP spid="3" grpId="0" uiExpand="1" build="p"/>
+    </p:bldLst>
+  </p:timing>
+</p:sld>
+</file>
+
+<file path=ppt/slides/slide9.xml><?xml version="1.0" encoding="utf-8"?>
+<p:sld xmlns:a="http://schemas.openxmlformats.org/drawingml/2006/main" xmlns:r="http://schemas.openxmlformats.org/officeDocument/2006/relationships" xmlns:p="http://schemas.openxmlformats.org/presentationml/2006/main">
+  <p:cSld>
+    <p:spTree>
+      <p:nvGrpSpPr>
+        <p:cNvPr id="1" name=""/>
+        <p:cNvGrpSpPr/>
+        <p:nvPr/>
+      </p:nvGrpSpPr>
+      <p:grpSpPr>
+        <a:xfrm>
+          <a:off x="0" y="0"/>
+          <a:ext cx="0" cy="0"/>
+          <a:chOff x="0" y="0"/>
+          <a:chExt cx="0" cy="0"/>
+        </a:xfrm>
+      </p:grpSpPr>
+      <p:sp>
+        <p:nvSpPr>
+          <p:cNvPr id="3" name="Content Placeholder 2"/>
+          <p:cNvSpPr>
+            <a:spLocks noGrp="1"/>
+          </p:cNvSpPr>
+          <p:nvPr>
+            <p:ph idx="1"/>
+          </p:nvPr>
+        </p:nvSpPr>
+        <p:spPr/>
+        <p:txBody>
+          <a:bodyPr/>
+          <a:lstStyle/>
+          <a:p>
+            <a:pPr lvl="0" indent="0" marL="0">
+              <a:buNone/>
+            </a:pPr>
+            <a:r>
+              <a:rPr b="1"/>
+              <a:t>How confident do you feel with the Zotero workflow of collection, organisation, and citing?</a:t>
+            </a:r>
+            <a:r>
+              <a:rPr/>
+              <a:t> </a:t>
+            </a:r>
+            <a:r>
+              <a:rPr i="1"/>
+              <a:t>(1 = Not confident at all, 5 = Very confident)</a:t>
+            </a:r>
+          </a:p>
+          <a:p>
+            <a:pPr lvl="0" indent="-457189" marL="457189">
+              <a:buAutoNum type="alphaLcPeriod"/>
+            </a:pPr>
+            <a:r>
+              <a:rPr/>
+              <a:t>1</a:t>
+            </a:r>
+          </a:p>
+          <a:p>
+            <a:pPr lvl="0" indent="-457189" marL="457189">
+              <a:buAutoNum type="alphaLcPeriod"/>
+            </a:pPr>
+            <a:r>
+              <a:rPr/>
+              <a:t>2</a:t>
+            </a:r>
+          </a:p>
+          <a:p>
+            <a:pPr lvl="0" indent="-457189" marL="457189">
+              <a:buAutoNum type="alphaLcPeriod"/>
+            </a:pPr>
+            <a:r>
+              <a:rPr/>
+              <a:t>3</a:t>
+            </a:r>
+          </a:p>
+          <a:p>
+            <a:pPr lvl="0" indent="-457189" marL="457189">
+              <a:buAutoNum type="alphaLcPeriod"/>
+            </a:pPr>
+            <a:r>
+              <a:rPr/>
+              <a:t>4</a:t>
+            </a:r>
+          </a:p>
+          <a:p>
+            <a:pPr lvl="0" indent="-457189" marL="457189">
+              <a:buAutoNum type="alphaLcPeriod"/>
+            </a:pPr>
+            <a:r>
+              <a:rPr/>
+              <a:t>5</a:t>
+            </a:r>
+          </a:p>
+        </p:txBody>
+      </p:sp>
+      <p:sp>
+        <p:nvSpPr>
+          <p:cNvPr id="7" name="Date Placeholder 6">
+            <a:extLst>
+              <a:ext uri="{FF2B5EF4-FFF2-40B4-BE49-F238E27FC236}">
+                <a16:creationId xmlns:a16="http://schemas.microsoft.com/office/drawing/2014/main" id="{E2ED1F55-3CE9-F618-3510-EE96FDC54304}"/>
+              </a:ext>
+            </a:extLst>
+          </p:cNvPr>
+          <p:cNvSpPr>
+            <a:spLocks noGrp="1"/>
+          </p:cNvSpPr>
+          <p:nvPr>
+            <p:ph idx="10" sz="half" type="dt"/>
+          </p:nvPr>
+        </p:nvSpPr>
+        <p:spPr/>
+        <p:txBody>
+          <a:bodyPr/>
+          <a:lstStyle/>
+          <a:p>
+            <a:pPr algn="ctr"/>
+            <a:r>
+              <a:rPr lang="en-US"/>
+              <a:t>September 30, 2020</a:t>
+            </a:r>
+            <a:endParaRPr dirty="0" lang="en-US"/>
+          </a:p>
+        </p:txBody>
+      </p:sp>
+      <p:sp>
+        <p:nvSpPr>
+          <p:cNvPr id="8" name="Footer Placeholder 7">
+            <a:extLst>
+              <a:ext uri="{FF2B5EF4-FFF2-40B4-BE49-F238E27FC236}">
+                <a16:creationId xmlns:a16="http://schemas.microsoft.com/office/drawing/2014/main" id="{0616AEA6-DD6E-40D4-2DDA-E355C068ABA2}"/>
+              </a:ext>
+            </a:extLst>
+          </p:cNvPr>
+          <p:cNvSpPr>
+            <a:spLocks noGrp="1"/>
+          </p:cNvSpPr>
+          <p:nvPr>
+            <p:ph idx="11" sz="quarter" type="ftr"/>
+          </p:nvPr>
+        </p:nvSpPr>
+        <p:spPr/>
+        <p:txBody>
+          <a:bodyPr/>
+          <a:lstStyle/>
+          <a:p>
+            <a:r>
+              <a:rPr lang="en-US"/>
+              <a:t>© LMU Open Science Center</a:t>
+            </a:r>
+            <a:endParaRPr dirty="0" lang="en-US"/>
+          </a:p>
+        </p:txBody>
+      </p:sp>
+      <p:sp>
+        <p:nvSpPr>
+          <p:cNvPr id="9" name="Slide Number Placeholder 8">
+            <a:extLst>
+              <a:ext uri="{FF2B5EF4-FFF2-40B4-BE49-F238E27FC236}">
+                <a16:creationId xmlns:a16="http://schemas.microsoft.com/office/drawing/2014/main" id="{BD632E70-5D06-CAE0-ED30-149A6C1E3F1E}"/>
+              </a:ext>
+            </a:extLst>
+          </p:cNvPr>
+          <p:cNvSpPr>
+            <a:spLocks noGrp="1"/>
+          </p:cNvSpPr>
+          <p:nvPr>
+            <p:ph idx="12" sz="quarter" type="sldNum"/>
+          </p:nvPr>
+        </p:nvSpPr>
+        <p:spPr/>
+        <p:txBody>
+          <a:bodyPr/>
+          <a:lstStyle/>
+          <a:p>
+            <a:pPr algn="ctr"/>
+            <a:r>
+              <a:rPr lang="en-US"/>
+              <a:t>Slide </a:t>
+            </a:r>
+            <a:fld id="{C5EF2332-01BF-834F-8236-50238282D533}" type="slidenum">
+              <a:rPr lang="en-US" smtClean="0"/>
+              <a:pPr algn="ctr"/>
+              <a:t>‹#›</a:t>
+            </a:fld>
+            <a:endParaRPr dirty="0" lang="en-US"/>
+          </a:p>
+        </p:txBody>
+      </p:sp>
+    </p:spTree>
+  </p:cSld>
+  <p:timing>
+    <p:tnLst>
+      <p:par>
+        <p:cTn id="1" dur="indefinite" restart="never" nodeType="tmRoot">
+          <p:childTnLst>
+            <p:seq concurrent="1" nextAc="seek">
+              <p:cTn id="2" dur="indefinite" nodeType="mainSeq">
+                <p:childTnLst>
+                  <p:par>
+                    <p:cTn id="3" fill="hold">
+                      <p:stCondLst>
+                        <p:cond delay="indefinite"/>
+                      </p:stCondLst>
+                      <p:childTnLst>
+                        <p:par>
+                          <p:cTn id="4" fill="hold">
+                            <p:stCondLst>
+                              <p:cond delay="0"/>
+                            </p:stCondLst>
+                            <p:childTnLst>
+                              <p:par>
+                                <p:cTn id="5" presetID="1" presetClass="entr" presetSubtype="0" fill="hold" grpId="0" nodeType="clickEffect">
+                                  <p:stCondLst>
+                                    <p:cond delay="0"/>
+                                  </p:stCondLst>
+                                  <p:childTnLst>
+                                    <p:set>
+                                      <p:cBhvr>
+                                        <p:cTn id="6" dur="1" fill="hold">
+                                          <p:stCondLst>
+                                            <p:cond delay="0"/>
+                                          </p:stCondLst>
+                                        </p:cTn>
+                                        <p:tgtEl>
+                                          <p:spTgt spid="3">
+                                            <p:txEl>
+                                              <p:pRg st="1" end="1"/>
+                                            </p:txEl>
+                                          </p:spTgt>
+                                        </p:tgtEl>
+                                        <p:attrNameLst>
+                                          <p:attrName>style.visibility</p:attrName>
+                                        </p:attrNameLst>
+                                      </p:cBhvr>
+                                      <p:to>
+                                        <p:strVal val="visible"/>
+                                      </p:to>
+                                    </p:set>
+                                  </p:childTnLst>
+                                </p:cTn>
+                              </p:par>
+                            </p:childTnLst>
+                          </p:cTn>
+                        </p:par>
+                      </p:childTnLst>
+                    </p:cTn>
+                  </p:par>
+                  <p:par>
+                    <p:cTn id="7" fill="hold">
+                      <p:stCondLst>
+                        <p:cond delay="indefinite"/>
+                      </p:stCondLst>
+                      <p:childTnLst>
+                        <p:par>
+                          <p:cTn id="8" fill="hold">
+                            <p:stCondLst>
+                              <p:cond delay="0"/>
+                            </p:stCondLst>
+                            <p:childTnLst>
+                              <p:par>
+                                <p:cTn id="9" presetID="1" presetClass="entr" presetSubtype="0" fill="hold" grpId="0" nodeType="clickEffect">
+                                  <p:stCondLst>
+                                    <p:cond delay="0"/>
+                                  </p:stCondLst>
+                                  <p:childTnLst>
+                                    <p:set>
+                                      <p:cBhvr>
+                                        <p:cTn id="10" dur="1" fill="hold">
+                                          <p:stCondLst>
+                                            <p:cond delay="0"/>
+                                          </p:stCondLst>
+                                        </p:cTn>
+                                        <p:tgtEl>
+                                          <p:spTgt spid="3">
+                                            <p:txEl>
+                                              <p:pRg st="2" end="2"/>
+                                            </p:txEl>
+                                          </p:spTgt>
+                                        </p:tgtEl>
+                                        <p:attrNameLst>
+                                          <p:attrName>style.visibility</p:attrName>
+                                        </p:attrNameLst>
+                                      </p:cBhvr>
+                                      <p:to>
+                                        <p:strVal val="visible"/>
+                                      </p:to>
+                                    </p:set>
+                                  </p:childTnLst>
+                                </p:cTn>
+                              </p:par>
+                            </p:childTnLst>
+                          </p:cTn>
+                        </p:par>
+                      </p:childTnLst>
+                    </p:cTn>
+                  </p:par>
+                  <p:par>
+                    <p:cTn id="11" fill="hold">
+                      <p:stCondLst>
+                        <p:cond delay="indefinite"/>
+                      </p:stCondLst>
+                      <p:childTnLst>
+                        <p:par>
+                          <p:cTn id="12" fill="hold">
+                            <p:stCondLst>
+                              <p:cond delay="0"/>
+                            </p:stCondLst>
+                            <p:childTnLst>
+                              <p:par>
+                                <p:cTn id="13" presetID="1" presetClass="entr" presetSubtype="0" fill="hold" grpId="0" nodeType="clickEffect">
+                                  <p:stCondLst>
+                                    <p:cond delay="0"/>
+                                  </p:stCondLst>
+                                  <p:childTnLst>
+                                    <p:set>
+                                      <p:cBhvr>
+                                        <p:cTn id="14" dur="1" fill="hold">
+                                          <p:stCondLst>
+                                            <p:cond delay="0"/>
+                                          </p:stCondLst>
+                                        </p:cTn>
+                                        <p:tgtEl>
+                                          <p:spTgt spid="3">
+                                            <p:txEl>
+                                              <p:pRg st="3" end="3"/>
+                                            </p:txEl>
+                                          </p:spTgt>
+                                        </p:tgtEl>
+                                        <p:attrNameLst>
+                                          <p:attrName>style.visibility</p:attrName>
+                                        </p:attrNameLst>
+                                      </p:cBhvr>
+                                      <p:to>
+                                        <p:strVal val="visible"/>
+                                      </p:to>
+                                    </p:set>
+                                  </p:childTnLst>
+                                </p:cTn>
+                              </p:par>
+                            </p:childTnLst>
+                          </p:cTn>
+                        </p:par>
+                      </p:childTnLst>
+                    </p:cTn>
+                  </p:par>
+                  <p:par>
+                    <p:cTn id="15" fill="hold">
+                      <p:stCondLst>
+                        <p:cond delay="indefinite"/>
+                      </p:stCondLst>
+                      <p:childTnLst>
+                        <p:par>
+                          <p:cTn id="16" fill="hold">
+                            <p:stCondLst>
+                              <p:cond delay="0"/>
+                            </p:stCondLst>
+                            <p:childTnLst>
+                              <p:par>
+                                <p:cTn id="17" presetID="1" presetClass="entr" presetSubtype="0" fill="hold" grpId="0" nodeType="clickEffect">
+                                  <p:stCondLst>
+                                    <p:cond delay="0"/>
+                                  </p:stCondLst>
+                                  <p:childTnLst>
+                                    <p:set>
+                                      <p:cBhvr>
+                                        <p:cTn id="18" dur="1" fill="hold">
+                                          <p:stCondLst>
+                                            <p:cond delay="0"/>
+                                          </p:stCondLst>
+                                        </p:cTn>
+                                        <p:tgtEl>
+                                          <p:spTgt spid="3">
+                                            <p:txEl>
+                                              <p:pRg st="4" end="4"/>
+                                            </p:txEl>
+                                          </p:spTgt>
+                                        </p:tgtEl>
+                                        <p:attrNameLst>
+                                          <p:attrName>style.visibility</p:attrName>
+                                        </p:attrNameLst>
+                                      </p:cBhvr>
+                                      <p:to>
+                                        <p:strVal val="visible"/>
+                                      </p:to>
+                                    </p:set>
+                                  </p:childTnLst>
+                                </p:cTn>
+                              </p:par>
+                            </p:childTnLst>
+                          </p:cTn>
+                        </p:par>
+                      </p:childTnLst>
+                    </p:cTn>
+                  </p:par>
+                  <p:par>
+                    <p:cTn id="19" fill="hold">
+                      <p:stCondLst>
+                        <p:cond delay="indefinite"/>
+                      </p:stCondLst>
+                      <p:childTnLst>
+                        <p:par>
+                          <p:cTn id="20" fill="hold">
+                            <p:stCondLst>
+                              <p:cond delay="0"/>
+                            </p:stCondLst>
+                            <p:childTnLst>
+                              <p:par>
+                                <p:cTn id="21" presetID="1" presetClass="entr" presetSubtype="0" fill="hold" grpId="0" nodeType="clickEffect">
+                                  <p:stCondLst>
+                                    <p:cond delay="0"/>
+                                  </p:stCondLst>
+                                  <p:childTnLst>
+                                    <p:set>
+                                      <p:cBhvr>
+                                        <p:cTn id="22" dur="1" fill="hold">
+                                          <p:stCondLst>
+                                            <p:cond delay="0"/>
+                                          </p:stCondLst>
+                                        </p:cTn>
+                                        <p:tgtEl>
+                                          <p:spTgt spid="3">
+                                            <p:txEl>
+                                              <p:pRg st="5" end="5"/>
+                                            </p:txEl>
+                                          </p:spTgt>
+                                        </p:tgtEl>
+                                        <p:attrNameLst>
+                                          <p:attrName>style.visibility</p:attrName>
+                                        </p:attrNameLst>
+                                      </p:cBhvr>
+                                      <p:to>
+                                        <p:strVal val="visible"/>
+                                      </p:to>
+                                    </p:set>
+                                  </p:childTnLst>
+                                </p:cTn>
+                              </p:par>
+                            </p:childTnLst>
+                          </p:cTn>
+                        </p:par>
+                      </p:childTnLst>
+                    </p:cTn>
+                  </p:par>
+                </p:childTnLst>
+              </p:cTn>
+              <p:prevCondLst>
+                <p:cond evt="onPrev" delay="0">
+                  <p:tgtEl>
+                    <p:sldTgt/>
+                  </p:tgtEl>
+                </p:cond>
+              </p:prevCondLst>
+              <p:nextCondLst>
+                <p:cond evt="onNext" delay="0">
+                  <p:tgtEl>
+                    <p:sldTgt/>
+                  </p:tgtEl>
+                </p:cond>
+              </p:nextCondLst>
+            </p:seq>
+          </p:childTnLst>
+        </p:cTn>
+      </p:par>
+    </p:tnLst>
+    <p:bldLst>
+      <p:bldP spid="3" grpId="0" uiExpand="1" build="p"/>
+    </p:bldLst>
+  </p:timing>
 </p:sld>
 </file>
 

--- a/working-output.pptx
+++ b/working-output.pptx
@@ -7920,10 +7920,10 @@
       </p:sp>
       <p:pic>
         <p:nvPicPr>
-          <p:cNvPr id="8" name="Graphic 7">
+          <p:cNvPr id="7" name="Graphic 6">
             <a:extLst>
               <a:ext uri="{FF2B5EF4-FFF2-40B4-BE49-F238E27FC236}">
-                <a16:creationId xmlns:a16="http://schemas.microsoft.com/office/drawing/2014/main" id="{7F87F00D-71B3-247C-7322-26988D4CF4AC}"/>
+                <a16:creationId xmlns:a16="http://schemas.microsoft.com/office/drawing/2014/main" id="{30C9838F-E9D5-154A-4897-DCE30A8465B5}"/>
               </a:ext>
             </a:extLst>
           </p:cNvPr>
@@ -7946,7 +7946,7 @@
         </p:blipFill>
         <p:spPr>
           <a:xfrm>
-            <a:off x="10845371" y="6300321"/>
+            <a:off x="203200" y="6300320"/>
             <a:ext cx="1143429" cy="428785"/>
           </a:xfrm>
           <a:prstGeom prst="rect">

--- a/working-output.pptx
+++ b/working-output.pptx
@@ -6652,7 +6652,7 @@
           <a:lstStyle/>
           <a:p>
             <a:r>
-              <a:rPr lang="en-US"/>
+              <a:rPr lang="en-US" dirty="0"/>
               <a:t>Click to edit Master title style</a:t>
             </a:r>
           </a:p>
@@ -7054,7 +7054,7 @@
           </a:xfrm>
         </p:spPr>
         <p:txBody>
-          <a:bodyPr/>
+          <a:bodyPr anchor="ctr"/>
           <a:lstStyle>
             <a:lvl1pPr>
               <a:defRPr sz="3200"/>
@@ -7087,35 +7087,35 @@
           <a:p>
             <a:pPr lvl="0"/>
             <a:r>
-              <a:rPr lang="en-US"/>
+              <a:rPr lang="en-US" dirty="0"/>
               <a:t>Click to edit Master text styles</a:t>
             </a:r>
           </a:p>
           <a:p>
             <a:pPr lvl="1"/>
             <a:r>
-              <a:rPr lang="en-US"/>
+              <a:rPr lang="en-US" dirty="0"/>
               <a:t>Second level</a:t>
             </a:r>
           </a:p>
           <a:p>
             <a:pPr lvl="2"/>
             <a:r>
-              <a:rPr lang="en-US"/>
+              <a:rPr lang="en-US" dirty="0"/>
               <a:t>Third level</a:t>
             </a:r>
           </a:p>
           <a:p>
             <a:pPr lvl="3"/>
             <a:r>
-              <a:rPr lang="en-US"/>
+              <a:rPr lang="en-US" dirty="0"/>
               <a:t>Fourth level</a:t>
             </a:r>
           </a:p>
           <a:p>
             <a:pPr lvl="4"/>
             <a:r>
-              <a:rPr lang="en-US"/>
+              <a:rPr lang="en-US" dirty="0"/>
               <a:t>Fifth level</a:t>
             </a:r>
           </a:p>
@@ -7983,7 +7983,7 @@
           <a:spcPct val="0"/>
         </a:spcBef>
         <a:buNone/>
-        <a:defRPr b="1" i="0" kern="1200" sz="3733">
+        <a:defRPr b="1" i="0" kern="1200" sz="3200">
           <a:solidFill>
             <a:schemeClr val="tx1"/>
           </a:solidFill>
